--- a/course/3d_slides_w2.pptx
+++ b/course/3d_slides_w2.pptx
@@ -270,7 +270,7 @@
           <a:p>
             <a:fld id="{64F484BD-A9A3-4CBB-88D6-39267B7F5B46}" type="datetimeFigureOut">
               <a:rPr lang="en-BE" smtClean="0"/>
-              <a:t>19/02/2025</a:t>
+              <a:t>28/03/2025</a:t>
             </a:fld>
             <a:endParaRPr lang="en-BE"/>
           </a:p>
@@ -536,6 +536,6582 @@
     </a:lvl9pPr>
   </p:notesStyle>
 </p:notesMaster>
+</file>
+
+<file path=ppt/notesSlides/notesSlide1.xml><?xml version="1.0" encoding="utf-8"?>
+<p:notes xmlns:a="http://schemas.openxmlformats.org/drawingml/2006/main" xmlns:r="http://schemas.openxmlformats.org/officeDocument/2006/relationships" xmlns:p="http://schemas.openxmlformats.org/presentationml/2006/main">
+  <p:cSld>
+    <p:spTree>
+      <p:nvGrpSpPr>
+        <p:cNvPr id="1" name=""/>
+        <p:cNvGrpSpPr/>
+        <p:nvPr/>
+      </p:nvGrpSpPr>
+      <p:grpSpPr>
+        <a:xfrm>
+          <a:off x="0" y="0"/>
+          <a:ext cx="0" cy="0"/>
+          <a:chOff x="0" y="0"/>
+          <a:chExt cx="0" cy="0"/>
+        </a:xfrm>
+      </p:grpSpPr>
+      <p:sp>
+        <p:nvSpPr>
+          <p:cNvPr id="2" name="Slide Image Placeholder 1"/>
+          <p:cNvSpPr>
+            <a:spLocks noGrp="1" noRot="1" noChangeAspect="1"/>
+          </p:cNvSpPr>
+          <p:nvPr>
+            <p:ph type="sldImg"/>
+          </p:nvPr>
+        </p:nvSpPr>
+        <p:spPr/>
+      </p:sp>
+      <p:sp>
+        <p:nvSpPr>
+          <p:cNvPr id="3" name="Notes Placeholder 2"/>
+          <p:cNvSpPr>
+            <a:spLocks noGrp="1"/>
+          </p:cNvSpPr>
+          <p:nvPr>
+            <p:ph type="body" idx="1"/>
+          </p:nvPr>
+        </p:nvSpPr>
+        <p:spPr/>
+        <p:txBody>
+          <a:bodyPr/>
+          <a:lstStyle/>
+          <a:p>
+            <a:endParaRPr lang="en-BE"/>
+          </a:p>
+        </p:txBody>
+      </p:sp>
+      <p:sp>
+        <p:nvSpPr>
+          <p:cNvPr id="4" name="Slide Number Placeholder 3"/>
+          <p:cNvSpPr>
+            <a:spLocks noGrp="1"/>
+          </p:cNvSpPr>
+          <p:nvPr>
+            <p:ph type="sldNum" sz="quarter" idx="5"/>
+          </p:nvPr>
+        </p:nvSpPr>
+        <p:spPr/>
+        <p:txBody>
+          <a:bodyPr/>
+          <a:lstStyle/>
+          <a:p>
+            <a:fld id="{947F9D2B-EF00-4575-9013-113DEEFD58FD}" type="slidenum">
+              <a:rPr lang="en-BE" smtClean="0"/>
+              <a:t>1</a:t>
+            </a:fld>
+            <a:endParaRPr lang="en-BE"/>
+          </a:p>
+        </p:txBody>
+      </p:sp>
+    </p:spTree>
+    <p:extLst>
+      <p:ext uri="{BB962C8B-B14F-4D97-AF65-F5344CB8AC3E}">
+        <p14:creationId xmlns:p14="http://schemas.microsoft.com/office/powerpoint/2010/main" val="1069113552"/>
+      </p:ext>
+    </p:extLst>
+  </p:cSld>
+  <p:clrMapOvr>
+    <a:masterClrMapping/>
+  </p:clrMapOvr>
+</p:notes>
+</file>
+
+<file path=ppt/notesSlides/notesSlide10.xml><?xml version="1.0" encoding="utf-8"?>
+<p:notes xmlns:a="http://schemas.openxmlformats.org/drawingml/2006/main" xmlns:r="http://schemas.openxmlformats.org/officeDocument/2006/relationships" xmlns:p="http://schemas.openxmlformats.org/presentationml/2006/main">
+  <p:cSld>
+    <p:spTree>
+      <p:nvGrpSpPr>
+        <p:cNvPr id="1" name=""/>
+        <p:cNvGrpSpPr/>
+        <p:nvPr/>
+      </p:nvGrpSpPr>
+      <p:grpSpPr>
+        <a:xfrm>
+          <a:off x="0" y="0"/>
+          <a:ext cx="0" cy="0"/>
+          <a:chOff x="0" y="0"/>
+          <a:chExt cx="0" cy="0"/>
+        </a:xfrm>
+      </p:grpSpPr>
+      <p:sp>
+        <p:nvSpPr>
+          <p:cNvPr id="2" name="Slide Image Placeholder 1"/>
+          <p:cNvSpPr>
+            <a:spLocks noGrp="1" noRot="1" noChangeAspect="1"/>
+          </p:cNvSpPr>
+          <p:nvPr>
+            <p:ph type="sldImg"/>
+          </p:nvPr>
+        </p:nvSpPr>
+        <p:spPr/>
+      </p:sp>
+      <p:sp>
+        <p:nvSpPr>
+          <p:cNvPr id="3" name="Notes Placeholder 2"/>
+          <p:cNvSpPr>
+            <a:spLocks noGrp="1"/>
+          </p:cNvSpPr>
+          <p:nvPr>
+            <p:ph type="body" idx="1"/>
+          </p:nvPr>
+        </p:nvSpPr>
+        <p:spPr/>
+        <p:txBody>
+          <a:bodyPr/>
+          <a:lstStyle/>
+          <a:p>
+            <a:r>
+              <a:rPr lang="en-US" dirty="0"/>
+              <a:t>This slides just clarifies unity </a:t>
+            </a:r>
+            <a:r>
+              <a:rPr lang="en-US" dirty="0" err="1"/>
+              <a:t>terminogy</a:t>
+            </a:r>
+            <a:endParaRPr lang="en-US" dirty="0"/>
+          </a:p>
+          <a:p>
+            <a:r>
+              <a:rPr lang="en-US" dirty="0"/>
+              <a:t>A ScriptComponent is a component that exists out of code, and is where you’ll spend most of your time</a:t>
+            </a:r>
+            <a:endParaRPr lang="en-BE" dirty="0"/>
+          </a:p>
+        </p:txBody>
+      </p:sp>
+      <p:sp>
+        <p:nvSpPr>
+          <p:cNvPr id="4" name="Slide Number Placeholder 3"/>
+          <p:cNvSpPr>
+            <a:spLocks noGrp="1"/>
+          </p:cNvSpPr>
+          <p:nvPr>
+            <p:ph type="sldNum" sz="quarter" idx="5"/>
+          </p:nvPr>
+        </p:nvSpPr>
+        <p:spPr/>
+        <p:txBody>
+          <a:bodyPr/>
+          <a:lstStyle/>
+          <a:p>
+            <a:fld id="{947F9D2B-EF00-4575-9013-113DEEFD58FD}" type="slidenum">
+              <a:rPr lang="en-BE" smtClean="0"/>
+              <a:t>10</a:t>
+            </a:fld>
+            <a:endParaRPr lang="en-BE"/>
+          </a:p>
+        </p:txBody>
+      </p:sp>
+    </p:spTree>
+    <p:extLst>
+      <p:ext uri="{BB962C8B-B14F-4D97-AF65-F5344CB8AC3E}">
+        <p14:creationId xmlns:p14="http://schemas.microsoft.com/office/powerpoint/2010/main" val="2872917106"/>
+      </p:ext>
+    </p:extLst>
+  </p:cSld>
+  <p:clrMapOvr>
+    <a:masterClrMapping/>
+  </p:clrMapOvr>
+</p:notes>
+</file>
+
+<file path=ppt/notesSlides/notesSlide11.xml><?xml version="1.0" encoding="utf-8"?>
+<p:notes xmlns:a="http://schemas.openxmlformats.org/drawingml/2006/main" xmlns:r="http://schemas.openxmlformats.org/officeDocument/2006/relationships" xmlns:p="http://schemas.openxmlformats.org/presentationml/2006/main">
+  <p:cSld>
+    <p:spTree>
+      <p:nvGrpSpPr>
+        <p:cNvPr id="1" name=""/>
+        <p:cNvGrpSpPr/>
+        <p:nvPr/>
+      </p:nvGrpSpPr>
+      <p:grpSpPr>
+        <a:xfrm>
+          <a:off x="0" y="0"/>
+          <a:ext cx="0" cy="0"/>
+          <a:chOff x="0" y="0"/>
+          <a:chExt cx="0" cy="0"/>
+        </a:xfrm>
+      </p:grpSpPr>
+      <p:sp>
+        <p:nvSpPr>
+          <p:cNvPr id="2" name="Slide Image Placeholder 1"/>
+          <p:cNvSpPr>
+            <a:spLocks noGrp="1" noRot="1" noChangeAspect="1"/>
+          </p:cNvSpPr>
+          <p:nvPr>
+            <p:ph type="sldImg"/>
+          </p:nvPr>
+        </p:nvSpPr>
+        <p:spPr/>
+      </p:sp>
+      <p:sp>
+        <p:nvSpPr>
+          <p:cNvPr id="3" name="Notes Placeholder 2"/>
+          <p:cNvSpPr>
+            <a:spLocks noGrp="1"/>
+          </p:cNvSpPr>
+          <p:nvPr>
+            <p:ph type="body" idx="1"/>
+          </p:nvPr>
+        </p:nvSpPr>
+        <p:spPr/>
+        <p:txBody>
+          <a:bodyPr/>
+          <a:lstStyle/>
+          <a:p>
+            <a:endParaRPr lang="en-BE"/>
+          </a:p>
+        </p:txBody>
+      </p:sp>
+      <p:sp>
+        <p:nvSpPr>
+          <p:cNvPr id="4" name="Slide Number Placeholder 3"/>
+          <p:cNvSpPr>
+            <a:spLocks noGrp="1"/>
+          </p:cNvSpPr>
+          <p:nvPr>
+            <p:ph type="sldNum" sz="quarter" idx="5"/>
+          </p:nvPr>
+        </p:nvSpPr>
+        <p:spPr/>
+        <p:txBody>
+          <a:bodyPr/>
+          <a:lstStyle/>
+          <a:p>
+            <a:fld id="{947F9D2B-EF00-4575-9013-113DEEFD58FD}" type="slidenum">
+              <a:rPr lang="en-BE" smtClean="0"/>
+              <a:t>11</a:t>
+            </a:fld>
+            <a:endParaRPr lang="en-BE"/>
+          </a:p>
+        </p:txBody>
+      </p:sp>
+    </p:spTree>
+    <p:extLst>
+      <p:ext uri="{BB962C8B-B14F-4D97-AF65-F5344CB8AC3E}">
+        <p14:creationId xmlns:p14="http://schemas.microsoft.com/office/powerpoint/2010/main" val="2213225441"/>
+      </p:ext>
+    </p:extLst>
+  </p:cSld>
+  <p:clrMapOvr>
+    <a:masterClrMapping/>
+  </p:clrMapOvr>
+</p:notes>
+</file>
+
+<file path=ppt/notesSlides/notesSlide12.xml><?xml version="1.0" encoding="utf-8"?>
+<p:notes xmlns:a="http://schemas.openxmlformats.org/drawingml/2006/main" xmlns:r="http://schemas.openxmlformats.org/officeDocument/2006/relationships" xmlns:p="http://schemas.openxmlformats.org/presentationml/2006/main">
+  <p:cSld>
+    <p:spTree>
+      <p:nvGrpSpPr>
+        <p:cNvPr id="1" name=""/>
+        <p:cNvGrpSpPr/>
+        <p:nvPr/>
+      </p:nvGrpSpPr>
+      <p:grpSpPr>
+        <a:xfrm>
+          <a:off x="0" y="0"/>
+          <a:ext cx="0" cy="0"/>
+          <a:chOff x="0" y="0"/>
+          <a:chExt cx="0" cy="0"/>
+        </a:xfrm>
+      </p:grpSpPr>
+      <p:sp>
+        <p:nvSpPr>
+          <p:cNvPr id="2" name="Slide Image Placeholder 1"/>
+          <p:cNvSpPr>
+            <a:spLocks noGrp="1" noRot="1" noChangeAspect="1"/>
+          </p:cNvSpPr>
+          <p:nvPr>
+            <p:ph type="sldImg"/>
+          </p:nvPr>
+        </p:nvSpPr>
+        <p:spPr/>
+      </p:sp>
+      <p:sp>
+        <p:nvSpPr>
+          <p:cNvPr id="3" name="Notes Placeholder 2"/>
+          <p:cNvSpPr>
+            <a:spLocks noGrp="1"/>
+          </p:cNvSpPr>
+          <p:nvPr>
+            <p:ph type="body" idx="1"/>
+          </p:nvPr>
+        </p:nvSpPr>
+        <p:spPr/>
+        <p:txBody>
+          <a:bodyPr/>
+          <a:lstStyle/>
+          <a:p>
+            <a:r>
+              <a:rPr lang="en-US" dirty="0"/>
+              <a:t>Try the instructions, it’s not a joke</a:t>
+            </a:r>
+            <a:endParaRPr lang="en-BE" dirty="0"/>
+          </a:p>
+        </p:txBody>
+      </p:sp>
+      <p:sp>
+        <p:nvSpPr>
+          <p:cNvPr id="4" name="Slide Number Placeholder 3"/>
+          <p:cNvSpPr>
+            <a:spLocks noGrp="1"/>
+          </p:cNvSpPr>
+          <p:nvPr>
+            <p:ph type="sldNum" sz="quarter" idx="5"/>
+          </p:nvPr>
+        </p:nvSpPr>
+        <p:spPr/>
+        <p:txBody>
+          <a:bodyPr/>
+          <a:lstStyle/>
+          <a:p>
+            <a:fld id="{947F9D2B-EF00-4575-9013-113DEEFD58FD}" type="slidenum">
+              <a:rPr lang="en-BE" smtClean="0"/>
+              <a:t>12</a:t>
+            </a:fld>
+            <a:endParaRPr lang="en-BE"/>
+          </a:p>
+        </p:txBody>
+      </p:sp>
+    </p:spTree>
+    <p:extLst>
+      <p:ext uri="{BB962C8B-B14F-4D97-AF65-F5344CB8AC3E}">
+        <p14:creationId xmlns:p14="http://schemas.microsoft.com/office/powerpoint/2010/main" val="1816645550"/>
+      </p:ext>
+    </p:extLst>
+  </p:cSld>
+  <p:clrMapOvr>
+    <a:masterClrMapping/>
+  </p:clrMapOvr>
+</p:notes>
+</file>
+
+<file path=ppt/notesSlides/notesSlide13.xml><?xml version="1.0" encoding="utf-8"?>
+<p:notes xmlns:a="http://schemas.openxmlformats.org/drawingml/2006/main" xmlns:r="http://schemas.openxmlformats.org/officeDocument/2006/relationships" xmlns:p="http://schemas.openxmlformats.org/presentationml/2006/main">
+  <p:cSld>
+    <p:spTree>
+      <p:nvGrpSpPr>
+        <p:cNvPr id="1" name=""/>
+        <p:cNvGrpSpPr/>
+        <p:nvPr/>
+      </p:nvGrpSpPr>
+      <p:grpSpPr>
+        <a:xfrm>
+          <a:off x="0" y="0"/>
+          <a:ext cx="0" cy="0"/>
+          <a:chOff x="0" y="0"/>
+          <a:chExt cx="0" cy="0"/>
+        </a:xfrm>
+      </p:grpSpPr>
+      <p:sp>
+        <p:nvSpPr>
+          <p:cNvPr id="2" name="Slide Image Placeholder 1"/>
+          <p:cNvSpPr>
+            <a:spLocks noGrp="1" noRot="1" noChangeAspect="1"/>
+          </p:cNvSpPr>
+          <p:nvPr>
+            <p:ph type="sldImg"/>
+          </p:nvPr>
+        </p:nvSpPr>
+        <p:spPr/>
+      </p:sp>
+      <p:sp>
+        <p:nvSpPr>
+          <p:cNvPr id="3" name="Notes Placeholder 2"/>
+          <p:cNvSpPr>
+            <a:spLocks noGrp="1"/>
+          </p:cNvSpPr>
+          <p:nvPr>
+            <p:ph type="body" idx="1"/>
+          </p:nvPr>
+        </p:nvSpPr>
+        <p:spPr/>
+        <p:txBody>
+          <a:bodyPr/>
+          <a:lstStyle/>
+          <a:p>
+            <a:r>
+              <a:rPr lang="en-US" dirty="0"/>
+              <a:t>It’s no joke, I still spend a lot of time looking at my hand. This is going to come back in a big way when we see the cross product</a:t>
+            </a:r>
+            <a:endParaRPr lang="en-BE" dirty="0"/>
+          </a:p>
+        </p:txBody>
+      </p:sp>
+      <p:sp>
+        <p:nvSpPr>
+          <p:cNvPr id="4" name="Slide Number Placeholder 3"/>
+          <p:cNvSpPr>
+            <a:spLocks noGrp="1"/>
+          </p:cNvSpPr>
+          <p:nvPr>
+            <p:ph type="sldNum" sz="quarter" idx="5"/>
+          </p:nvPr>
+        </p:nvSpPr>
+        <p:spPr/>
+        <p:txBody>
+          <a:bodyPr/>
+          <a:lstStyle/>
+          <a:p>
+            <a:fld id="{947F9D2B-EF00-4575-9013-113DEEFD58FD}" type="slidenum">
+              <a:rPr lang="en-BE" smtClean="0"/>
+              <a:t>13</a:t>
+            </a:fld>
+            <a:endParaRPr lang="en-BE"/>
+          </a:p>
+        </p:txBody>
+      </p:sp>
+    </p:spTree>
+    <p:extLst>
+      <p:ext uri="{BB962C8B-B14F-4D97-AF65-F5344CB8AC3E}">
+        <p14:creationId xmlns:p14="http://schemas.microsoft.com/office/powerpoint/2010/main" val="4013056546"/>
+      </p:ext>
+    </p:extLst>
+  </p:cSld>
+  <p:clrMapOvr>
+    <a:masterClrMapping/>
+  </p:clrMapOvr>
+</p:notes>
+</file>
+
+<file path=ppt/notesSlides/notesSlide14.xml><?xml version="1.0" encoding="utf-8"?>
+<p:notes xmlns:a="http://schemas.openxmlformats.org/drawingml/2006/main" xmlns:r="http://schemas.openxmlformats.org/officeDocument/2006/relationships" xmlns:p="http://schemas.openxmlformats.org/presentationml/2006/main">
+  <p:cSld>
+    <p:spTree>
+      <p:nvGrpSpPr>
+        <p:cNvPr id="1" name=""/>
+        <p:cNvGrpSpPr/>
+        <p:nvPr/>
+      </p:nvGrpSpPr>
+      <p:grpSpPr>
+        <a:xfrm>
+          <a:off x="0" y="0"/>
+          <a:ext cx="0" cy="0"/>
+          <a:chOff x="0" y="0"/>
+          <a:chExt cx="0" cy="0"/>
+        </a:xfrm>
+      </p:grpSpPr>
+      <p:sp>
+        <p:nvSpPr>
+          <p:cNvPr id="2" name="Slide Image Placeholder 1"/>
+          <p:cNvSpPr>
+            <a:spLocks noGrp="1" noRot="1" noChangeAspect="1"/>
+          </p:cNvSpPr>
+          <p:nvPr>
+            <p:ph type="sldImg"/>
+          </p:nvPr>
+        </p:nvSpPr>
+        <p:spPr/>
+      </p:sp>
+      <p:sp>
+        <p:nvSpPr>
+          <p:cNvPr id="3" name="Notes Placeholder 2"/>
+          <p:cNvSpPr>
+            <a:spLocks noGrp="1"/>
+          </p:cNvSpPr>
+          <p:nvPr>
+            <p:ph type="body" idx="1"/>
+          </p:nvPr>
+        </p:nvSpPr>
+        <p:spPr/>
+        <p:txBody>
+          <a:bodyPr/>
+          <a:lstStyle/>
+          <a:p>
+            <a:endParaRPr lang="en-BE" dirty="0"/>
+          </a:p>
+        </p:txBody>
+      </p:sp>
+      <p:sp>
+        <p:nvSpPr>
+          <p:cNvPr id="4" name="Slide Number Placeholder 3"/>
+          <p:cNvSpPr>
+            <a:spLocks noGrp="1"/>
+          </p:cNvSpPr>
+          <p:nvPr>
+            <p:ph type="sldNum" sz="quarter" idx="5"/>
+          </p:nvPr>
+        </p:nvSpPr>
+        <p:spPr/>
+        <p:txBody>
+          <a:bodyPr/>
+          <a:lstStyle/>
+          <a:p>
+            <a:fld id="{947F9D2B-EF00-4575-9013-113DEEFD58FD}" type="slidenum">
+              <a:rPr lang="en-BE" smtClean="0"/>
+              <a:t>14</a:t>
+            </a:fld>
+            <a:endParaRPr lang="en-BE"/>
+          </a:p>
+        </p:txBody>
+      </p:sp>
+    </p:spTree>
+    <p:extLst>
+      <p:ext uri="{BB962C8B-B14F-4D97-AF65-F5344CB8AC3E}">
+        <p14:creationId xmlns:p14="http://schemas.microsoft.com/office/powerpoint/2010/main" val="3390787401"/>
+      </p:ext>
+    </p:extLst>
+  </p:cSld>
+  <p:clrMapOvr>
+    <a:masterClrMapping/>
+  </p:clrMapOvr>
+</p:notes>
+</file>
+
+<file path=ppt/notesSlides/notesSlide15.xml><?xml version="1.0" encoding="utf-8"?>
+<p:notes xmlns:a="http://schemas.openxmlformats.org/drawingml/2006/main" xmlns:r="http://schemas.openxmlformats.org/officeDocument/2006/relationships" xmlns:p="http://schemas.openxmlformats.org/presentationml/2006/main">
+  <p:cSld>
+    <p:spTree>
+      <p:nvGrpSpPr>
+        <p:cNvPr id="1" name=""/>
+        <p:cNvGrpSpPr/>
+        <p:nvPr/>
+      </p:nvGrpSpPr>
+      <p:grpSpPr>
+        <a:xfrm>
+          <a:off x="0" y="0"/>
+          <a:ext cx="0" cy="0"/>
+          <a:chOff x="0" y="0"/>
+          <a:chExt cx="0" cy="0"/>
+        </a:xfrm>
+      </p:grpSpPr>
+      <p:sp>
+        <p:nvSpPr>
+          <p:cNvPr id="2" name="Slide Image Placeholder 1"/>
+          <p:cNvSpPr>
+            <a:spLocks noGrp="1" noRot="1" noChangeAspect="1"/>
+          </p:cNvSpPr>
+          <p:nvPr>
+            <p:ph type="sldImg"/>
+          </p:nvPr>
+        </p:nvSpPr>
+        <p:spPr/>
+      </p:sp>
+      <p:sp>
+        <p:nvSpPr>
+          <p:cNvPr id="3" name="Notes Placeholder 2"/>
+          <p:cNvSpPr>
+            <a:spLocks noGrp="1"/>
+          </p:cNvSpPr>
+          <p:nvPr>
+            <p:ph type="body" idx="1"/>
+          </p:nvPr>
+        </p:nvSpPr>
+        <p:spPr/>
+        <p:txBody>
+          <a:bodyPr/>
+          <a:lstStyle/>
+          <a:p>
+            <a:r>
+              <a:rPr lang="en-US" dirty="0"/>
+              <a:t>In the end, you can’t get around understanding the coordinate system. Stuff will always go wrong, and other stuff we will see still need you to understand this. </a:t>
+            </a:r>
+            <a:endParaRPr lang="en-BE" dirty="0"/>
+          </a:p>
+        </p:txBody>
+      </p:sp>
+      <p:sp>
+        <p:nvSpPr>
+          <p:cNvPr id="4" name="Slide Number Placeholder 3"/>
+          <p:cNvSpPr>
+            <a:spLocks noGrp="1"/>
+          </p:cNvSpPr>
+          <p:nvPr>
+            <p:ph type="sldNum" sz="quarter" idx="5"/>
+          </p:nvPr>
+        </p:nvSpPr>
+        <p:spPr/>
+        <p:txBody>
+          <a:bodyPr/>
+          <a:lstStyle/>
+          <a:p>
+            <a:fld id="{947F9D2B-EF00-4575-9013-113DEEFD58FD}" type="slidenum">
+              <a:rPr lang="en-BE" smtClean="0"/>
+              <a:t>15</a:t>
+            </a:fld>
+            <a:endParaRPr lang="en-BE"/>
+          </a:p>
+        </p:txBody>
+      </p:sp>
+    </p:spTree>
+    <p:extLst>
+      <p:ext uri="{BB962C8B-B14F-4D97-AF65-F5344CB8AC3E}">
+        <p14:creationId xmlns:p14="http://schemas.microsoft.com/office/powerpoint/2010/main" val="1750521583"/>
+      </p:ext>
+    </p:extLst>
+  </p:cSld>
+  <p:clrMapOvr>
+    <a:masterClrMapping/>
+  </p:clrMapOvr>
+</p:notes>
+</file>
+
+<file path=ppt/notesSlides/notesSlide16.xml><?xml version="1.0" encoding="utf-8"?>
+<p:notes xmlns:a="http://schemas.openxmlformats.org/drawingml/2006/main" xmlns:r="http://schemas.openxmlformats.org/officeDocument/2006/relationships" xmlns:p="http://schemas.openxmlformats.org/presentationml/2006/main">
+  <p:cSld>
+    <p:spTree>
+      <p:nvGrpSpPr>
+        <p:cNvPr id="1" name=""/>
+        <p:cNvGrpSpPr/>
+        <p:nvPr/>
+      </p:nvGrpSpPr>
+      <p:grpSpPr>
+        <a:xfrm>
+          <a:off x="0" y="0"/>
+          <a:ext cx="0" cy="0"/>
+          <a:chOff x="0" y="0"/>
+          <a:chExt cx="0" cy="0"/>
+        </a:xfrm>
+      </p:grpSpPr>
+      <p:sp>
+        <p:nvSpPr>
+          <p:cNvPr id="2" name="Slide Image Placeholder 1"/>
+          <p:cNvSpPr>
+            <a:spLocks noGrp="1" noRot="1" noChangeAspect="1"/>
+          </p:cNvSpPr>
+          <p:nvPr>
+            <p:ph type="sldImg"/>
+          </p:nvPr>
+        </p:nvSpPr>
+        <p:spPr/>
+      </p:sp>
+      <p:sp>
+        <p:nvSpPr>
+          <p:cNvPr id="3" name="Notes Placeholder 2"/>
+          <p:cNvSpPr>
+            <a:spLocks noGrp="1"/>
+          </p:cNvSpPr>
+          <p:nvPr>
+            <p:ph type="body" idx="1"/>
+          </p:nvPr>
+        </p:nvSpPr>
+        <p:spPr/>
+        <p:txBody>
+          <a:bodyPr/>
+          <a:lstStyle/>
+          <a:p>
+            <a:r>
+              <a:rPr lang="en-US" dirty="0"/>
+              <a:t>What this means is, a vector(</a:t>
+            </a:r>
+            <a:r>
+              <a:rPr lang="en-US" dirty="0" err="1"/>
+              <a:t>x,y,z</a:t>
+            </a:r>
+            <a:r>
+              <a:rPr lang="en-US" dirty="0"/>
+              <a:t>) is an arrow starting at (0,0,0) and going to (</a:t>
+            </a:r>
+            <a:r>
+              <a:rPr lang="en-US" dirty="0" err="1"/>
+              <a:t>x,y,z</a:t>
+            </a:r>
+            <a:r>
+              <a:rPr lang="en-US" dirty="0"/>
+              <a:t>)</a:t>
+            </a:r>
+            <a:endParaRPr lang="en-BE" dirty="0"/>
+          </a:p>
+        </p:txBody>
+      </p:sp>
+      <p:sp>
+        <p:nvSpPr>
+          <p:cNvPr id="4" name="Slide Number Placeholder 3"/>
+          <p:cNvSpPr>
+            <a:spLocks noGrp="1"/>
+          </p:cNvSpPr>
+          <p:nvPr>
+            <p:ph type="sldNum" sz="quarter" idx="5"/>
+          </p:nvPr>
+        </p:nvSpPr>
+        <p:spPr/>
+        <p:txBody>
+          <a:bodyPr/>
+          <a:lstStyle/>
+          <a:p>
+            <a:fld id="{947F9D2B-EF00-4575-9013-113DEEFD58FD}" type="slidenum">
+              <a:rPr lang="en-BE" smtClean="0"/>
+              <a:t>16</a:t>
+            </a:fld>
+            <a:endParaRPr lang="en-BE"/>
+          </a:p>
+        </p:txBody>
+      </p:sp>
+    </p:spTree>
+    <p:extLst>
+      <p:ext uri="{BB962C8B-B14F-4D97-AF65-F5344CB8AC3E}">
+        <p14:creationId xmlns:p14="http://schemas.microsoft.com/office/powerpoint/2010/main" val="3734428659"/>
+      </p:ext>
+    </p:extLst>
+  </p:cSld>
+  <p:clrMapOvr>
+    <a:masterClrMapping/>
+  </p:clrMapOvr>
+</p:notes>
+</file>
+
+<file path=ppt/notesSlides/notesSlide17.xml><?xml version="1.0" encoding="utf-8"?>
+<p:notes xmlns:a="http://schemas.openxmlformats.org/drawingml/2006/main" xmlns:r="http://schemas.openxmlformats.org/officeDocument/2006/relationships" xmlns:p="http://schemas.openxmlformats.org/presentationml/2006/main">
+  <p:cSld>
+    <p:spTree>
+      <p:nvGrpSpPr>
+        <p:cNvPr id="1" name=""/>
+        <p:cNvGrpSpPr/>
+        <p:nvPr/>
+      </p:nvGrpSpPr>
+      <p:grpSpPr>
+        <a:xfrm>
+          <a:off x="0" y="0"/>
+          <a:ext cx="0" cy="0"/>
+          <a:chOff x="0" y="0"/>
+          <a:chExt cx="0" cy="0"/>
+        </a:xfrm>
+      </p:grpSpPr>
+      <p:sp>
+        <p:nvSpPr>
+          <p:cNvPr id="2" name="Slide Image Placeholder 1"/>
+          <p:cNvSpPr>
+            <a:spLocks noGrp="1" noRot="1" noChangeAspect="1"/>
+          </p:cNvSpPr>
+          <p:nvPr>
+            <p:ph type="sldImg"/>
+          </p:nvPr>
+        </p:nvSpPr>
+        <p:spPr/>
+      </p:sp>
+      <p:sp>
+        <p:nvSpPr>
+          <p:cNvPr id="3" name="Notes Placeholder 2"/>
+          <p:cNvSpPr>
+            <a:spLocks noGrp="1"/>
+          </p:cNvSpPr>
+          <p:nvPr>
+            <p:ph type="body" idx="1"/>
+          </p:nvPr>
+        </p:nvSpPr>
+        <p:spPr/>
+        <p:txBody>
+          <a:bodyPr/>
+          <a:lstStyle/>
+          <a:p>
+            <a:endParaRPr lang="en-BE" dirty="0"/>
+          </a:p>
+        </p:txBody>
+      </p:sp>
+      <p:sp>
+        <p:nvSpPr>
+          <p:cNvPr id="4" name="Slide Number Placeholder 3"/>
+          <p:cNvSpPr>
+            <a:spLocks noGrp="1"/>
+          </p:cNvSpPr>
+          <p:nvPr>
+            <p:ph type="sldNum" sz="quarter" idx="5"/>
+          </p:nvPr>
+        </p:nvSpPr>
+        <p:spPr/>
+        <p:txBody>
+          <a:bodyPr/>
+          <a:lstStyle/>
+          <a:p>
+            <a:fld id="{947F9D2B-EF00-4575-9013-113DEEFD58FD}" type="slidenum">
+              <a:rPr lang="en-BE" smtClean="0"/>
+              <a:t>17</a:t>
+            </a:fld>
+            <a:endParaRPr lang="en-BE"/>
+          </a:p>
+        </p:txBody>
+      </p:sp>
+    </p:spTree>
+    <p:extLst>
+      <p:ext uri="{BB962C8B-B14F-4D97-AF65-F5344CB8AC3E}">
+        <p14:creationId xmlns:p14="http://schemas.microsoft.com/office/powerpoint/2010/main" val="2443874508"/>
+      </p:ext>
+    </p:extLst>
+  </p:cSld>
+  <p:clrMapOvr>
+    <a:masterClrMapping/>
+  </p:clrMapOvr>
+</p:notes>
+</file>
+
+<file path=ppt/notesSlides/notesSlide18.xml><?xml version="1.0" encoding="utf-8"?>
+<p:notes xmlns:a="http://schemas.openxmlformats.org/drawingml/2006/main" xmlns:r="http://schemas.openxmlformats.org/officeDocument/2006/relationships" xmlns:p="http://schemas.openxmlformats.org/presentationml/2006/main">
+  <p:cSld>
+    <p:spTree>
+      <p:nvGrpSpPr>
+        <p:cNvPr id="1" name=""/>
+        <p:cNvGrpSpPr/>
+        <p:nvPr/>
+      </p:nvGrpSpPr>
+      <p:grpSpPr>
+        <a:xfrm>
+          <a:off x="0" y="0"/>
+          <a:ext cx="0" cy="0"/>
+          <a:chOff x="0" y="0"/>
+          <a:chExt cx="0" cy="0"/>
+        </a:xfrm>
+      </p:grpSpPr>
+      <p:sp>
+        <p:nvSpPr>
+          <p:cNvPr id="2" name="Slide Image Placeholder 1"/>
+          <p:cNvSpPr>
+            <a:spLocks noGrp="1" noRot="1" noChangeAspect="1"/>
+          </p:cNvSpPr>
+          <p:nvPr>
+            <p:ph type="sldImg"/>
+          </p:nvPr>
+        </p:nvSpPr>
+        <p:spPr/>
+      </p:sp>
+      <p:sp>
+        <p:nvSpPr>
+          <p:cNvPr id="3" name="Notes Placeholder 2"/>
+          <p:cNvSpPr>
+            <a:spLocks noGrp="1"/>
+          </p:cNvSpPr>
+          <p:nvPr>
+            <p:ph type="body" idx="1"/>
+          </p:nvPr>
+        </p:nvSpPr>
+        <p:spPr/>
+        <p:txBody>
+          <a:bodyPr/>
+          <a:lstStyle/>
+          <a:p>
+            <a:r>
+              <a:rPr lang="en-US" dirty="0"/>
+              <a:t>This is important because the names x, y, and z won’t always makes sense</a:t>
+            </a:r>
+          </a:p>
+          <a:p>
+            <a:endParaRPr lang="en-US" dirty="0"/>
+          </a:p>
+          <a:p>
+            <a:r>
+              <a:rPr lang="en-US" dirty="0"/>
+              <a:t>For example, we will often use a Vec3 to store colors in </a:t>
+            </a:r>
+            <a:r>
+              <a:rPr lang="en-US" dirty="0" err="1"/>
+              <a:t>rgb</a:t>
+            </a:r>
+            <a:r>
+              <a:rPr lang="en-US" dirty="0"/>
+              <a:t>. X then refers to the amount of red in the color, and we access it using ‘.x’</a:t>
+            </a:r>
+            <a:endParaRPr lang="en-BE" dirty="0"/>
+          </a:p>
+        </p:txBody>
+      </p:sp>
+      <p:sp>
+        <p:nvSpPr>
+          <p:cNvPr id="4" name="Slide Number Placeholder 3"/>
+          <p:cNvSpPr>
+            <a:spLocks noGrp="1"/>
+          </p:cNvSpPr>
+          <p:nvPr>
+            <p:ph type="sldNum" sz="quarter" idx="5"/>
+          </p:nvPr>
+        </p:nvSpPr>
+        <p:spPr/>
+        <p:txBody>
+          <a:bodyPr/>
+          <a:lstStyle/>
+          <a:p>
+            <a:fld id="{947F9D2B-EF00-4575-9013-113DEEFD58FD}" type="slidenum">
+              <a:rPr lang="en-BE" smtClean="0"/>
+              <a:t>18</a:t>
+            </a:fld>
+            <a:endParaRPr lang="en-BE"/>
+          </a:p>
+        </p:txBody>
+      </p:sp>
+    </p:spTree>
+    <p:extLst>
+      <p:ext uri="{BB962C8B-B14F-4D97-AF65-F5344CB8AC3E}">
+        <p14:creationId xmlns:p14="http://schemas.microsoft.com/office/powerpoint/2010/main" val="313872868"/>
+      </p:ext>
+    </p:extLst>
+  </p:cSld>
+  <p:clrMapOvr>
+    <a:masterClrMapping/>
+  </p:clrMapOvr>
+</p:notes>
+</file>
+
+<file path=ppt/notesSlides/notesSlide19.xml><?xml version="1.0" encoding="utf-8"?>
+<p:notes xmlns:a="http://schemas.openxmlformats.org/drawingml/2006/main" xmlns:r="http://schemas.openxmlformats.org/officeDocument/2006/relationships" xmlns:p="http://schemas.openxmlformats.org/presentationml/2006/main">
+  <p:cSld>
+    <p:spTree>
+      <p:nvGrpSpPr>
+        <p:cNvPr id="1" name=""/>
+        <p:cNvGrpSpPr/>
+        <p:nvPr/>
+      </p:nvGrpSpPr>
+      <p:grpSpPr>
+        <a:xfrm>
+          <a:off x="0" y="0"/>
+          <a:ext cx="0" cy="0"/>
+          <a:chOff x="0" y="0"/>
+          <a:chExt cx="0" cy="0"/>
+        </a:xfrm>
+      </p:grpSpPr>
+      <p:sp>
+        <p:nvSpPr>
+          <p:cNvPr id="2" name="Slide Image Placeholder 1"/>
+          <p:cNvSpPr>
+            <a:spLocks noGrp="1" noRot="1" noChangeAspect="1"/>
+          </p:cNvSpPr>
+          <p:nvPr>
+            <p:ph type="sldImg"/>
+          </p:nvPr>
+        </p:nvSpPr>
+        <p:spPr/>
+      </p:sp>
+      <p:sp>
+        <p:nvSpPr>
+          <p:cNvPr id="3" name="Notes Placeholder 2"/>
+          <p:cNvSpPr>
+            <a:spLocks noGrp="1"/>
+          </p:cNvSpPr>
+          <p:nvPr>
+            <p:ph type="body" idx="1"/>
+          </p:nvPr>
+        </p:nvSpPr>
+        <p:spPr/>
+        <p:txBody>
+          <a:bodyPr/>
+          <a:lstStyle/>
+          <a:p>
+            <a:r>
+              <a:rPr lang="en-US" dirty="0"/>
+              <a:t>I put it here, because I will inevitably use this terminology, often wrongly. I’ll try and give you the right idea, but I will never subtract any grades if you use the wrong term.</a:t>
+            </a:r>
+          </a:p>
+          <a:p>
+            <a:endParaRPr lang="en-US" dirty="0"/>
+          </a:p>
+          <a:p>
+            <a:r>
+              <a:rPr lang="en-US" dirty="0"/>
+              <a:t>Wrong but quick : points are just vectors</a:t>
+            </a:r>
+          </a:p>
+          <a:p>
+            <a:endParaRPr lang="en-US" dirty="0"/>
+          </a:p>
+          <a:p>
+            <a:r>
+              <a:rPr lang="en-US" dirty="0"/>
+              <a:t>Correct but long:</a:t>
+            </a:r>
+          </a:p>
+          <a:p>
+            <a:endParaRPr lang="en-US" dirty="0"/>
+          </a:p>
+          <a:p>
+            <a:r>
+              <a:rPr lang="en-US" dirty="0"/>
+              <a:t>A vector is an “offset”. An offset is a *change*. Examples would be: one meter left of, 5 minutes driving north, halfway towards brussels</a:t>
+            </a:r>
+          </a:p>
+          <a:p>
+            <a:endParaRPr lang="en-US" dirty="0"/>
+          </a:p>
+          <a:p>
+            <a:r>
+              <a:rPr lang="en-US" dirty="0"/>
+              <a:t>A point is a “position”. For example, the GPS coordinates of a city Leuven (</a:t>
+            </a:r>
+            <a:r>
+              <a:rPr lang="en-BE" dirty="0"/>
+              <a:t>50.8775, 4.70444</a:t>
+            </a:r>
+            <a:r>
+              <a:rPr lang="en-US" dirty="0"/>
+              <a:t>)</a:t>
+            </a:r>
+          </a:p>
+          <a:p>
+            <a:endParaRPr lang="en-US" dirty="0"/>
+          </a:p>
+          <a:p>
+            <a:endParaRPr lang="en-BE" dirty="0"/>
+          </a:p>
+        </p:txBody>
+      </p:sp>
+      <p:sp>
+        <p:nvSpPr>
+          <p:cNvPr id="4" name="Slide Number Placeholder 3"/>
+          <p:cNvSpPr>
+            <a:spLocks noGrp="1"/>
+          </p:cNvSpPr>
+          <p:nvPr>
+            <p:ph type="sldNum" sz="quarter" idx="5"/>
+          </p:nvPr>
+        </p:nvSpPr>
+        <p:spPr/>
+        <p:txBody>
+          <a:bodyPr/>
+          <a:lstStyle/>
+          <a:p>
+            <a:fld id="{947F9D2B-EF00-4575-9013-113DEEFD58FD}" type="slidenum">
+              <a:rPr lang="en-BE" smtClean="0"/>
+              <a:t>19</a:t>
+            </a:fld>
+            <a:endParaRPr lang="en-BE"/>
+          </a:p>
+        </p:txBody>
+      </p:sp>
+    </p:spTree>
+    <p:extLst>
+      <p:ext uri="{BB962C8B-B14F-4D97-AF65-F5344CB8AC3E}">
+        <p14:creationId xmlns:p14="http://schemas.microsoft.com/office/powerpoint/2010/main" val="4139442280"/>
+      </p:ext>
+    </p:extLst>
+  </p:cSld>
+  <p:clrMapOvr>
+    <a:masterClrMapping/>
+  </p:clrMapOvr>
+</p:notes>
+</file>
+
+<file path=ppt/notesSlides/notesSlide2.xml><?xml version="1.0" encoding="utf-8"?>
+<p:notes xmlns:a="http://schemas.openxmlformats.org/drawingml/2006/main" xmlns:r="http://schemas.openxmlformats.org/officeDocument/2006/relationships" xmlns:p="http://schemas.openxmlformats.org/presentationml/2006/main">
+  <p:cSld>
+    <p:spTree>
+      <p:nvGrpSpPr>
+        <p:cNvPr id="1" name=""/>
+        <p:cNvGrpSpPr/>
+        <p:nvPr/>
+      </p:nvGrpSpPr>
+      <p:grpSpPr>
+        <a:xfrm>
+          <a:off x="0" y="0"/>
+          <a:ext cx="0" cy="0"/>
+          <a:chOff x="0" y="0"/>
+          <a:chExt cx="0" cy="0"/>
+        </a:xfrm>
+      </p:grpSpPr>
+      <p:sp>
+        <p:nvSpPr>
+          <p:cNvPr id="2" name="Slide Image Placeholder 1"/>
+          <p:cNvSpPr>
+            <a:spLocks noGrp="1" noRot="1" noChangeAspect="1"/>
+          </p:cNvSpPr>
+          <p:nvPr>
+            <p:ph type="sldImg"/>
+          </p:nvPr>
+        </p:nvSpPr>
+        <p:spPr/>
+      </p:sp>
+      <p:sp>
+        <p:nvSpPr>
+          <p:cNvPr id="3" name="Notes Placeholder 2"/>
+          <p:cNvSpPr>
+            <a:spLocks noGrp="1"/>
+          </p:cNvSpPr>
+          <p:nvPr>
+            <p:ph type="body" idx="1"/>
+          </p:nvPr>
+        </p:nvSpPr>
+        <p:spPr/>
+        <p:txBody>
+          <a:bodyPr/>
+          <a:lstStyle/>
+          <a:p>
+            <a:endParaRPr lang="en-BE"/>
+          </a:p>
+        </p:txBody>
+      </p:sp>
+      <p:sp>
+        <p:nvSpPr>
+          <p:cNvPr id="4" name="Slide Number Placeholder 3"/>
+          <p:cNvSpPr>
+            <a:spLocks noGrp="1"/>
+          </p:cNvSpPr>
+          <p:nvPr>
+            <p:ph type="sldNum" sz="quarter" idx="5"/>
+          </p:nvPr>
+        </p:nvSpPr>
+        <p:spPr/>
+        <p:txBody>
+          <a:bodyPr/>
+          <a:lstStyle/>
+          <a:p>
+            <a:fld id="{947F9D2B-EF00-4575-9013-113DEEFD58FD}" type="slidenum">
+              <a:rPr lang="en-BE" smtClean="0"/>
+              <a:t>2</a:t>
+            </a:fld>
+            <a:endParaRPr lang="en-BE"/>
+          </a:p>
+        </p:txBody>
+      </p:sp>
+    </p:spTree>
+    <p:extLst>
+      <p:ext uri="{BB962C8B-B14F-4D97-AF65-F5344CB8AC3E}">
+        <p14:creationId xmlns:p14="http://schemas.microsoft.com/office/powerpoint/2010/main" val="3021621541"/>
+      </p:ext>
+    </p:extLst>
+  </p:cSld>
+  <p:clrMapOvr>
+    <a:masterClrMapping/>
+  </p:clrMapOvr>
+</p:notes>
+</file>
+
+<file path=ppt/notesSlides/notesSlide20.xml><?xml version="1.0" encoding="utf-8"?>
+<p:notes xmlns:a="http://schemas.openxmlformats.org/drawingml/2006/main" xmlns:r="http://schemas.openxmlformats.org/officeDocument/2006/relationships" xmlns:p="http://schemas.openxmlformats.org/presentationml/2006/main">
+  <p:cSld>
+    <p:spTree>
+      <p:nvGrpSpPr>
+        <p:cNvPr id="1" name=""/>
+        <p:cNvGrpSpPr/>
+        <p:nvPr/>
+      </p:nvGrpSpPr>
+      <p:grpSpPr>
+        <a:xfrm>
+          <a:off x="0" y="0"/>
+          <a:ext cx="0" cy="0"/>
+          <a:chOff x="0" y="0"/>
+          <a:chExt cx="0" cy="0"/>
+        </a:xfrm>
+      </p:grpSpPr>
+      <p:sp>
+        <p:nvSpPr>
+          <p:cNvPr id="2" name="Slide Image Placeholder 1"/>
+          <p:cNvSpPr>
+            <a:spLocks noGrp="1" noRot="1" noChangeAspect="1"/>
+          </p:cNvSpPr>
+          <p:nvPr>
+            <p:ph type="sldImg"/>
+          </p:nvPr>
+        </p:nvSpPr>
+        <p:spPr/>
+      </p:sp>
+      <p:sp>
+        <p:nvSpPr>
+          <p:cNvPr id="3" name="Notes Placeholder 2"/>
+          <p:cNvSpPr>
+            <a:spLocks noGrp="1"/>
+          </p:cNvSpPr>
+          <p:nvPr>
+            <p:ph type="body" idx="1"/>
+          </p:nvPr>
+        </p:nvSpPr>
+        <p:spPr/>
+        <p:txBody>
+          <a:bodyPr/>
+          <a:lstStyle/>
+          <a:p>
+            <a:endParaRPr lang="en-BE" dirty="0"/>
+          </a:p>
+        </p:txBody>
+      </p:sp>
+      <p:sp>
+        <p:nvSpPr>
+          <p:cNvPr id="4" name="Slide Number Placeholder 3"/>
+          <p:cNvSpPr>
+            <a:spLocks noGrp="1"/>
+          </p:cNvSpPr>
+          <p:nvPr>
+            <p:ph type="sldNum" sz="quarter" idx="5"/>
+          </p:nvPr>
+        </p:nvSpPr>
+        <p:spPr/>
+        <p:txBody>
+          <a:bodyPr/>
+          <a:lstStyle/>
+          <a:p>
+            <a:fld id="{947F9D2B-EF00-4575-9013-113DEEFD58FD}" type="slidenum">
+              <a:rPr lang="en-BE" smtClean="0"/>
+              <a:t>20</a:t>
+            </a:fld>
+            <a:endParaRPr lang="en-BE"/>
+          </a:p>
+        </p:txBody>
+      </p:sp>
+    </p:spTree>
+    <p:extLst>
+      <p:ext uri="{BB962C8B-B14F-4D97-AF65-F5344CB8AC3E}">
+        <p14:creationId xmlns:p14="http://schemas.microsoft.com/office/powerpoint/2010/main" val="1034504682"/>
+      </p:ext>
+    </p:extLst>
+  </p:cSld>
+  <p:clrMapOvr>
+    <a:masterClrMapping/>
+  </p:clrMapOvr>
+</p:notes>
+</file>
+
+<file path=ppt/notesSlides/notesSlide21.xml><?xml version="1.0" encoding="utf-8"?>
+<p:notes xmlns:a="http://schemas.openxmlformats.org/drawingml/2006/main" xmlns:r="http://schemas.openxmlformats.org/officeDocument/2006/relationships" xmlns:p="http://schemas.openxmlformats.org/presentationml/2006/main">
+  <p:cSld>
+    <p:spTree>
+      <p:nvGrpSpPr>
+        <p:cNvPr id="1" name=""/>
+        <p:cNvGrpSpPr/>
+        <p:nvPr/>
+      </p:nvGrpSpPr>
+      <p:grpSpPr>
+        <a:xfrm>
+          <a:off x="0" y="0"/>
+          <a:ext cx="0" cy="0"/>
+          <a:chOff x="0" y="0"/>
+          <a:chExt cx="0" cy="0"/>
+        </a:xfrm>
+      </p:grpSpPr>
+      <p:sp>
+        <p:nvSpPr>
+          <p:cNvPr id="2" name="Slide Image Placeholder 1"/>
+          <p:cNvSpPr>
+            <a:spLocks noGrp="1" noRot="1" noChangeAspect="1"/>
+          </p:cNvSpPr>
+          <p:nvPr>
+            <p:ph type="sldImg"/>
+          </p:nvPr>
+        </p:nvSpPr>
+        <p:spPr/>
+      </p:sp>
+      <p:sp>
+        <p:nvSpPr>
+          <p:cNvPr id="3" name="Notes Placeholder 2"/>
+          <p:cNvSpPr>
+            <a:spLocks noGrp="1"/>
+          </p:cNvSpPr>
+          <p:nvPr>
+            <p:ph type="body" idx="1"/>
+          </p:nvPr>
+        </p:nvSpPr>
+        <p:spPr/>
+        <p:txBody>
+          <a:bodyPr/>
+          <a:lstStyle/>
+          <a:p>
+            <a:r>
+              <a:rPr lang="en-US" dirty="0"/>
+              <a:t>The math works out the same anyway. </a:t>
+            </a:r>
+            <a:endParaRPr lang="en-BE" dirty="0"/>
+          </a:p>
+        </p:txBody>
+      </p:sp>
+      <p:sp>
+        <p:nvSpPr>
+          <p:cNvPr id="4" name="Slide Number Placeholder 3"/>
+          <p:cNvSpPr>
+            <a:spLocks noGrp="1"/>
+          </p:cNvSpPr>
+          <p:nvPr>
+            <p:ph type="sldNum" sz="quarter" idx="5"/>
+          </p:nvPr>
+        </p:nvSpPr>
+        <p:spPr/>
+        <p:txBody>
+          <a:bodyPr/>
+          <a:lstStyle/>
+          <a:p>
+            <a:fld id="{947F9D2B-EF00-4575-9013-113DEEFD58FD}" type="slidenum">
+              <a:rPr lang="en-BE" smtClean="0"/>
+              <a:t>21</a:t>
+            </a:fld>
+            <a:endParaRPr lang="en-BE"/>
+          </a:p>
+        </p:txBody>
+      </p:sp>
+    </p:spTree>
+    <p:extLst>
+      <p:ext uri="{BB962C8B-B14F-4D97-AF65-F5344CB8AC3E}">
+        <p14:creationId xmlns:p14="http://schemas.microsoft.com/office/powerpoint/2010/main" val="2144738757"/>
+      </p:ext>
+    </p:extLst>
+  </p:cSld>
+  <p:clrMapOvr>
+    <a:masterClrMapping/>
+  </p:clrMapOvr>
+</p:notes>
+</file>
+
+<file path=ppt/notesSlides/notesSlide22.xml><?xml version="1.0" encoding="utf-8"?>
+<p:notes xmlns:a="http://schemas.openxmlformats.org/drawingml/2006/main" xmlns:r="http://schemas.openxmlformats.org/officeDocument/2006/relationships" xmlns:p="http://schemas.openxmlformats.org/presentationml/2006/main">
+  <p:cSld>
+    <p:spTree>
+      <p:nvGrpSpPr>
+        <p:cNvPr id="1" name=""/>
+        <p:cNvGrpSpPr/>
+        <p:nvPr/>
+      </p:nvGrpSpPr>
+      <p:grpSpPr>
+        <a:xfrm>
+          <a:off x="0" y="0"/>
+          <a:ext cx="0" cy="0"/>
+          <a:chOff x="0" y="0"/>
+          <a:chExt cx="0" cy="0"/>
+        </a:xfrm>
+      </p:grpSpPr>
+      <p:sp>
+        <p:nvSpPr>
+          <p:cNvPr id="2" name="Slide Image Placeholder 1"/>
+          <p:cNvSpPr>
+            <a:spLocks noGrp="1" noRot="1" noChangeAspect="1"/>
+          </p:cNvSpPr>
+          <p:nvPr>
+            <p:ph type="sldImg"/>
+          </p:nvPr>
+        </p:nvSpPr>
+        <p:spPr/>
+      </p:sp>
+      <p:sp>
+        <p:nvSpPr>
+          <p:cNvPr id="3" name="Notes Placeholder 2"/>
+          <p:cNvSpPr>
+            <a:spLocks noGrp="1"/>
+          </p:cNvSpPr>
+          <p:nvPr>
+            <p:ph type="body" idx="1"/>
+          </p:nvPr>
+        </p:nvSpPr>
+        <p:spPr/>
+        <p:txBody>
+          <a:bodyPr/>
+          <a:lstStyle/>
+          <a:p>
+            <a:r>
+              <a:rPr lang="en-US" dirty="0"/>
+              <a:t>Visually, we can start the second vector from the end point of the first, and where the second vector ends, is our sum.</a:t>
+            </a:r>
+          </a:p>
+          <a:p>
+            <a:endParaRPr lang="en-US" dirty="0"/>
+          </a:p>
+          <a:p>
+            <a:r>
+              <a:rPr lang="en-US" dirty="0"/>
+              <a:t>In words : 5km north (5,0)  + 2km east (0,2) = (5,2) 5km north and 2km east</a:t>
+            </a:r>
+          </a:p>
+          <a:p>
+            <a:endParaRPr lang="en-US" dirty="0"/>
+          </a:p>
+          <a:p>
+            <a:endParaRPr lang="en-US" dirty="0"/>
+          </a:p>
+        </p:txBody>
+      </p:sp>
+      <p:sp>
+        <p:nvSpPr>
+          <p:cNvPr id="4" name="Slide Number Placeholder 3"/>
+          <p:cNvSpPr>
+            <a:spLocks noGrp="1"/>
+          </p:cNvSpPr>
+          <p:nvPr>
+            <p:ph type="sldNum" sz="quarter" idx="5"/>
+          </p:nvPr>
+        </p:nvSpPr>
+        <p:spPr/>
+        <p:txBody>
+          <a:bodyPr/>
+          <a:lstStyle/>
+          <a:p>
+            <a:fld id="{947F9D2B-EF00-4575-9013-113DEEFD58FD}" type="slidenum">
+              <a:rPr lang="en-BE" smtClean="0"/>
+              <a:t>22</a:t>
+            </a:fld>
+            <a:endParaRPr lang="en-BE"/>
+          </a:p>
+        </p:txBody>
+      </p:sp>
+    </p:spTree>
+    <p:extLst>
+      <p:ext uri="{BB962C8B-B14F-4D97-AF65-F5344CB8AC3E}">
+        <p14:creationId xmlns:p14="http://schemas.microsoft.com/office/powerpoint/2010/main" val="3138259885"/>
+      </p:ext>
+    </p:extLst>
+  </p:cSld>
+  <p:clrMapOvr>
+    <a:masterClrMapping/>
+  </p:clrMapOvr>
+</p:notes>
+</file>
+
+<file path=ppt/notesSlides/notesSlide23.xml><?xml version="1.0" encoding="utf-8"?>
+<p:notes xmlns:a="http://schemas.openxmlformats.org/drawingml/2006/main" xmlns:r="http://schemas.openxmlformats.org/officeDocument/2006/relationships" xmlns:p="http://schemas.openxmlformats.org/presentationml/2006/main">
+  <p:cSld>
+    <p:spTree>
+      <p:nvGrpSpPr>
+        <p:cNvPr id="1" name=""/>
+        <p:cNvGrpSpPr/>
+        <p:nvPr/>
+      </p:nvGrpSpPr>
+      <p:grpSpPr>
+        <a:xfrm>
+          <a:off x="0" y="0"/>
+          <a:ext cx="0" cy="0"/>
+          <a:chOff x="0" y="0"/>
+          <a:chExt cx="0" cy="0"/>
+        </a:xfrm>
+      </p:grpSpPr>
+      <p:sp>
+        <p:nvSpPr>
+          <p:cNvPr id="2" name="Slide Image Placeholder 1"/>
+          <p:cNvSpPr>
+            <a:spLocks noGrp="1" noRot="1" noChangeAspect="1"/>
+          </p:cNvSpPr>
+          <p:nvPr>
+            <p:ph type="sldImg"/>
+          </p:nvPr>
+        </p:nvSpPr>
+        <p:spPr/>
+      </p:sp>
+      <p:sp>
+        <p:nvSpPr>
+          <p:cNvPr id="3" name="Notes Placeholder 2"/>
+          <p:cNvSpPr>
+            <a:spLocks noGrp="1"/>
+          </p:cNvSpPr>
+          <p:nvPr>
+            <p:ph type="body" idx="1"/>
+          </p:nvPr>
+        </p:nvSpPr>
+        <p:spPr/>
+        <p:txBody>
+          <a:bodyPr/>
+          <a:lstStyle/>
+          <a:p>
+            <a:endParaRPr lang="en-BE" dirty="0"/>
+          </a:p>
+        </p:txBody>
+      </p:sp>
+      <p:sp>
+        <p:nvSpPr>
+          <p:cNvPr id="4" name="Slide Number Placeholder 3"/>
+          <p:cNvSpPr>
+            <a:spLocks noGrp="1"/>
+          </p:cNvSpPr>
+          <p:nvPr>
+            <p:ph type="sldNum" sz="quarter" idx="5"/>
+          </p:nvPr>
+        </p:nvSpPr>
+        <p:spPr/>
+        <p:txBody>
+          <a:bodyPr/>
+          <a:lstStyle/>
+          <a:p>
+            <a:fld id="{947F9D2B-EF00-4575-9013-113DEEFD58FD}" type="slidenum">
+              <a:rPr lang="en-BE" smtClean="0"/>
+              <a:t>23</a:t>
+            </a:fld>
+            <a:endParaRPr lang="en-BE"/>
+          </a:p>
+        </p:txBody>
+      </p:sp>
+    </p:spTree>
+    <p:extLst>
+      <p:ext uri="{BB962C8B-B14F-4D97-AF65-F5344CB8AC3E}">
+        <p14:creationId xmlns:p14="http://schemas.microsoft.com/office/powerpoint/2010/main" val="3104880119"/>
+      </p:ext>
+    </p:extLst>
+  </p:cSld>
+  <p:clrMapOvr>
+    <a:masterClrMapping/>
+  </p:clrMapOvr>
+</p:notes>
+</file>
+
+<file path=ppt/notesSlides/notesSlide24.xml><?xml version="1.0" encoding="utf-8"?>
+<p:notes xmlns:a="http://schemas.openxmlformats.org/drawingml/2006/main" xmlns:r="http://schemas.openxmlformats.org/officeDocument/2006/relationships" xmlns:p="http://schemas.openxmlformats.org/presentationml/2006/main">
+  <p:cSld>
+    <p:spTree>
+      <p:nvGrpSpPr>
+        <p:cNvPr id="1" name=""/>
+        <p:cNvGrpSpPr/>
+        <p:nvPr/>
+      </p:nvGrpSpPr>
+      <p:grpSpPr>
+        <a:xfrm>
+          <a:off x="0" y="0"/>
+          <a:ext cx="0" cy="0"/>
+          <a:chOff x="0" y="0"/>
+          <a:chExt cx="0" cy="0"/>
+        </a:xfrm>
+      </p:grpSpPr>
+      <p:sp>
+        <p:nvSpPr>
+          <p:cNvPr id="2" name="Slide Image Placeholder 1"/>
+          <p:cNvSpPr>
+            <a:spLocks noGrp="1" noRot="1" noChangeAspect="1"/>
+          </p:cNvSpPr>
+          <p:nvPr>
+            <p:ph type="sldImg"/>
+          </p:nvPr>
+        </p:nvSpPr>
+        <p:spPr/>
+      </p:sp>
+      <p:sp>
+        <p:nvSpPr>
+          <p:cNvPr id="3" name="Notes Placeholder 2"/>
+          <p:cNvSpPr>
+            <a:spLocks noGrp="1"/>
+          </p:cNvSpPr>
+          <p:nvPr>
+            <p:ph type="body" idx="1"/>
+          </p:nvPr>
+        </p:nvSpPr>
+        <p:spPr/>
+        <p:txBody>
+          <a:bodyPr/>
+          <a:lstStyle/>
+          <a:p>
+            <a:endParaRPr lang="en-BE"/>
+          </a:p>
+        </p:txBody>
+      </p:sp>
+      <p:sp>
+        <p:nvSpPr>
+          <p:cNvPr id="4" name="Slide Number Placeholder 3"/>
+          <p:cNvSpPr>
+            <a:spLocks noGrp="1"/>
+          </p:cNvSpPr>
+          <p:nvPr>
+            <p:ph type="sldNum" sz="quarter" idx="5"/>
+          </p:nvPr>
+        </p:nvSpPr>
+        <p:spPr/>
+        <p:txBody>
+          <a:bodyPr/>
+          <a:lstStyle/>
+          <a:p>
+            <a:fld id="{947F9D2B-EF00-4575-9013-113DEEFD58FD}" type="slidenum">
+              <a:rPr lang="en-BE" smtClean="0"/>
+              <a:t>24</a:t>
+            </a:fld>
+            <a:endParaRPr lang="en-BE"/>
+          </a:p>
+        </p:txBody>
+      </p:sp>
+    </p:spTree>
+    <p:extLst>
+      <p:ext uri="{BB962C8B-B14F-4D97-AF65-F5344CB8AC3E}">
+        <p14:creationId xmlns:p14="http://schemas.microsoft.com/office/powerpoint/2010/main" val="149371341"/>
+      </p:ext>
+    </p:extLst>
+  </p:cSld>
+  <p:clrMapOvr>
+    <a:masterClrMapping/>
+  </p:clrMapOvr>
+</p:notes>
+</file>
+
+<file path=ppt/notesSlides/notesSlide25.xml><?xml version="1.0" encoding="utf-8"?>
+<p:notes xmlns:a="http://schemas.openxmlformats.org/drawingml/2006/main" xmlns:r="http://schemas.openxmlformats.org/officeDocument/2006/relationships" xmlns:p="http://schemas.openxmlformats.org/presentationml/2006/main">
+  <p:cSld>
+    <p:spTree>
+      <p:nvGrpSpPr>
+        <p:cNvPr id="1" name=""/>
+        <p:cNvGrpSpPr/>
+        <p:nvPr/>
+      </p:nvGrpSpPr>
+      <p:grpSpPr>
+        <a:xfrm>
+          <a:off x="0" y="0"/>
+          <a:ext cx="0" cy="0"/>
+          <a:chOff x="0" y="0"/>
+          <a:chExt cx="0" cy="0"/>
+        </a:xfrm>
+      </p:grpSpPr>
+      <p:sp>
+        <p:nvSpPr>
+          <p:cNvPr id="2" name="Slide Image Placeholder 1"/>
+          <p:cNvSpPr>
+            <a:spLocks noGrp="1" noRot="1" noChangeAspect="1"/>
+          </p:cNvSpPr>
+          <p:nvPr>
+            <p:ph type="sldImg"/>
+          </p:nvPr>
+        </p:nvSpPr>
+        <p:spPr/>
+      </p:sp>
+      <p:sp>
+        <p:nvSpPr>
+          <p:cNvPr id="3" name="Notes Placeholder 2"/>
+          <p:cNvSpPr>
+            <a:spLocks noGrp="1"/>
+          </p:cNvSpPr>
+          <p:nvPr>
+            <p:ph type="body" idx="1"/>
+          </p:nvPr>
+        </p:nvSpPr>
+        <p:spPr/>
+        <p:txBody>
+          <a:bodyPr/>
+          <a:lstStyle/>
+          <a:p>
+            <a:r>
+              <a:rPr lang="en-US" dirty="0"/>
+              <a:t>A lot is happening in this image</a:t>
+            </a:r>
+          </a:p>
+          <a:p>
+            <a:endParaRPr lang="en-US" dirty="0"/>
+          </a:p>
+          <a:p>
+            <a:r>
+              <a:rPr lang="en-US" dirty="0"/>
+              <a:t>We can negate (make negative) any vector my moving the arrow to the other end. We’ve done this with B, making -B. </a:t>
+            </a:r>
+          </a:p>
+          <a:p>
+            <a:endParaRPr lang="en-US" dirty="0"/>
+          </a:p>
+          <a:p>
+            <a:r>
+              <a:rPr lang="en-US" dirty="0"/>
+              <a:t>Now we can do A+ (-B), which we know how to do</a:t>
+            </a:r>
+          </a:p>
+          <a:p>
+            <a:endParaRPr lang="en-US" dirty="0"/>
+          </a:p>
+          <a:p>
+            <a:r>
+              <a:rPr lang="en-US" dirty="0"/>
+              <a:t>This is just visually, the numbers do exactly what you expect.</a:t>
+            </a:r>
+            <a:endParaRPr lang="en-BE" dirty="0"/>
+          </a:p>
+        </p:txBody>
+      </p:sp>
+      <p:sp>
+        <p:nvSpPr>
+          <p:cNvPr id="4" name="Slide Number Placeholder 3"/>
+          <p:cNvSpPr>
+            <a:spLocks noGrp="1"/>
+          </p:cNvSpPr>
+          <p:nvPr>
+            <p:ph type="sldNum" sz="quarter" idx="5"/>
+          </p:nvPr>
+        </p:nvSpPr>
+        <p:spPr/>
+        <p:txBody>
+          <a:bodyPr/>
+          <a:lstStyle/>
+          <a:p>
+            <a:fld id="{947F9D2B-EF00-4575-9013-113DEEFD58FD}" type="slidenum">
+              <a:rPr lang="en-BE" smtClean="0"/>
+              <a:t>25</a:t>
+            </a:fld>
+            <a:endParaRPr lang="en-BE"/>
+          </a:p>
+        </p:txBody>
+      </p:sp>
+    </p:spTree>
+    <p:extLst>
+      <p:ext uri="{BB962C8B-B14F-4D97-AF65-F5344CB8AC3E}">
+        <p14:creationId xmlns:p14="http://schemas.microsoft.com/office/powerpoint/2010/main" val="3460105852"/>
+      </p:ext>
+    </p:extLst>
+  </p:cSld>
+  <p:clrMapOvr>
+    <a:masterClrMapping/>
+  </p:clrMapOvr>
+</p:notes>
+</file>
+
+<file path=ppt/notesSlides/notesSlide26.xml><?xml version="1.0" encoding="utf-8"?>
+<p:notes xmlns:a="http://schemas.openxmlformats.org/drawingml/2006/main" xmlns:r="http://schemas.openxmlformats.org/officeDocument/2006/relationships" xmlns:p="http://schemas.openxmlformats.org/presentationml/2006/main">
+  <p:cSld>
+    <p:spTree>
+      <p:nvGrpSpPr>
+        <p:cNvPr id="1" name=""/>
+        <p:cNvGrpSpPr/>
+        <p:nvPr/>
+      </p:nvGrpSpPr>
+      <p:grpSpPr>
+        <a:xfrm>
+          <a:off x="0" y="0"/>
+          <a:ext cx="0" cy="0"/>
+          <a:chOff x="0" y="0"/>
+          <a:chExt cx="0" cy="0"/>
+        </a:xfrm>
+      </p:grpSpPr>
+      <p:sp>
+        <p:nvSpPr>
+          <p:cNvPr id="2" name="Slide Image Placeholder 1"/>
+          <p:cNvSpPr>
+            <a:spLocks noGrp="1" noRot="1" noChangeAspect="1"/>
+          </p:cNvSpPr>
+          <p:nvPr>
+            <p:ph type="sldImg"/>
+          </p:nvPr>
+        </p:nvSpPr>
+        <p:spPr/>
+      </p:sp>
+      <p:sp>
+        <p:nvSpPr>
+          <p:cNvPr id="3" name="Notes Placeholder 2"/>
+          <p:cNvSpPr>
+            <a:spLocks noGrp="1"/>
+          </p:cNvSpPr>
+          <p:nvPr>
+            <p:ph type="body" idx="1"/>
+          </p:nvPr>
+        </p:nvSpPr>
+        <p:spPr/>
+        <p:txBody>
+          <a:bodyPr/>
+          <a:lstStyle/>
+          <a:p>
+            <a:r>
+              <a:rPr lang="en-US" dirty="0"/>
+              <a:t>By meaningfully, I mean for a good reason. </a:t>
+            </a:r>
+            <a:endParaRPr lang="en-BE" dirty="0"/>
+          </a:p>
+        </p:txBody>
+      </p:sp>
+      <p:sp>
+        <p:nvSpPr>
+          <p:cNvPr id="4" name="Slide Number Placeholder 3"/>
+          <p:cNvSpPr>
+            <a:spLocks noGrp="1"/>
+          </p:cNvSpPr>
+          <p:nvPr>
+            <p:ph type="sldNum" sz="quarter" idx="5"/>
+          </p:nvPr>
+        </p:nvSpPr>
+        <p:spPr/>
+        <p:txBody>
+          <a:bodyPr/>
+          <a:lstStyle/>
+          <a:p>
+            <a:fld id="{947F9D2B-EF00-4575-9013-113DEEFD58FD}" type="slidenum">
+              <a:rPr lang="en-BE" smtClean="0"/>
+              <a:t>26</a:t>
+            </a:fld>
+            <a:endParaRPr lang="en-BE"/>
+          </a:p>
+        </p:txBody>
+      </p:sp>
+    </p:spTree>
+    <p:extLst>
+      <p:ext uri="{BB962C8B-B14F-4D97-AF65-F5344CB8AC3E}">
+        <p14:creationId xmlns:p14="http://schemas.microsoft.com/office/powerpoint/2010/main" val="7677290"/>
+      </p:ext>
+    </p:extLst>
+  </p:cSld>
+  <p:clrMapOvr>
+    <a:masterClrMapping/>
+  </p:clrMapOvr>
+</p:notes>
+</file>
+
+<file path=ppt/notesSlides/notesSlide27.xml><?xml version="1.0" encoding="utf-8"?>
+<p:notes xmlns:a="http://schemas.openxmlformats.org/drawingml/2006/main" xmlns:r="http://schemas.openxmlformats.org/officeDocument/2006/relationships" xmlns:p="http://schemas.openxmlformats.org/presentationml/2006/main">
+  <p:cSld>
+    <p:spTree>
+      <p:nvGrpSpPr>
+        <p:cNvPr id="1" name=""/>
+        <p:cNvGrpSpPr/>
+        <p:nvPr/>
+      </p:nvGrpSpPr>
+      <p:grpSpPr>
+        <a:xfrm>
+          <a:off x="0" y="0"/>
+          <a:ext cx="0" cy="0"/>
+          <a:chOff x="0" y="0"/>
+          <a:chExt cx="0" cy="0"/>
+        </a:xfrm>
+      </p:grpSpPr>
+      <p:sp>
+        <p:nvSpPr>
+          <p:cNvPr id="2" name="Slide Image Placeholder 1"/>
+          <p:cNvSpPr>
+            <a:spLocks noGrp="1" noRot="1" noChangeAspect="1"/>
+          </p:cNvSpPr>
+          <p:nvPr>
+            <p:ph type="sldImg"/>
+          </p:nvPr>
+        </p:nvSpPr>
+        <p:spPr/>
+      </p:sp>
+      <p:sp>
+        <p:nvSpPr>
+          <p:cNvPr id="3" name="Notes Placeholder 2"/>
+          <p:cNvSpPr>
+            <a:spLocks noGrp="1"/>
+          </p:cNvSpPr>
+          <p:nvPr>
+            <p:ph type="body" idx="1"/>
+          </p:nvPr>
+        </p:nvSpPr>
+        <p:spPr/>
+        <p:txBody>
+          <a:bodyPr/>
+          <a:lstStyle/>
+          <a:p>
+            <a:endParaRPr lang="en-BE"/>
+          </a:p>
+        </p:txBody>
+      </p:sp>
+      <p:sp>
+        <p:nvSpPr>
+          <p:cNvPr id="4" name="Slide Number Placeholder 3"/>
+          <p:cNvSpPr>
+            <a:spLocks noGrp="1"/>
+          </p:cNvSpPr>
+          <p:nvPr>
+            <p:ph type="sldNum" sz="quarter" idx="5"/>
+          </p:nvPr>
+        </p:nvSpPr>
+        <p:spPr/>
+        <p:txBody>
+          <a:bodyPr/>
+          <a:lstStyle/>
+          <a:p>
+            <a:fld id="{947F9D2B-EF00-4575-9013-113DEEFD58FD}" type="slidenum">
+              <a:rPr lang="en-BE" smtClean="0"/>
+              <a:t>27</a:t>
+            </a:fld>
+            <a:endParaRPr lang="en-BE"/>
+          </a:p>
+        </p:txBody>
+      </p:sp>
+    </p:spTree>
+    <p:extLst>
+      <p:ext uri="{BB962C8B-B14F-4D97-AF65-F5344CB8AC3E}">
+        <p14:creationId xmlns:p14="http://schemas.microsoft.com/office/powerpoint/2010/main" val="3136234711"/>
+      </p:ext>
+    </p:extLst>
+  </p:cSld>
+  <p:clrMapOvr>
+    <a:masterClrMapping/>
+  </p:clrMapOvr>
+</p:notes>
+</file>
+
+<file path=ppt/notesSlides/notesSlide28.xml><?xml version="1.0" encoding="utf-8"?>
+<p:notes xmlns:a="http://schemas.openxmlformats.org/drawingml/2006/main" xmlns:r="http://schemas.openxmlformats.org/officeDocument/2006/relationships" xmlns:p="http://schemas.openxmlformats.org/presentationml/2006/main">
+  <p:cSld>
+    <p:spTree>
+      <p:nvGrpSpPr>
+        <p:cNvPr id="1" name=""/>
+        <p:cNvGrpSpPr/>
+        <p:nvPr/>
+      </p:nvGrpSpPr>
+      <p:grpSpPr>
+        <a:xfrm>
+          <a:off x="0" y="0"/>
+          <a:ext cx="0" cy="0"/>
+          <a:chOff x="0" y="0"/>
+          <a:chExt cx="0" cy="0"/>
+        </a:xfrm>
+      </p:grpSpPr>
+      <p:sp>
+        <p:nvSpPr>
+          <p:cNvPr id="2" name="Slide Image Placeholder 1"/>
+          <p:cNvSpPr>
+            <a:spLocks noGrp="1" noRot="1" noChangeAspect="1"/>
+          </p:cNvSpPr>
+          <p:nvPr>
+            <p:ph type="sldImg"/>
+          </p:nvPr>
+        </p:nvSpPr>
+        <p:spPr/>
+      </p:sp>
+      <p:sp>
+        <p:nvSpPr>
+          <p:cNvPr id="3" name="Notes Placeholder 2"/>
+          <p:cNvSpPr>
+            <a:spLocks noGrp="1"/>
+          </p:cNvSpPr>
+          <p:nvPr>
+            <p:ph type="body" idx="1"/>
+          </p:nvPr>
+        </p:nvSpPr>
+        <p:spPr/>
+        <p:txBody>
+          <a:bodyPr/>
+          <a:lstStyle/>
+          <a:p>
+            <a:endParaRPr lang="en-BE"/>
+          </a:p>
+        </p:txBody>
+      </p:sp>
+      <p:sp>
+        <p:nvSpPr>
+          <p:cNvPr id="4" name="Slide Number Placeholder 3"/>
+          <p:cNvSpPr>
+            <a:spLocks noGrp="1"/>
+          </p:cNvSpPr>
+          <p:nvPr>
+            <p:ph type="sldNum" sz="quarter" idx="5"/>
+          </p:nvPr>
+        </p:nvSpPr>
+        <p:spPr/>
+        <p:txBody>
+          <a:bodyPr/>
+          <a:lstStyle/>
+          <a:p>
+            <a:fld id="{947F9D2B-EF00-4575-9013-113DEEFD58FD}" type="slidenum">
+              <a:rPr lang="en-BE" smtClean="0"/>
+              <a:t>28</a:t>
+            </a:fld>
+            <a:endParaRPr lang="en-BE"/>
+          </a:p>
+        </p:txBody>
+      </p:sp>
+    </p:spTree>
+    <p:extLst>
+      <p:ext uri="{BB962C8B-B14F-4D97-AF65-F5344CB8AC3E}">
+        <p14:creationId xmlns:p14="http://schemas.microsoft.com/office/powerpoint/2010/main" val="1945911258"/>
+      </p:ext>
+    </p:extLst>
+  </p:cSld>
+  <p:clrMapOvr>
+    <a:masterClrMapping/>
+  </p:clrMapOvr>
+</p:notes>
+</file>
+
+<file path=ppt/notesSlides/notesSlide29.xml><?xml version="1.0" encoding="utf-8"?>
+<p:notes xmlns:a="http://schemas.openxmlformats.org/drawingml/2006/main" xmlns:r="http://schemas.openxmlformats.org/officeDocument/2006/relationships" xmlns:p="http://schemas.openxmlformats.org/presentationml/2006/main">
+  <p:cSld>
+    <p:spTree>
+      <p:nvGrpSpPr>
+        <p:cNvPr id="1" name=""/>
+        <p:cNvGrpSpPr/>
+        <p:nvPr/>
+      </p:nvGrpSpPr>
+      <p:grpSpPr>
+        <a:xfrm>
+          <a:off x="0" y="0"/>
+          <a:ext cx="0" cy="0"/>
+          <a:chOff x="0" y="0"/>
+          <a:chExt cx="0" cy="0"/>
+        </a:xfrm>
+      </p:grpSpPr>
+      <p:sp>
+        <p:nvSpPr>
+          <p:cNvPr id="2" name="Slide Image Placeholder 1"/>
+          <p:cNvSpPr>
+            <a:spLocks noGrp="1" noRot="1" noChangeAspect="1"/>
+          </p:cNvSpPr>
+          <p:nvPr>
+            <p:ph type="sldImg"/>
+          </p:nvPr>
+        </p:nvSpPr>
+        <p:spPr/>
+      </p:sp>
+      <p:sp>
+        <p:nvSpPr>
+          <p:cNvPr id="3" name="Notes Placeholder 2"/>
+          <p:cNvSpPr>
+            <a:spLocks noGrp="1"/>
+          </p:cNvSpPr>
+          <p:nvPr>
+            <p:ph type="body" idx="1"/>
+          </p:nvPr>
+        </p:nvSpPr>
+        <p:spPr/>
+        <p:txBody>
+          <a:bodyPr/>
+          <a:lstStyle/>
+          <a:p>
+            <a:endParaRPr lang="en-BE" dirty="0"/>
+          </a:p>
+        </p:txBody>
+      </p:sp>
+      <p:sp>
+        <p:nvSpPr>
+          <p:cNvPr id="4" name="Slide Number Placeholder 3"/>
+          <p:cNvSpPr>
+            <a:spLocks noGrp="1"/>
+          </p:cNvSpPr>
+          <p:nvPr>
+            <p:ph type="sldNum" sz="quarter" idx="5"/>
+          </p:nvPr>
+        </p:nvSpPr>
+        <p:spPr/>
+        <p:txBody>
+          <a:bodyPr/>
+          <a:lstStyle/>
+          <a:p>
+            <a:fld id="{947F9D2B-EF00-4575-9013-113DEEFD58FD}" type="slidenum">
+              <a:rPr lang="en-BE" smtClean="0"/>
+              <a:t>29</a:t>
+            </a:fld>
+            <a:endParaRPr lang="en-BE"/>
+          </a:p>
+        </p:txBody>
+      </p:sp>
+    </p:spTree>
+    <p:extLst>
+      <p:ext uri="{BB962C8B-B14F-4D97-AF65-F5344CB8AC3E}">
+        <p14:creationId xmlns:p14="http://schemas.microsoft.com/office/powerpoint/2010/main" val="3950615459"/>
+      </p:ext>
+    </p:extLst>
+  </p:cSld>
+  <p:clrMapOvr>
+    <a:masterClrMapping/>
+  </p:clrMapOvr>
+</p:notes>
+</file>
+
+<file path=ppt/notesSlides/notesSlide3.xml><?xml version="1.0" encoding="utf-8"?>
+<p:notes xmlns:a="http://schemas.openxmlformats.org/drawingml/2006/main" xmlns:r="http://schemas.openxmlformats.org/officeDocument/2006/relationships" xmlns:p="http://schemas.openxmlformats.org/presentationml/2006/main">
+  <p:cSld>
+    <p:spTree>
+      <p:nvGrpSpPr>
+        <p:cNvPr id="1" name=""/>
+        <p:cNvGrpSpPr/>
+        <p:nvPr/>
+      </p:nvGrpSpPr>
+      <p:grpSpPr>
+        <a:xfrm>
+          <a:off x="0" y="0"/>
+          <a:ext cx="0" cy="0"/>
+          <a:chOff x="0" y="0"/>
+          <a:chExt cx="0" cy="0"/>
+        </a:xfrm>
+      </p:grpSpPr>
+      <p:sp>
+        <p:nvSpPr>
+          <p:cNvPr id="2" name="Slide Image Placeholder 1"/>
+          <p:cNvSpPr>
+            <a:spLocks noGrp="1" noRot="1" noChangeAspect="1"/>
+          </p:cNvSpPr>
+          <p:nvPr>
+            <p:ph type="sldImg"/>
+          </p:nvPr>
+        </p:nvSpPr>
+        <p:spPr/>
+      </p:sp>
+      <p:sp>
+        <p:nvSpPr>
+          <p:cNvPr id="3" name="Notes Placeholder 2"/>
+          <p:cNvSpPr>
+            <a:spLocks noGrp="1"/>
+          </p:cNvSpPr>
+          <p:nvPr>
+            <p:ph type="body" idx="1"/>
+          </p:nvPr>
+        </p:nvSpPr>
+        <p:spPr/>
+        <p:txBody>
+          <a:bodyPr/>
+          <a:lstStyle/>
+          <a:p>
+            <a:endParaRPr lang="en-BE"/>
+          </a:p>
+        </p:txBody>
+      </p:sp>
+      <p:sp>
+        <p:nvSpPr>
+          <p:cNvPr id="4" name="Slide Number Placeholder 3"/>
+          <p:cNvSpPr>
+            <a:spLocks noGrp="1"/>
+          </p:cNvSpPr>
+          <p:nvPr>
+            <p:ph type="sldNum" sz="quarter" idx="5"/>
+          </p:nvPr>
+        </p:nvSpPr>
+        <p:spPr/>
+        <p:txBody>
+          <a:bodyPr/>
+          <a:lstStyle/>
+          <a:p>
+            <a:fld id="{947F9D2B-EF00-4575-9013-113DEEFD58FD}" type="slidenum">
+              <a:rPr lang="en-BE" smtClean="0"/>
+              <a:t>3</a:t>
+            </a:fld>
+            <a:endParaRPr lang="en-BE"/>
+          </a:p>
+        </p:txBody>
+      </p:sp>
+    </p:spTree>
+    <p:extLst>
+      <p:ext uri="{BB962C8B-B14F-4D97-AF65-F5344CB8AC3E}">
+        <p14:creationId xmlns:p14="http://schemas.microsoft.com/office/powerpoint/2010/main" val="2026906079"/>
+      </p:ext>
+    </p:extLst>
+  </p:cSld>
+  <p:clrMapOvr>
+    <a:masterClrMapping/>
+  </p:clrMapOvr>
+</p:notes>
+</file>
+
+<file path=ppt/notesSlides/notesSlide30.xml><?xml version="1.0" encoding="utf-8"?>
+<p:notes xmlns:a="http://schemas.openxmlformats.org/drawingml/2006/main" xmlns:r="http://schemas.openxmlformats.org/officeDocument/2006/relationships" xmlns:p="http://schemas.openxmlformats.org/presentationml/2006/main">
+  <p:cSld>
+    <p:spTree>
+      <p:nvGrpSpPr>
+        <p:cNvPr id="1" name=""/>
+        <p:cNvGrpSpPr/>
+        <p:nvPr/>
+      </p:nvGrpSpPr>
+      <p:grpSpPr>
+        <a:xfrm>
+          <a:off x="0" y="0"/>
+          <a:ext cx="0" cy="0"/>
+          <a:chOff x="0" y="0"/>
+          <a:chExt cx="0" cy="0"/>
+        </a:xfrm>
+      </p:grpSpPr>
+      <p:sp>
+        <p:nvSpPr>
+          <p:cNvPr id="2" name="Slide Image Placeholder 1"/>
+          <p:cNvSpPr>
+            <a:spLocks noGrp="1" noRot="1" noChangeAspect="1"/>
+          </p:cNvSpPr>
+          <p:nvPr>
+            <p:ph type="sldImg"/>
+          </p:nvPr>
+        </p:nvSpPr>
+        <p:spPr/>
+      </p:sp>
+      <p:sp>
+        <p:nvSpPr>
+          <p:cNvPr id="3" name="Notes Placeholder 2"/>
+          <p:cNvSpPr>
+            <a:spLocks noGrp="1"/>
+          </p:cNvSpPr>
+          <p:nvPr>
+            <p:ph type="body" idx="1"/>
+          </p:nvPr>
+        </p:nvSpPr>
+        <p:spPr/>
+        <p:txBody>
+          <a:bodyPr/>
+          <a:lstStyle/>
+          <a:p>
+            <a:r>
+              <a:rPr lang="en-US" dirty="0"/>
+              <a:t>This is really important, and will come back all the time</a:t>
+            </a:r>
+            <a:endParaRPr lang="en-BE" dirty="0"/>
+          </a:p>
+        </p:txBody>
+      </p:sp>
+      <p:sp>
+        <p:nvSpPr>
+          <p:cNvPr id="4" name="Slide Number Placeholder 3"/>
+          <p:cNvSpPr>
+            <a:spLocks noGrp="1"/>
+          </p:cNvSpPr>
+          <p:nvPr>
+            <p:ph type="sldNum" sz="quarter" idx="5"/>
+          </p:nvPr>
+        </p:nvSpPr>
+        <p:spPr/>
+        <p:txBody>
+          <a:bodyPr/>
+          <a:lstStyle/>
+          <a:p>
+            <a:fld id="{947F9D2B-EF00-4575-9013-113DEEFD58FD}" type="slidenum">
+              <a:rPr lang="en-BE" smtClean="0"/>
+              <a:t>30</a:t>
+            </a:fld>
+            <a:endParaRPr lang="en-BE"/>
+          </a:p>
+        </p:txBody>
+      </p:sp>
+    </p:spTree>
+    <p:extLst>
+      <p:ext uri="{BB962C8B-B14F-4D97-AF65-F5344CB8AC3E}">
+        <p14:creationId xmlns:p14="http://schemas.microsoft.com/office/powerpoint/2010/main" val="3262778006"/>
+      </p:ext>
+    </p:extLst>
+  </p:cSld>
+  <p:clrMapOvr>
+    <a:masterClrMapping/>
+  </p:clrMapOvr>
+</p:notes>
+</file>
+
+<file path=ppt/notesSlides/notesSlide31.xml><?xml version="1.0" encoding="utf-8"?>
+<p:notes xmlns:a="http://schemas.openxmlformats.org/drawingml/2006/main" xmlns:r="http://schemas.openxmlformats.org/officeDocument/2006/relationships" xmlns:p="http://schemas.openxmlformats.org/presentationml/2006/main">
+  <p:cSld>
+    <p:spTree>
+      <p:nvGrpSpPr>
+        <p:cNvPr id="1" name=""/>
+        <p:cNvGrpSpPr/>
+        <p:nvPr/>
+      </p:nvGrpSpPr>
+      <p:grpSpPr>
+        <a:xfrm>
+          <a:off x="0" y="0"/>
+          <a:ext cx="0" cy="0"/>
+          <a:chOff x="0" y="0"/>
+          <a:chExt cx="0" cy="0"/>
+        </a:xfrm>
+      </p:grpSpPr>
+      <p:sp>
+        <p:nvSpPr>
+          <p:cNvPr id="2" name="Slide Image Placeholder 1"/>
+          <p:cNvSpPr>
+            <a:spLocks noGrp="1" noRot="1" noChangeAspect="1"/>
+          </p:cNvSpPr>
+          <p:nvPr>
+            <p:ph type="sldImg"/>
+          </p:nvPr>
+        </p:nvSpPr>
+        <p:spPr/>
+      </p:sp>
+      <p:sp>
+        <p:nvSpPr>
+          <p:cNvPr id="3" name="Notes Placeholder 2"/>
+          <p:cNvSpPr>
+            <a:spLocks noGrp="1"/>
+          </p:cNvSpPr>
+          <p:nvPr>
+            <p:ph type="body" idx="1"/>
+          </p:nvPr>
+        </p:nvSpPr>
+        <p:spPr/>
+        <p:txBody>
+          <a:bodyPr/>
+          <a:lstStyle/>
+          <a:p>
+            <a:r>
+              <a:rPr lang="en-US" dirty="0" err="1"/>
+              <a:t>TransformComponent</a:t>
+            </a:r>
+            <a:r>
+              <a:rPr lang="en-US" dirty="0"/>
+              <a:t> is unique, as every </a:t>
+            </a:r>
+            <a:r>
+              <a:rPr lang="en-US" dirty="0" err="1"/>
+              <a:t>GameObjec</a:t>
+            </a:r>
+            <a:r>
+              <a:rPr lang="en-US" dirty="0"/>
+              <a:t> has exactly one</a:t>
+            </a:r>
+          </a:p>
+        </p:txBody>
+      </p:sp>
+      <p:sp>
+        <p:nvSpPr>
+          <p:cNvPr id="4" name="Slide Number Placeholder 3"/>
+          <p:cNvSpPr>
+            <a:spLocks noGrp="1"/>
+          </p:cNvSpPr>
+          <p:nvPr>
+            <p:ph type="sldNum" sz="quarter" idx="5"/>
+          </p:nvPr>
+        </p:nvSpPr>
+        <p:spPr/>
+        <p:txBody>
+          <a:bodyPr/>
+          <a:lstStyle/>
+          <a:p>
+            <a:fld id="{947F9D2B-EF00-4575-9013-113DEEFD58FD}" type="slidenum">
+              <a:rPr lang="en-BE" smtClean="0"/>
+              <a:t>31</a:t>
+            </a:fld>
+            <a:endParaRPr lang="en-BE"/>
+          </a:p>
+        </p:txBody>
+      </p:sp>
+    </p:spTree>
+    <p:extLst>
+      <p:ext uri="{BB962C8B-B14F-4D97-AF65-F5344CB8AC3E}">
+        <p14:creationId xmlns:p14="http://schemas.microsoft.com/office/powerpoint/2010/main" val="2325561739"/>
+      </p:ext>
+    </p:extLst>
+  </p:cSld>
+  <p:clrMapOvr>
+    <a:masterClrMapping/>
+  </p:clrMapOvr>
+</p:notes>
+</file>
+
+<file path=ppt/notesSlides/notesSlide32.xml><?xml version="1.0" encoding="utf-8"?>
+<p:notes xmlns:a="http://schemas.openxmlformats.org/drawingml/2006/main" xmlns:r="http://schemas.openxmlformats.org/officeDocument/2006/relationships" xmlns:p="http://schemas.openxmlformats.org/presentationml/2006/main">
+  <p:cSld>
+    <p:spTree>
+      <p:nvGrpSpPr>
+        <p:cNvPr id="1" name=""/>
+        <p:cNvGrpSpPr/>
+        <p:nvPr/>
+      </p:nvGrpSpPr>
+      <p:grpSpPr>
+        <a:xfrm>
+          <a:off x="0" y="0"/>
+          <a:ext cx="0" cy="0"/>
+          <a:chOff x="0" y="0"/>
+          <a:chExt cx="0" cy="0"/>
+        </a:xfrm>
+      </p:grpSpPr>
+      <p:sp>
+        <p:nvSpPr>
+          <p:cNvPr id="2" name="Slide Image Placeholder 1"/>
+          <p:cNvSpPr>
+            <a:spLocks noGrp="1" noRot="1" noChangeAspect="1"/>
+          </p:cNvSpPr>
+          <p:nvPr>
+            <p:ph type="sldImg"/>
+          </p:nvPr>
+        </p:nvSpPr>
+        <p:spPr/>
+      </p:sp>
+      <p:sp>
+        <p:nvSpPr>
+          <p:cNvPr id="3" name="Notes Placeholder 2"/>
+          <p:cNvSpPr>
+            <a:spLocks noGrp="1"/>
+          </p:cNvSpPr>
+          <p:nvPr>
+            <p:ph type="body" idx="1"/>
+          </p:nvPr>
+        </p:nvSpPr>
+        <p:spPr/>
+        <p:txBody>
+          <a:bodyPr/>
+          <a:lstStyle/>
+          <a:p>
+            <a:endParaRPr lang="en-BE"/>
+          </a:p>
+        </p:txBody>
+      </p:sp>
+      <p:sp>
+        <p:nvSpPr>
+          <p:cNvPr id="4" name="Slide Number Placeholder 3"/>
+          <p:cNvSpPr>
+            <a:spLocks noGrp="1"/>
+          </p:cNvSpPr>
+          <p:nvPr>
+            <p:ph type="sldNum" sz="quarter" idx="5"/>
+          </p:nvPr>
+        </p:nvSpPr>
+        <p:spPr/>
+        <p:txBody>
+          <a:bodyPr/>
+          <a:lstStyle/>
+          <a:p>
+            <a:fld id="{947F9D2B-EF00-4575-9013-113DEEFD58FD}" type="slidenum">
+              <a:rPr lang="en-BE" smtClean="0"/>
+              <a:t>32</a:t>
+            </a:fld>
+            <a:endParaRPr lang="en-BE"/>
+          </a:p>
+        </p:txBody>
+      </p:sp>
+    </p:spTree>
+    <p:extLst>
+      <p:ext uri="{BB962C8B-B14F-4D97-AF65-F5344CB8AC3E}">
+        <p14:creationId xmlns:p14="http://schemas.microsoft.com/office/powerpoint/2010/main" val="2956892501"/>
+      </p:ext>
+    </p:extLst>
+  </p:cSld>
+  <p:clrMapOvr>
+    <a:masterClrMapping/>
+  </p:clrMapOvr>
+</p:notes>
+</file>
+
+<file path=ppt/notesSlides/notesSlide33.xml><?xml version="1.0" encoding="utf-8"?>
+<p:notes xmlns:a="http://schemas.openxmlformats.org/drawingml/2006/main" xmlns:r="http://schemas.openxmlformats.org/officeDocument/2006/relationships" xmlns:p="http://schemas.openxmlformats.org/presentationml/2006/main">
+  <p:cSld>
+    <p:spTree>
+      <p:nvGrpSpPr>
+        <p:cNvPr id="1" name=""/>
+        <p:cNvGrpSpPr/>
+        <p:nvPr/>
+      </p:nvGrpSpPr>
+      <p:grpSpPr>
+        <a:xfrm>
+          <a:off x="0" y="0"/>
+          <a:ext cx="0" cy="0"/>
+          <a:chOff x="0" y="0"/>
+          <a:chExt cx="0" cy="0"/>
+        </a:xfrm>
+      </p:grpSpPr>
+      <p:sp>
+        <p:nvSpPr>
+          <p:cNvPr id="2" name="Slide Image Placeholder 1"/>
+          <p:cNvSpPr>
+            <a:spLocks noGrp="1" noRot="1" noChangeAspect="1"/>
+          </p:cNvSpPr>
+          <p:nvPr>
+            <p:ph type="sldImg"/>
+          </p:nvPr>
+        </p:nvSpPr>
+        <p:spPr/>
+      </p:sp>
+      <p:sp>
+        <p:nvSpPr>
+          <p:cNvPr id="3" name="Notes Placeholder 2"/>
+          <p:cNvSpPr>
+            <a:spLocks noGrp="1"/>
+          </p:cNvSpPr>
+          <p:nvPr>
+            <p:ph type="body" idx="1"/>
+          </p:nvPr>
+        </p:nvSpPr>
+        <p:spPr/>
+        <p:txBody>
+          <a:bodyPr/>
+          <a:lstStyle/>
+          <a:p>
+            <a:endParaRPr lang="en-BE"/>
+          </a:p>
+        </p:txBody>
+      </p:sp>
+      <p:sp>
+        <p:nvSpPr>
+          <p:cNvPr id="4" name="Slide Number Placeholder 3"/>
+          <p:cNvSpPr>
+            <a:spLocks noGrp="1"/>
+          </p:cNvSpPr>
+          <p:nvPr>
+            <p:ph type="sldNum" sz="quarter" idx="5"/>
+          </p:nvPr>
+        </p:nvSpPr>
+        <p:spPr/>
+        <p:txBody>
+          <a:bodyPr/>
+          <a:lstStyle/>
+          <a:p>
+            <a:fld id="{947F9D2B-EF00-4575-9013-113DEEFD58FD}" type="slidenum">
+              <a:rPr lang="en-BE" smtClean="0"/>
+              <a:t>33</a:t>
+            </a:fld>
+            <a:endParaRPr lang="en-BE"/>
+          </a:p>
+        </p:txBody>
+      </p:sp>
+    </p:spTree>
+    <p:extLst>
+      <p:ext uri="{BB962C8B-B14F-4D97-AF65-F5344CB8AC3E}">
+        <p14:creationId xmlns:p14="http://schemas.microsoft.com/office/powerpoint/2010/main" val="1552781103"/>
+      </p:ext>
+    </p:extLst>
+  </p:cSld>
+  <p:clrMapOvr>
+    <a:masterClrMapping/>
+  </p:clrMapOvr>
+</p:notes>
+</file>
+
+<file path=ppt/notesSlides/notesSlide34.xml><?xml version="1.0" encoding="utf-8"?>
+<p:notes xmlns:a="http://schemas.openxmlformats.org/drawingml/2006/main" xmlns:r="http://schemas.openxmlformats.org/officeDocument/2006/relationships" xmlns:p="http://schemas.openxmlformats.org/presentationml/2006/main">
+  <p:cSld>
+    <p:spTree>
+      <p:nvGrpSpPr>
+        <p:cNvPr id="1" name=""/>
+        <p:cNvGrpSpPr/>
+        <p:nvPr/>
+      </p:nvGrpSpPr>
+      <p:grpSpPr>
+        <a:xfrm>
+          <a:off x="0" y="0"/>
+          <a:ext cx="0" cy="0"/>
+          <a:chOff x="0" y="0"/>
+          <a:chExt cx="0" cy="0"/>
+        </a:xfrm>
+      </p:grpSpPr>
+      <p:sp>
+        <p:nvSpPr>
+          <p:cNvPr id="2" name="Slide Image Placeholder 1"/>
+          <p:cNvSpPr>
+            <a:spLocks noGrp="1" noRot="1" noChangeAspect="1"/>
+          </p:cNvSpPr>
+          <p:nvPr>
+            <p:ph type="sldImg"/>
+          </p:nvPr>
+        </p:nvSpPr>
+        <p:spPr/>
+      </p:sp>
+      <p:sp>
+        <p:nvSpPr>
+          <p:cNvPr id="3" name="Notes Placeholder 2"/>
+          <p:cNvSpPr>
+            <a:spLocks noGrp="1"/>
+          </p:cNvSpPr>
+          <p:nvPr>
+            <p:ph type="body" idx="1"/>
+          </p:nvPr>
+        </p:nvSpPr>
+        <p:spPr/>
+        <p:txBody>
+          <a:bodyPr/>
+          <a:lstStyle/>
+          <a:p>
+            <a:endParaRPr lang="en-BE"/>
+          </a:p>
+        </p:txBody>
+      </p:sp>
+      <p:sp>
+        <p:nvSpPr>
+          <p:cNvPr id="4" name="Slide Number Placeholder 3"/>
+          <p:cNvSpPr>
+            <a:spLocks noGrp="1"/>
+          </p:cNvSpPr>
+          <p:nvPr>
+            <p:ph type="sldNum" sz="quarter" idx="5"/>
+          </p:nvPr>
+        </p:nvSpPr>
+        <p:spPr/>
+        <p:txBody>
+          <a:bodyPr/>
+          <a:lstStyle/>
+          <a:p>
+            <a:fld id="{947F9D2B-EF00-4575-9013-113DEEFD58FD}" type="slidenum">
+              <a:rPr lang="en-BE" smtClean="0"/>
+              <a:t>34</a:t>
+            </a:fld>
+            <a:endParaRPr lang="en-BE"/>
+          </a:p>
+        </p:txBody>
+      </p:sp>
+    </p:spTree>
+    <p:extLst>
+      <p:ext uri="{BB962C8B-B14F-4D97-AF65-F5344CB8AC3E}">
+        <p14:creationId xmlns:p14="http://schemas.microsoft.com/office/powerpoint/2010/main" val="948405402"/>
+      </p:ext>
+    </p:extLst>
+  </p:cSld>
+  <p:clrMapOvr>
+    <a:masterClrMapping/>
+  </p:clrMapOvr>
+</p:notes>
+</file>
+
+<file path=ppt/notesSlides/notesSlide35.xml><?xml version="1.0" encoding="utf-8"?>
+<p:notes xmlns:a="http://schemas.openxmlformats.org/drawingml/2006/main" xmlns:r="http://schemas.openxmlformats.org/officeDocument/2006/relationships" xmlns:p="http://schemas.openxmlformats.org/presentationml/2006/main">
+  <p:cSld>
+    <p:spTree>
+      <p:nvGrpSpPr>
+        <p:cNvPr id="1" name=""/>
+        <p:cNvGrpSpPr/>
+        <p:nvPr/>
+      </p:nvGrpSpPr>
+      <p:grpSpPr>
+        <a:xfrm>
+          <a:off x="0" y="0"/>
+          <a:ext cx="0" cy="0"/>
+          <a:chOff x="0" y="0"/>
+          <a:chExt cx="0" cy="0"/>
+        </a:xfrm>
+      </p:grpSpPr>
+      <p:sp>
+        <p:nvSpPr>
+          <p:cNvPr id="2" name="Slide Image Placeholder 1"/>
+          <p:cNvSpPr>
+            <a:spLocks noGrp="1" noRot="1" noChangeAspect="1"/>
+          </p:cNvSpPr>
+          <p:nvPr>
+            <p:ph type="sldImg"/>
+          </p:nvPr>
+        </p:nvSpPr>
+        <p:spPr/>
+      </p:sp>
+      <p:sp>
+        <p:nvSpPr>
+          <p:cNvPr id="3" name="Notes Placeholder 2"/>
+          <p:cNvSpPr>
+            <a:spLocks noGrp="1"/>
+          </p:cNvSpPr>
+          <p:nvPr>
+            <p:ph type="body" idx="1"/>
+          </p:nvPr>
+        </p:nvSpPr>
+        <p:spPr/>
+        <p:txBody>
+          <a:bodyPr/>
+          <a:lstStyle/>
+          <a:p>
+            <a:endParaRPr lang="en-BE" dirty="0"/>
+          </a:p>
+        </p:txBody>
+      </p:sp>
+      <p:sp>
+        <p:nvSpPr>
+          <p:cNvPr id="4" name="Slide Number Placeholder 3"/>
+          <p:cNvSpPr>
+            <a:spLocks noGrp="1"/>
+          </p:cNvSpPr>
+          <p:nvPr>
+            <p:ph type="sldNum" sz="quarter" idx="5"/>
+          </p:nvPr>
+        </p:nvSpPr>
+        <p:spPr/>
+        <p:txBody>
+          <a:bodyPr/>
+          <a:lstStyle/>
+          <a:p>
+            <a:fld id="{947F9D2B-EF00-4575-9013-113DEEFD58FD}" type="slidenum">
+              <a:rPr lang="en-BE" smtClean="0"/>
+              <a:t>35</a:t>
+            </a:fld>
+            <a:endParaRPr lang="en-BE"/>
+          </a:p>
+        </p:txBody>
+      </p:sp>
+    </p:spTree>
+    <p:extLst>
+      <p:ext uri="{BB962C8B-B14F-4D97-AF65-F5344CB8AC3E}">
+        <p14:creationId xmlns:p14="http://schemas.microsoft.com/office/powerpoint/2010/main" val="2332065886"/>
+      </p:ext>
+    </p:extLst>
+  </p:cSld>
+  <p:clrMapOvr>
+    <a:masterClrMapping/>
+  </p:clrMapOvr>
+</p:notes>
+</file>
+
+<file path=ppt/notesSlides/notesSlide36.xml><?xml version="1.0" encoding="utf-8"?>
+<p:notes xmlns:a="http://schemas.openxmlformats.org/drawingml/2006/main" xmlns:r="http://schemas.openxmlformats.org/officeDocument/2006/relationships" xmlns:p="http://schemas.openxmlformats.org/presentationml/2006/main">
+  <p:cSld>
+    <p:spTree>
+      <p:nvGrpSpPr>
+        <p:cNvPr id="1" name=""/>
+        <p:cNvGrpSpPr/>
+        <p:nvPr/>
+      </p:nvGrpSpPr>
+      <p:grpSpPr>
+        <a:xfrm>
+          <a:off x="0" y="0"/>
+          <a:ext cx="0" cy="0"/>
+          <a:chOff x="0" y="0"/>
+          <a:chExt cx="0" cy="0"/>
+        </a:xfrm>
+      </p:grpSpPr>
+      <p:sp>
+        <p:nvSpPr>
+          <p:cNvPr id="2" name="Slide Image Placeholder 1"/>
+          <p:cNvSpPr>
+            <a:spLocks noGrp="1" noRot="1" noChangeAspect="1"/>
+          </p:cNvSpPr>
+          <p:nvPr>
+            <p:ph type="sldImg"/>
+          </p:nvPr>
+        </p:nvSpPr>
+        <p:spPr/>
+      </p:sp>
+      <p:sp>
+        <p:nvSpPr>
+          <p:cNvPr id="3" name="Notes Placeholder 2"/>
+          <p:cNvSpPr>
+            <a:spLocks noGrp="1"/>
+          </p:cNvSpPr>
+          <p:nvPr>
+            <p:ph type="body" idx="1"/>
+          </p:nvPr>
+        </p:nvSpPr>
+        <p:spPr/>
+        <p:txBody>
+          <a:bodyPr/>
+          <a:lstStyle/>
+          <a:p>
+            <a:endParaRPr lang="en-BE"/>
+          </a:p>
+        </p:txBody>
+      </p:sp>
+      <p:sp>
+        <p:nvSpPr>
+          <p:cNvPr id="4" name="Slide Number Placeholder 3"/>
+          <p:cNvSpPr>
+            <a:spLocks noGrp="1"/>
+          </p:cNvSpPr>
+          <p:nvPr>
+            <p:ph type="sldNum" sz="quarter" idx="5"/>
+          </p:nvPr>
+        </p:nvSpPr>
+        <p:spPr/>
+        <p:txBody>
+          <a:bodyPr/>
+          <a:lstStyle/>
+          <a:p>
+            <a:fld id="{947F9D2B-EF00-4575-9013-113DEEFD58FD}" type="slidenum">
+              <a:rPr lang="en-BE" smtClean="0"/>
+              <a:t>36</a:t>
+            </a:fld>
+            <a:endParaRPr lang="en-BE"/>
+          </a:p>
+        </p:txBody>
+      </p:sp>
+    </p:spTree>
+    <p:extLst>
+      <p:ext uri="{BB962C8B-B14F-4D97-AF65-F5344CB8AC3E}">
+        <p14:creationId xmlns:p14="http://schemas.microsoft.com/office/powerpoint/2010/main" val="1726337419"/>
+      </p:ext>
+    </p:extLst>
+  </p:cSld>
+  <p:clrMapOvr>
+    <a:masterClrMapping/>
+  </p:clrMapOvr>
+</p:notes>
+</file>
+
+<file path=ppt/notesSlides/notesSlide37.xml><?xml version="1.0" encoding="utf-8"?>
+<p:notes xmlns:a="http://schemas.openxmlformats.org/drawingml/2006/main" xmlns:r="http://schemas.openxmlformats.org/officeDocument/2006/relationships" xmlns:p="http://schemas.openxmlformats.org/presentationml/2006/main">
+  <p:cSld>
+    <p:spTree>
+      <p:nvGrpSpPr>
+        <p:cNvPr id="1" name=""/>
+        <p:cNvGrpSpPr/>
+        <p:nvPr/>
+      </p:nvGrpSpPr>
+      <p:grpSpPr>
+        <a:xfrm>
+          <a:off x="0" y="0"/>
+          <a:ext cx="0" cy="0"/>
+          <a:chOff x="0" y="0"/>
+          <a:chExt cx="0" cy="0"/>
+        </a:xfrm>
+      </p:grpSpPr>
+      <p:sp>
+        <p:nvSpPr>
+          <p:cNvPr id="2" name="Slide Image Placeholder 1"/>
+          <p:cNvSpPr>
+            <a:spLocks noGrp="1" noRot="1" noChangeAspect="1"/>
+          </p:cNvSpPr>
+          <p:nvPr>
+            <p:ph type="sldImg"/>
+          </p:nvPr>
+        </p:nvSpPr>
+        <p:spPr/>
+      </p:sp>
+      <p:sp>
+        <p:nvSpPr>
+          <p:cNvPr id="3" name="Notes Placeholder 2"/>
+          <p:cNvSpPr>
+            <a:spLocks noGrp="1"/>
+          </p:cNvSpPr>
+          <p:nvPr>
+            <p:ph type="body" idx="1"/>
+          </p:nvPr>
+        </p:nvSpPr>
+        <p:spPr/>
+        <p:txBody>
+          <a:bodyPr/>
+          <a:lstStyle/>
+          <a:p>
+            <a:endParaRPr lang="en-BE"/>
+          </a:p>
+        </p:txBody>
+      </p:sp>
+      <p:sp>
+        <p:nvSpPr>
+          <p:cNvPr id="4" name="Slide Number Placeholder 3"/>
+          <p:cNvSpPr>
+            <a:spLocks noGrp="1"/>
+          </p:cNvSpPr>
+          <p:nvPr>
+            <p:ph type="sldNum" sz="quarter" idx="5"/>
+          </p:nvPr>
+        </p:nvSpPr>
+        <p:spPr/>
+        <p:txBody>
+          <a:bodyPr/>
+          <a:lstStyle/>
+          <a:p>
+            <a:fld id="{947F9D2B-EF00-4575-9013-113DEEFD58FD}" type="slidenum">
+              <a:rPr lang="en-BE" smtClean="0"/>
+              <a:t>37</a:t>
+            </a:fld>
+            <a:endParaRPr lang="en-BE"/>
+          </a:p>
+        </p:txBody>
+      </p:sp>
+    </p:spTree>
+    <p:extLst>
+      <p:ext uri="{BB962C8B-B14F-4D97-AF65-F5344CB8AC3E}">
+        <p14:creationId xmlns:p14="http://schemas.microsoft.com/office/powerpoint/2010/main" val="1247722762"/>
+      </p:ext>
+    </p:extLst>
+  </p:cSld>
+  <p:clrMapOvr>
+    <a:masterClrMapping/>
+  </p:clrMapOvr>
+</p:notes>
+</file>
+
+<file path=ppt/notesSlides/notesSlide38.xml><?xml version="1.0" encoding="utf-8"?>
+<p:notes xmlns:a="http://schemas.openxmlformats.org/drawingml/2006/main" xmlns:r="http://schemas.openxmlformats.org/officeDocument/2006/relationships" xmlns:p="http://schemas.openxmlformats.org/presentationml/2006/main">
+  <p:cSld>
+    <p:spTree>
+      <p:nvGrpSpPr>
+        <p:cNvPr id="1" name=""/>
+        <p:cNvGrpSpPr/>
+        <p:nvPr/>
+      </p:nvGrpSpPr>
+      <p:grpSpPr>
+        <a:xfrm>
+          <a:off x="0" y="0"/>
+          <a:ext cx="0" cy="0"/>
+          <a:chOff x="0" y="0"/>
+          <a:chExt cx="0" cy="0"/>
+        </a:xfrm>
+      </p:grpSpPr>
+      <p:sp>
+        <p:nvSpPr>
+          <p:cNvPr id="2" name="Slide Image Placeholder 1"/>
+          <p:cNvSpPr>
+            <a:spLocks noGrp="1" noRot="1" noChangeAspect="1"/>
+          </p:cNvSpPr>
+          <p:nvPr>
+            <p:ph type="sldImg"/>
+          </p:nvPr>
+        </p:nvSpPr>
+        <p:spPr/>
+      </p:sp>
+      <p:sp>
+        <p:nvSpPr>
+          <p:cNvPr id="3" name="Notes Placeholder 2"/>
+          <p:cNvSpPr>
+            <a:spLocks noGrp="1"/>
+          </p:cNvSpPr>
+          <p:nvPr>
+            <p:ph type="body" idx="1"/>
+          </p:nvPr>
+        </p:nvSpPr>
+        <p:spPr/>
+        <p:txBody>
+          <a:bodyPr/>
+          <a:lstStyle/>
+          <a:p>
+            <a:endParaRPr lang="en-BE"/>
+          </a:p>
+        </p:txBody>
+      </p:sp>
+      <p:sp>
+        <p:nvSpPr>
+          <p:cNvPr id="4" name="Slide Number Placeholder 3"/>
+          <p:cNvSpPr>
+            <a:spLocks noGrp="1"/>
+          </p:cNvSpPr>
+          <p:nvPr>
+            <p:ph type="sldNum" sz="quarter" idx="5"/>
+          </p:nvPr>
+        </p:nvSpPr>
+        <p:spPr/>
+        <p:txBody>
+          <a:bodyPr/>
+          <a:lstStyle/>
+          <a:p>
+            <a:fld id="{947F9D2B-EF00-4575-9013-113DEEFD58FD}" type="slidenum">
+              <a:rPr lang="en-BE" smtClean="0"/>
+              <a:t>38</a:t>
+            </a:fld>
+            <a:endParaRPr lang="en-BE"/>
+          </a:p>
+        </p:txBody>
+      </p:sp>
+    </p:spTree>
+    <p:extLst>
+      <p:ext uri="{BB962C8B-B14F-4D97-AF65-F5344CB8AC3E}">
+        <p14:creationId xmlns:p14="http://schemas.microsoft.com/office/powerpoint/2010/main" val="590165194"/>
+      </p:ext>
+    </p:extLst>
+  </p:cSld>
+  <p:clrMapOvr>
+    <a:masterClrMapping/>
+  </p:clrMapOvr>
+</p:notes>
+</file>
+
+<file path=ppt/notesSlides/notesSlide39.xml><?xml version="1.0" encoding="utf-8"?>
+<p:notes xmlns:a="http://schemas.openxmlformats.org/drawingml/2006/main" xmlns:r="http://schemas.openxmlformats.org/officeDocument/2006/relationships" xmlns:p="http://schemas.openxmlformats.org/presentationml/2006/main">
+  <p:cSld>
+    <p:spTree>
+      <p:nvGrpSpPr>
+        <p:cNvPr id="1" name=""/>
+        <p:cNvGrpSpPr/>
+        <p:nvPr/>
+      </p:nvGrpSpPr>
+      <p:grpSpPr>
+        <a:xfrm>
+          <a:off x="0" y="0"/>
+          <a:ext cx="0" cy="0"/>
+          <a:chOff x="0" y="0"/>
+          <a:chExt cx="0" cy="0"/>
+        </a:xfrm>
+      </p:grpSpPr>
+      <p:sp>
+        <p:nvSpPr>
+          <p:cNvPr id="2" name="Slide Image Placeholder 1"/>
+          <p:cNvSpPr>
+            <a:spLocks noGrp="1" noRot="1" noChangeAspect="1"/>
+          </p:cNvSpPr>
+          <p:nvPr>
+            <p:ph type="sldImg"/>
+          </p:nvPr>
+        </p:nvSpPr>
+        <p:spPr/>
+      </p:sp>
+      <p:sp>
+        <p:nvSpPr>
+          <p:cNvPr id="3" name="Notes Placeholder 2"/>
+          <p:cNvSpPr>
+            <a:spLocks noGrp="1"/>
+          </p:cNvSpPr>
+          <p:nvPr>
+            <p:ph type="body" idx="1"/>
+          </p:nvPr>
+        </p:nvSpPr>
+        <p:spPr/>
+        <p:txBody>
+          <a:bodyPr/>
+          <a:lstStyle/>
+          <a:p>
+            <a:endParaRPr lang="en-BE"/>
+          </a:p>
+        </p:txBody>
+      </p:sp>
+      <p:sp>
+        <p:nvSpPr>
+          <p:cNvPr id="4" name="Slide Number Placeholder 3"/>
+          <p:cNvSpPr>
+            <a:spLocks noGrp="1"/>
+          </p:cNvSpPr>
+          <p:nvPr>
+            <p:ph type="sldNum" sz="quarter" idx="5"/>
+          </p:nvPr>
+        </p:nvSpPr>
+        <p:spPr/>
+        <p:txBody>
+          <a:bodyPr/>
+          <a:lstStyle/>
+          <a:p>
+            <a:fld id="{947F9D2B-EF00-4575-9013-113DEEFD58FD}" type="slidenum">
+              <a:rPr lang="en-BE" smtClean="0"/>
+              <a:t>39</a:t>
+            </a:fld>
+            <a:endParaRPr lang="en-BE"/>
+          </a:p>
+        </p:txBody>
+      </p:sp>
+    </p:spTree>
+    <p:extLst>
+      <p:ext uri="{BB962C8B-B14F-4D97-AF65-F5344CB8AC3E}">
+        <p14:creationId xmlns:p14="http://schemas.microsoft.com/office/powerpoint/2010/main" val="4122639022"/>
+      </p:ext>
+    </p:extLst>
+  </p:cSld>
+  <p:clrMapOvr>
+    <a:masterClrMapping/>
+  </p:clrMapOvr>
+</p:notes>
+</file>
+
+<file path=ppt/notesSlides/notesSlide4.xml><?xml version="1.0" encoding="utf-8"?>
+<p:notes xmlns:a="http://schemas.openxmlformats.org/drawingml/2006/main" xmlns:r="http://schemas.openxmlformats.org/officeDocument/2006/relationships" xmlns:p="http://schemas.openxmlformats.org/presentationml/2006/main">
+  <p:cSld>
+    <p:spTree>
+      <p:nvGrpSpPr>
+        <p:cNvPr id="1" name=""/>
+        <p:cNvGrpSpPr/>
+        <p:nvPr/>
+      </p:nvGrpSpPr>
+      <p:grpSpPr>
+        <a:xfrm>
+          <a:off x="0" y="0"/>
+          <a:ext cx="0" cy="0"/>
+          <a:chOff x="0" y="0"/>
+          <a:chExt cx="0" cy="0"/>
+        </a:xfrm>
+      </p:grpSpPr>
+      <p:sp>
+        <p:nvSpPr>
+          <p:cNvPr id="2" name="Slide Image Placeholder 1"/>
+          <p:cNvSpPr>
+            <a:spLocks noGrp="1" noRot="1" noChangeAspect="1"/>
+          </p:cNvSpPr>
+          <p:nvPr>
+            <p:ph type="sldImg"/>
+          </p:nvPr>
+        </p:nvSpPr>
+        <p:spPr/>
+      </p:sp>
+      <p:sp>
+        <p:nvSpPr>
+          <p:cNvPr id="3" name="Notes Placeholder 2"/>
+          <p:cNvSpPr>
+            <a:spLocks noGrp="1"/>
+          </p:cNvSpPr>
+          <p:nvPr>
+            <p:ph type="body" idx="1"/>
+          </p:nvPr>
+        </p:nvSpPr>
+        <p:spPr/>
+        <p:txBody>
+          <a:bodyPr/>
+          <a:lstStyle/>
+          <a:p>
+            <a:endParaRPr lang="en-BE"/>
+          </a:p>
+        </p:txBody>
+      </p:sp>
+      <p:sp>
+        <p:nvSpPr>
+          <p:cNvPr id="4" name="Slide Number Placeholder 3"/>
+          <p:cNvSpPr>
+            <a:spLocks noGrp="1"/>
+          </p:cNvSpPr>
+          <p:nvPr>
+            <p:ph type="sldNum" sz="quarter" idx="5"/>
+          </p:nvPr>
+        </p:nvSpPr>
+        <p:spPr/>
+        <p:txBody>
+          <a:bodyPr/>
+          <a:lstStyle/>
+          <a:p>
+            <a:fld id="{947F9D2B-EF00-4575-9013-113DEEFD58FD}" type="slidenum">
+              <a:rPr lang="en-BE" smtClean="0"/>
+              <a:t>4</a:t>
+            </a:fld>
+            <a:endParaRPr lang="en-BE"/>
+          </a:p>
+        </p:txBody>
+      </p:sp>
+    </p:spTree>
+    <p:extLst>
+      <p:ext uri="{BB962C8B-B14F-4D97-AF65-F5344CB8AC3E}">
+        <p14:creationId xmlns:p14="http://schemas.microsoft.com/office/powerpoint/2010/main" val="667314246"/>
+      </p:ext>
+    </p:extLst>
+  </p:cSld>
+  <p:clrMapOvr>
+    <a:masterClrMapping/>
+  </p:clrMapOvr>
+</p:notes>
+</file>
+
+<file path=ppt/notesSlides/notesSlide40.xml><?xml version="1.0" encoding="utf-8"?>
+<p:notes xmlns:a="http://schemas.openxmlformats.org/drawingml/2006/main" xmlns:r="http://schemas.openxmlformats.org/officeDocument/2006/relationships" xmlns:p="http://schemas.openxmlformats.org/presentationml/2006/main">
+  <p:cSld>
+    <p:spTree>
+      <p:nvGrpSpPr>
+        <p:cNvPr id="1" name=""/>
+        <p:cNvGrpSpPr/>
+        <p:nvPr/>
+      </p:nvGrpSpPr>
+      <p:grpSpPr>
+        <a:xfrm>
+          <a:off x="0" y="0"/>
+          <a:ext cx="0" cy="0"/>
+          <a:chOff x="0" y="0"/>
+          <a:chExt cx="0" cy="0"/>
+        </a:xfrm>
+      </p:grpSpPr>
+      <p:sp>
+        <p:nvSpPr>
+          <p:cNvPr id="2" name="Slide Image Placeholder 1"/>
+          <p:cNvSpPr>
+            <a:spLocks noGrp="1" noRot="1" noChangeAspect="1"/>
+          </p:cNvSpPr>
+          <p:nvPr>
+            <p:ph type="sldImg"/>
+          </p:nvPr>
+        </p:nvSpPr>
+        <p:spPr/>
+      </p:sp>
+      <p:sp>
+        <p:nvSpPr>
+          <p:cNvPr id="3" name="Notes Placeholder 2"/>
+          <p:cNvSpPr>
+            <a:spLocks noGrp="1"/>
+          </p:cNvSpPr>
+          <p:nvPr>
+            <p:ph type="body" idx="1"/>
+          </p:nvPr>
+        </p:nvSpPr>
+        <p:spPr/>
+        <p:txBody>
+          <a:bodyPr/>
+          <a:lstStyle/>
+          <a:p>
+            <a:endParaRPr lang="en-BE"/>
+          </a:p>
+        </p:txBody>
+      </p:sp>
+      <p:sp>
+        <p:nvSpPr>
+          <p:cNvPr id="4" name="Slide Number Placeholder 3"/>
+          <p:cNvSpPr>
+            <a:spLocks noGrp="1"/>
+          </p:cNvSpPr>
+          <p:nvPr>
+            <p:ph type="sldNum" sz="quarter" idx="5"/>
+          </p:nvPr>
+        </p:nvSpPr>
+        <p:spPr/>
+        <p:txBody>
+          <a:bodyPr/>
+          <a:lstStyle/>
+          <a:p>
+            <a:fld id="{947F9D2B-EF00-4575-9013-113DEEFD58FD}" type="slidenum">
+              <a:rPr lang="en-BE" smtClean="0"/>
+              <a:t>40</a:t>
+            </a:fld>
+            <a:endParaRPr lang="en-BE"/>
+          </a:p>
+        </p:txBody>
+      </p:sp>
+    </p:spTree>
+    <p:extLst>
+      <p:ext uri="{BB962C8B-B14F-4D97-AF65-F5344CB8AC3E}">
+        <p14:creationId xmlns:p14="http://schemas.microsoft.com/office/powerpoint/2010/main" val="2384452464"/>
+      </p:ext>
+    </p:extLst>
+  </p:cSld>
+  <p:clrMapOvr>
+    <a:masterClrMapping/>
+  </p:clrMapOvr>
+</p:notes>
+</file>
+
+<file path=ppt/notesSlides/notesSlide41.xml><?xml version="1.0" encoding="utf-8"?>
+<p:notes xmlns:a="http://schemas.openxmlformats.org/drawingml/2006/main" xmlns:r="http://schemas.openxmlformats.org/officeDocument/2006/relationships" xmlns:p="http://schemas.openxmlformats.org/presentationml/2006/main">
+  <p:cSld>
+    <p:spTree>
+      <p:nvGrpSpPr>
+        <p:cNvPr id="1" name=""/>
+        <p:cNvGrpSpPr/>
+        <p:nvPr/>
+      </p:nvGrpSpPr>
+      <p:grpSpPr>
+        <a:xfrm>
+          <a:off x="0" y="0"/>
+          <a:ext cx="0" cy="0"/>
+          <a:chOff x="0" y="0"/>
+          <a:chExt cx="0" cy="0"/>
+        </a:xfrm>
+      </p:grpSpPr>
+      <p:sp>
+        <p:nvSpPr>
+          <p:cNvPr id="2" name="Slide Image Placeholder 1"/>
+          <p:cNvSpPr>
+            <a:spLocks noGrp="1" noRot="1" noChangeAspect="1"/>
+          </p:cNvSpPr>
+          <p:nvPr>
+            <p:ph type="sldImg"/>
+          </p:nvPr>
+        </p:nvSpPr>
+        <p:spPr/>
+      </p:sp>
+      <p:sp>
+        <p:nvSpPr>
+          <p:cNvPr id="3" name="Notes Placeholder 2"/>
+          <p:cNvSpPr>
+            <a:spLocks noGrp="1"/>
+          </p:cNvSpPr>
+          <p:nvPr>
+            <p:ph type="body" idx="1"/>
+          </p:nvPr>
+        </p:nvSpPr>
+        <p:spPr/>
+        <p:txBody>
+          <a:bodyPr/>
+          <a:lstStyle/>
+          <a:p>
+            <a:endParaRPr lang="en-BE"/>
+          </a:p>
+        </p:txBody>
+      </p:sp>
+      <p:sp>
+        <p:nvSpPr>
+          <p:cNvPr id="4" name="Slide Number Placeholder 3"/>
+          <p:cNvSpPr>
+            <a:spLocks noGrp="1"/>
+          </p:cNvSpPr>
+          <p:nvPr>
+            <p:ph type="sldNum" sz="quarter" idx="5"/>
+          </p:nvPr>
+        </p:nvSpPr>
+        <p:spPr/>
+        <p:txBody>
+          <a:bodyPr/>
+          <a:lstStyle/>
+          <a:p>
+            <a:fld id="{947F9D2B-EF00-4575-9013-113DEEFD58FD}" type="slidenum">
+              <a:rPr lang="en-BE" smtClean="0"/>
+              <a:t>41</a:t>
+            </a:fld>
+            <a:endParaRPr lang="en-BE"/>
+          </a:p>
+        </p:txBody>
+      </p:sp>
+    </p:spTree>
+    <p:extLst>
+      <p:ext uri="{BB962C8B-B14F-4D97-AF65-F5344CB8AC3E}">
+        <p14:creationId xmlns:p14="http://schemas.microsoft.com/office/powerpoint/2010/main" val="932571743"/>
+      </p:ext>
+    </p:extLst>
+  </p:cSld>
+  <p:clrMapOvr>
+    <a:masterClrMapping/>
+  </p:clrMapOvr>
+</p:notes>
+</file>
+
+<file path=ppt/notesSlides/notesSlide42.xml><?xml version="1.0" encoding="utf-8"?>
+<p:notes xmlns:a="http://schemas.openxmlformats.org/drawingml/2006/main" xmlns:r="http://schemas.openxmlformats.org/officeDocument/2006/relationships" xmlns:p="http://schemas.openxmlformats.org/presentationml/2006/main">
+  <p:cSld>
+    <p:spTree>
+      <p:nvGrpSpPr>
+        <p:cNvPr id="1" name=""/>
+        <p:cNvGrpSpPr/>
+        <p:nvPr/>
+      </p:nvGrpSpPr>
+      <p:grpSpPr>
+        <a:xfrm>
+          <a:off x="0" y="0"/>
+          <a:ext cx="0" cy="0"/>
+          <a:chOff x="0" y="0"/>
+          <a:chExt cx="0" cy="0"/>
+        </a:xfrm>
+      </p:grpSpPr>
+      <p:sp>
+        <p:nvSpPr>
+          <p:cNvPr id="2" name="Slide Image Placeholder 1"/>
+          <p:cNvSpPr>
+            <a:spLocks noGrp="1" noRot="1" noChangeAspect="1"/>
+          </p:cNvSpPr>
+          <p:nvPr>
+            <p:ph type="sldImg"/>
+          </p:nvPr>
+        </p:nvSpPr>
+        <p:spPr/>
+      </p:sp>
+      <p:sp>
+        <p:nvSpPr>
+          <p:cNvPr id="3" name="Notes Placeholder 2"/>
+          <p:cNvSpPr>
+            <a:spLocks noGrp="1"/>
+          </p:cNvSpPr>
+          <p:nvPr>
+            <p:ph type="body" idx="1"/>
+          </p:nvPr>
+        </p:nvSpPr>
+        <p:spPr/>
+        <p:txBody>
+          <a:bodyPr/>
+          <a:lstStyle/>
+          <a:p>
+            <a:endParaRPr lang="en-BE"/>
+          </a:p>
+        </p:txBody>
+      </p:sp>
+      <p:sp>
+        <p:nvSpPr>
+          <p:cNvPr id="4" name="Slide Number Placeholder 3"/>
+          <p:cNvSpPr>
+            <a:spLocks noGrp="1"/>
+          </p:cNvSpPr>
+          <p:nvPr>
+            <p:ph type="sldNum" sz="quarter" idx="5"/>
+          </p:nvPr>
+        </p:nvSpPr>
+        <p:spPr/>
+        <p:txBody>
+          <a:bodyPr/>
+          <a:lstStyle/>
+          <a:p>
+            <a:fld id="{947F9D2B-EF00-4575-9013-113DEEFD58FD}" type="slidenum">
+              <a:rPr lang="en-BE" smtClean="0"/>
+              <a:t>42</a:t>
+            </a:fld>
+            <a:endParaRPr lang="en-BE"/>
+          </a:p>
+        </p:txBody>
+      </p:sp>
+    </p:spTree>
+    <p:extLst>
+      <p:ext uri="{BB962C8B-B14F-4D97-AF65-F5344CB8AC3E}">
+        <p14:creationId xmlns:p14="http://schemas.microsoft.com/office/powerpoint/2010/main" val="2618901886"/>
+      </p:ext>
+    </p:extLst>
+  </p:cSld>
+  <p:clrMapOvr>
+    <a:masterClrMapping/>
+  </p:clrMapOvr>
+</p:notes>
+</file>
+
+<file path=ppt/notesSlides/notesSlide43.xml><?xml version="1.0" encoding="utf-8"?>
+<p:notes xmlns:a="http://schemas.openxmlformats.org/drawingml/2006/main" xmlns:r="http://schemas.openxmlformats.org/officeDocument/2006/relationships" xmlns:p="http://schemas.openxmlformats.org/presentationml/2006/main">
+  <p:cSld>
+    <p:spTree>
+      <p:nvGrpSpPr>
+        <p:cNvPr id="1" name=""/>
+        <p:cNvGrpSpPr/>
+        <p:nvPr/>
+      </p:nvGrpSpPr>
+      <p:grpSpPr>
+        <a:xfrm>
+          <a:off x="0" y="0"/>
+          <a:ext cx="0" cy="0"/>
+          <a:chOff x="0" y="0"/>
+          <a:chExt cx="0" cy="0"/>
+        </a:xfrm>
+      </p:grpSpPr>
+      <p:sp>
+        <p:nvSpPr>
+          <p:cNvPr id="2" name="Slide Image Placeholder 1"/>
+          <p:cNvSpPr>
+            <a:spLocks noGrp="1" noRot="1" noChangeAspect="1"/>
+          </p:cNvSpPr>
+          <p:nvPr>
+            <p:ph type="sldImg"/>
+          </p:nvPr>
+        </p:nvSpPr>
+        <p:spPr/>
+      </p:sp>
+      <p:sp>
+        <p:nvSpPr>
+          <p:cNvPr id="3" name="Notes Placeholder 2"/>
+          <p:cNvSpPr>
+            <a:spLocks noGrp="1"/>
+          </p:cNvSpPr>
+          <p:nvPr>
+            <p:ph type="body" idx="1"/>
+          </p:nvPr>
+        </p:nvSpPr>
+        <p:spPr/>
+        <p:txBody>
+          <a:bodyPr/>
+          <a:lstStyle/>
+          <a:p>
+            <a:endParaRPr lang="en-BE"/>
+          </a:p>
+        </p:txBody>
+      </p:sp>
+      <p:sp>
+        <p:nvSpPr>
+          <p:cNvPr id="4" name="Slide Number Placeholder 3"/>
+          <p:cNvSpPr>
+            <a:spLocks noGrp="1"/>
+          </p:cNvSpPr>
+          <p:nvPr>
+            <p:ph type="sldNum" sz="quarter" idx="5"/>
+          </p:nvPr>
+        </p:nvSpPr>
+        <p:spPr/>
+        <p:txBody>
+          <a:bodyPr/>
+          <a:lstStyle/>
+          <a:p>
+            <a:fld id="{947F9D2B-EF00-4575-9013-113DEEFD58FD}" type="slidenum">
+              <a:rPr lang="en-BE" smtClean="0"/>
+              <a:t>43</a:t>
+            </a:fld>
+            <a:endParaRPr lang="en-BE"/>
+          </a:p>
+        </p:txBody>
+      </p:sp>
+    </p:spTree>
+    <p:extLst>
+      <p:ext uri="{BB962C8B-B14F-4D97-AF65-F5344CB8AC3E}">
+        <p14:creationId xmlns:p14="http://schemas.microsoft.com/office/powerpoint/2010/main" val="800731867"/>
+      </p:ext>
+    </p:extLst>
+  </p:cSld>
+  <p:clrMapOvr>
+    <a:masterClrMapping/>
+  </p:clrMapOvr>
+</p:notes>
+</file>
+
+<file path=ppt/notesSlides/notesSlide44.xml><?xml version="1.0" encoding="utf-8"?>
+<p:notes xmlns:a="http://schemas.openxmlformats.org/drawingml/2006/main" xmlns:r="http://schemas.openxmlformats.org/officeDocument/2006/relationships" xmlns:p="http://schemas.openxmlformats.org/presentationml/2006/main">
+  <p:cSld>
+    <p:spTree>
+      <p:nvGrpSpPr>
+        <p:cNvPr id="1" name=""/>
+        <p:cNvGrpSpPr/>
+        <p:nvPr/>
+      </p:nvGrpSpPr>
+      <p:grpSpPr>
+        <a:xfrm>
+          <a:off x="0" y="0"/>
+          <a:ext cx="0" cy="0"/>
+          <a:chOff x="0" y="0"/>
+          <a:chExt cx="0" cy="0"/>
+        </a:xfrm>
+      </p:grpSpPr>
+      <p:sp>
+        <p:nvSpPr>
+          <p:cNvPr id="2" name="Slide Image Placeholder 1"/>
+          <p:cNvSpPr>
+            <a:spLocks noGrp="1" noRot="1" noChangeAspect="1"/>
+          </p:cNvSpPr>
+          <p:nvPr>
+            <p:ph type="sldImg"/>
+          </p:nvPr>
+        </p:nvSpPr>
+        <p:spPr/>
+      </p:sp>
+      <p:sp>
+        <p:nvSpPr>
+          <p:cNvPr id="3" name="Notes Placeholder 2"/>
+          <p:cNvSpPr>
+            <a:spLocks noGrp="1"/>
+          </p:cNvSpPr>
+          <p:nvPr>
+            <p:ph type="body" idx="1"/>
+          </p:nvPr>
+        </p:nvSpPr>
+        <p:spPr/>
+        <p:txBody>
+          <a:bodyPr/>
+          <a:lstStyle/>
+          <a:p>
+            <a:endParaRPr lang="en-BE"/>
+          </a:p>
+        </p:txBody>
+      </p:sp>
+      <p:sp>
+        <p:nvSpPr>
+          <p:cNvPr id="4" name="Slide Number Placeholder 3"/>
+          <p:cNvSpPr>
+            <a:spLocks noGrp="1"/>
+          </p:cNvSpPr>
+          <p:nvPr>
+            <p:ph type="sldNum" sz="quarter" idx="5"/>
+          </p:nvPr>
+        </p:nvSpPr>
+        <p:spPr/>
+        <p:txBody>
+          <a:bodyPr/>
+          <a:lstStyle/>
+          <a:p>
+            <a:fld id="{947F9D2B-EF00-4575-9013-113DEEFD58FD}" type="slidenum">
+              <a:rPr lang="en-BE" smtClean="0"/>
+              <a:t>44</a:t>
+            </a:fld>
+            <a:endParaRPr lang="en-BE"/>
+          </a:p>
+        </p:txBody>
+      </p:sp>
+    </p:spTree>
+    <p:extLst>
+      <p:ext uri="{BB962C8B-B14F-4D97-AF65-F5344CB8AC3E}">
+        <p14:creationId xmlns:p14="http://schemas.microsoft.com/office/powerpoint/2010/main" val="3033242287"/>
+      </p:ext>
+    </p:extLst>
+  </p:cSld>
+  <p:clrMapOvr>
+    <a:masterClrMapping/>
+  </p:clrMapOvr>
+</p:notes>
+</file>
+
+<file path=ppt/notesSlides/notesSlide45.xml><?xml version="1.0" encoding="utf-8"?>
+<p:notes xmlns:a="http://schemas.openxmlformats.org/drawingml/2006/main" xmlns:r="http://schemas.openxmlformats.org/officeDocument/2006/relationships" xmlns:p="http://schemas.openxmlformats.org/presentationml/2006/main">
+  <p:cSld>
+    <p:spTree>
+      <p:nvGrpSpPr>
+        <p:cNvPr id="1" name=""/>
+        <p:cNvGrpSpPr/>
+        <p:nvPr/>
+      </p:nvGrpSpPr>
+      <p:grpSpPr>
+        <a:xfrm>
+          <a:off x="0" y="0"/>
+          <a:ext cx="0" cy="0"/>
+          <a:chOff x="0" y="0"/>
+          <a:chExt cx="0" cy="0"/>
+        </a:xfrm>
+      </p:grpSpPr>
+      <p:sp>
+        <p:nvSpPr>
+          <p:cNvPr id="2" name="Slide Image Placeholder 1"/>
+          <p:cNvSpPr>
+            <a:spLocks noGrp="1" noRot="1" noChangeAspect="1"/>
+          </p:cNvSpPr>
+          <p:nvPr>
+            <p:ph type="sldImg"/>
+          </p:nvPr>
+        </p:nvSpPr>
+        <p:spPr/>
+      </p:sp>
+      <p:sp>
+        <p:nvSpPr>
+          <p:cNvPr id="3" name="Notes Placeholder 2"/>
+          <p:cNvSpPr>
+            <a:spLocks noGrp="1"/>
+          </p:cNvSpPr>
+          <p:nvPr>
+            <p:ph type="body" idx="1"/>
+          </p:nvPr>
+        </p:nvSpPr>
+        <p:spPr/>
+        <p:txBody>
+          <a:bodyPr/>
+          <a:lstStyle/>
+          <a:p>
+            <a:endParaRPr lang="en-BE"/>
+          </a:p>
+        </p:txBody>
+      </p:sp>
+      <p:sp>
+        <p:nvSpPr>
+          <p:cNvPr id="4" name="Slide Number Placeholder 3"/>
+          <p:cNvSpPr>
+            <a:spLocks noGrp="1"/>
+          </p:cNvSpPr>
+          <p:nvPr>
+            <p:ph type="sldNum" sz="quarter" idx="5"/>
+          </p:nvPr>
+        </p:nvSpPr>
+        <p:spPr/>
+        <p:txBody>
+          <a:bodyPr/>
+          <a:lstStyle/>
+          <a:p>
+            <a:fld id="{947F9D2B-EF00-4575-9013-113DEEFD58FD}" type="slidenum">
+              <a:rPr lang="en-BE" smtClean="0"/>
+              <a:t>45</a:t>
+            </a:fld>
+            <a:endParaRPr lang="en-BE"/>
+          </a:p>
+        </p:txBody>
+      </p:sp>
+    </p:spTree>
+    <p:extLst>
+      <p:ext uri="{BB962C8B-B14F-4D97-AF65-F5344CB8AC3E}">
+        <p14:creationId xmlns:p14="http://schemas.microsoft.com/office/powerpoint/2010/main" val="4125238896"/>
+      </p:ext>
+    </p:extLst>
+  </p:cSld>
+  <p:clrMapOvr>
+    <a:masterClrMapping/>
+  </p:clrMapOvr>
+</p:notes>
+</file>
+
+<file path=ppt/notesSlides/notesSlide46.xml><?xml version="1.0" encoding="utf-8"?>
+<p:notes xmlns:a="http://schemas.openxmlformats.org/drawingml/2006/main" xmlns:r="http://schemas.openxmlformats.org/officeDocument/2006/relationships" xmlns:p="http://schemas.openxmlformats.org/presentationml/2006/main">
+  <p:cSld>
+    <p:spTree>
+      <p:nvGrpSpPr>
+        <p:cNvPr id="1" name=""/>
+        <p:cNvGrpSpPr/>
+        <p:nvPr/>
+      </p:nvGrpSpPr>
+      <p:grpSpPr>
+        <a:xfrm>
+          <a:off x="0" y="0"/>
+          <a:ext cx="0" cy="0"/>
+          <a:chOff x="0" y="0"/>
+          <a:chExt cx="0" cy="0"/>
+        </a:xfrm>
+      </p:grpSpPr>
+      <p:sp>
+        <p:nvSpPr>
+          <p:cNvPr id="2" name="Slide Image Placeholder 1"/>
+          <p:cNvSpPr>
+            <a:spLocks noGrp="1" noRot="1" noChangeAspect="1"/>
+          </p:cNvSpPr>
+          <p:nvPr>
+            <p:ph type="sldImg"/>
+          </p:nvPr>
+        </p:nvSpPr>
+        <p:spPr/>
+      </p:sp>
+      <p:sp>
+        <p:nvSpPr>
+          <p:cNvPr id="3" name="Notes Placeholder 2"/>
+          <p:cNvSpPr>
+            <a:spLocks noGrp="1"/>
+          </p:cNvSpPr>
+          <p:nvPr>
+            <p:ph type="body" idx="1"/>
+          </p:nvPr>
+        </p:nvSpPr>
+        <p:spPr/>
+        <p:txBody>
+          <a:bodyPr/>
+          <a:lstStyle/>
+          <a:p>
+            <a:endParaRPr lang="en-BE"/>
+          </a:p>
+        </p:txBody>
+      </p:sp>
+      <p:sp>
+        <p:nvSpPr>
+          <p:cNvPr id="4" name="Slide Number Placeholder 3"/>
+          <p:cNvSpPr>
+            <a:spLocks noGrp="1"/>
+          </p:cNvSpPr>
+          <p:nvPr>
+            <p:ph type="sldNum" sz="quarter" idx="5"/>
+          </p:nvPr>
+        </p:nvSpPr>
+        <p:spPr/>
+        <p:txBody>
+          <a:bodyPr/>
+          <a:lstStyle/>
+          <a:p>
+            <a:fld id="{947F9D2B-EF00-4575-9013-113DEEFD58FD}" type="slidenum">
+              <a:rPr lang="en-BE" smtClean="0"/>
+              <a:t>46</a:t>
+            </a:fld>
+            <a:endParaRPr lang="en-BE"/>
+          </a:p>
+        </p:txBody>
+      </p:sp>
+    </p:spTree>
+    <p:extLst>
+      <p:ext uri="{BB962C8B-B14F-4D97-AF65-F5344CB8AC3E}">
+        <p14:creationId xmlns:p14="http://schemas.microsoft.com/office/powerpoint/2010/main" val="623413186"/>
+      </p:ext>
+    </p:extLst>
+  </p:cSld>
+  <p:clrMapOvr>
+    <a:masterClrMapping/>
+  </p:clrMapOvr>
+</p:notes>
+</file>
+
+<file path=ppt/notesSlides/notesSlide47.xml><?xml version="1.0" encoding="utf-8"?>
+<p:notes xmlns:a="http://schemas.openxmlformats.org/drawingml/2006/main" xmlns:r="http://schemas.openxmlformats.org/officeDocument/2006/relationships" xmlns:p="http://schemas.openxmlformats.org/presentationml/2006/main">
+  <p:cSld>
+    <p:spTree>
+      <p:nvGrpSpPr>
+        <p:cNvPr id="1" name=""/>
+        <p:cNvGrpSpPr/>
+        <p:nvPr/>
+      </p:nvGrpSpPr>
+      <p:grpSpPr>
+        <a:xfrm>
+          <a:off x="0" y="0"/>
+          <a:ext cx="0" cy="0"/>
+          <a:chOff x="0" y="0"/>
+          <a:chExt cx="0" cy="0"/>
+        </a:xfrm>
+      </p:grpSpPr>
+      <p:sp>
+        <p:nvSpPr>
+          <p:cNvPr id="2" name="Slide Image Placeholder 1"/>
+          <p:cNvSpPr>
+            <a:spLocks noGrp="1" noRot="1" noChangeAspect="1"/>
+          </p:cNvSpPr>
+          <p:nvPr>
+            <p:ph type="sldImg"/>
+          </p:nvPr>
+        </p:nvSpPr>
+        <p:spPr/>
+      </p:sp>
+      <p:sp>
+        <p:nvSpPr>
+          <p:cNvPr id="3" name="Notes Placeholder 2"/>
+          <p:cNvSpPr>
+            <a:spLocks noGrp="1"/>
+          </p:cNvSpPr>
+          <p:nvPr>
+            <p:ph type="body" idx="1"/>
+          </p:nvPr>
+        </p:nvSpPr>
+        <p:spPr/>
+        <p:txBody>
+          <a:bodyPr/>
+          <a:lstStyle/>
+          <a:p>
+            <a:endParaRPr lang="en-BE"/>
+          </a:p>
+        </p:txBody>
+      </p:sp>
+      <p:sp>
+        <p:nvSpPr>
+          <p:cNvPr id="4" name="Slide Number Placeholder 3"/>
+          <p:cNvSpPr>
+            <a:spLocks noGrp="1"/>
+          </p:cNvSpPr>
+          <p:nvPr>
+            <p:ph type="sldNum" sz="quarter" idx="5"/>
+          </p:nvPr>
+        </p:nvSpPr>
+        <p:spPr/>
+        <p:txBody>
+          <a:bodyPr/>
+          <a:lstStyle/>
+          <a:p>
+            <a:fld id="{947F9D2B-EF00-4575-9013-113DEEFD58FD}" type="slidenum">
+              <a:rPr lang="en-BE" smtClean="0"/>
+              <a:t>47</a:t>
+            </a:fld>
+            <a:endParaRPr lang="en-BE"/>
+          </a:p>
+        </p:txBody>
+      </p:sp>
+    </p:spTree>
+    <p:extLst>
+      <p:ext uri="{BB962C8B-B14F-4D97-AF65-F5344CB8AC3E}">
+        <p14:creationId xmlns:p14="http://schemas.microsoft.com/office/powerpoint/2010/main" val="355328689"/>
+      </p:ext>
+    </p:extLst>
+  </p:cSld>
+  <p:clrMapOvr>
+    <a:masterClrMapping/>
+  </p:clrMapOvr>
+</p:notes>
+</file>
+
+<file path=ppt/notesSlides/notesSlide48.xml><?xml version="1.0" encoding="utf-8"?>
+<p:notes xmlns:a="http://schemas.openxmlformats.org/drawingml/2006/main" xmlns:r="http://schemas.openxmlformats.org/officeDocument/2006/relationships" xmlns:p="http://schemas.openxmlformats.org/presentationml/2006/main">
+  <p:cSld>
+    <p:spTree>
+      <p:nvGrpSpPr>
+        <p:cNvPr id="1" name=""/>
+        <p:cNvGrpSpPr/>
+        <p:nvPr/>
+      </p:nvGrpSpPr>
+      <p:grpSpPr>
+        <a:xfrm>
+          <a:off x="0" y="0"/>
+          <a:ext cx="0" cy="0"/>
+          <a:chOff x="0" y="0"/>
+          <a:chExt cx="0" cy="0"/>
+        </a:xfrm>
+      </p:grpSpPr>
+      <p:sp>
+        <p:nvSpPr>
+          <p:cNvPr id="2" name="Slide Image Placeholder 1"/>
+          <p:cNvSpPr>
+            <a:spLocks noGrp="1" noRot="1" noChangeAspect="1"/>
+          </p:cNvSpPr>
+          <p:nvPr>
+            <p:ph type="sldImg"/>
+          </p:nvPr>
+        </p:nvSpPr>
+        <p:spPr/>
+      </p:sp>
+      <p:sp>
+        <p:nvSpPr>
+          <p:cNvPr id="3" name="Notes Placeholder 2"/>
+          <p:cNvSpPr>
+            <a:spLocks noGrp="1"/>
+          </p:cNvSpPr>
+          <p:nvPr>
+            <p:ph type="body" idx="1"/>
+          </p:nvPr>
+        </p:nvSpPr>
+        <p:spPr/>
+        <p:txBody>
+          <a:bodyPr/>
+          <a:lstStyle/>
+          <a:p>
+            <a:endParaRPr lang="en-BE"/>
+          </a:p>
+        </p:txBody>
+      </p:sp>
+      <p:sp>
+        <p:nvSpPr>
+          <p:cNvPr id="4" name="Slide Number Placeholder 3"/>
+          <p:cNvSpPr>
+            <a:spLocks noGrp="1"/>
+          </p:cNvSpPr>
+          <p:nvPr>
+            <p:ph type="sldNum" sz="quarter" idx="5"/>
+          </p:nvPr>
+        </p:nvSpPr>
+        <p:spPr/>
+        <p:txBody>
+          <a:bodyPr/>
+          <a:lstStyle/>
+          <a:p>
+            <a:fld id="{947F9D2B-EF00-4575-9013-113DEEFD58FD}" type="slidenum">
+              <a:rPr lang="en-BE" smtClean="0"/>
+              <a:t>48</a:t>
+            </a:fld>
+            <a:endParaRPr lang="en-BE"/>
+          </a:p>
+        </p:txBody>
+      </p:sp>
+    </p:spTree>
+    <p:extLst>
+      <p:ext uri="{BB962C8B-B14F-4D97-AF65-F5344CB8AC3E}">
+        <p14:creationId xmlns:p14="http://schemas.microsoft.com/office/powerpoint/2010/main" val="265006118"/>
+      </p:ext>
+    </p:extLst>
+  </p:cSld>
+  <p:clrMapOvr>
+    <a:masterClrMapping/>
+  </p:clrMapOvr>
+</p:notes>
+</file>
+
+<file path=ppt/notesSlides/notesSlide49.xml><?xml version="1.0" encoding="utf-8"?>
+<p:notes xmlns:a="http://schemas.openxmlformats.org/drawingml/2006/main" xmlns:r="http://schemas.openxmlformats.org/officeDocument/2006/relationships" xmlns:p="http://schemas.openxmlformats.org/presentationml/2006/main">
+  <p:cSld>
+    <p:spTree>
+      <p:nvGrpSpPr>
+        <p:cNvPr id="1" name=""/>
+        <p:cNvGrpSpPr/>
+        <p:nvPr/>
+      </p:nvGrpSpPr>
+      <p:grpSpPr>
+        <a:xfrm>
+          <a:off x="0" y="0"/>
+          <a:ext cx="0" cy="0"/>
+          <a:chOff x="0" y="0"/>
+          <a:chExt cx="0" cy="0"/>
+        </a:xfrm>
+      </p:grpSpPr>
+      <p:sp>
+        <p:nvSpPr>
+          <p:cNvPr id="2" name="Slide Image Placeholder 1"/>
+          <p:cNvSpPr>
+            <a:spLocks noGrp="1" noRot="1" noChangeAspect="1"/>
+          </p:cNvSpPr>
+          <p:nvPr>
+            <p:ph type="sldImg"/>
+          </p:nvPr>
+        </p:nvSpPr>
+        <p:spPr/>
+      </p:sp>
+      <p:sp>
+        <p:nvSpPr>
+          <p:cNvPr id="3" name="Notes Placeholder 2"/>
+          <p:cNvSpPr>
+            <a:spLocks noGrp="1"/>
+          </p:cNvSpPr>
+          <p:nvPr>
+            <p:ph type="body" idx="1"/>
+          </p:nvPr>
+        </p:nvSpPr>
+        <p:spPr/>
+        <p:txBody>
+          <a:bodyPr/>
+          <a:lstStyle/>
+          <a:p>
+            <a:endParaRPr lang="en-BE"/>
+          </a:p>
+        </p:txBody>
+      </p:sp>
+      <p:sp>
+        <p:nvSpPr>
+          <p:cNvPr id="4" name="Slide Number Placeholder 3"/>
+          <p:cNvSpPr>
+            <a:spLocks noGrp="1"/>
+          </p:cNvSpPr>
+          <p:nvPr>
+            <p:ph type="sldNum" sz="quarter" idx="5"/>
+          </p:nvPr>
+        </p:nvSpPr>
+        <p:spPr/>
+        <p:txBody>
+          <a:bodyPr/>
+          <a:lstStyle/>
+          <a:p>
+            <a:fld id="{947F9D2B-EF00-4575-9013-113DEEFD58FD}" type="slidenum">
+              <a:rPr lang="en-BE" smtClean="0"/>
+              <a:t>49</a:t>
+            </a:fld>
+            <a:endParaRPr lang="en-BE"/>
+          </a:p>
+        </p:txBody>
+      </p:sp>
+    </p:spTree>
+    <p:extLst>
+      <p:ext uri="{BB962C8B-B14F-4D97-AF65-F5344CB8AC3E}">
+        <p14:creationId xmlns:p14="http://schemas.microsoft.com/office/powerpoint/2010/main" val="2884385597"/>
+      </p:ext>
+    </p:extLst>
+  </p:cSld>
+  <p:clrMapOvr>
+    <a:masterClrMapping/>
+  </p:clrMapOvr>
+</p:notes>
+</file>
+
+<file path=ppt/notesSlides/notesSlide5.xml><?xml version="1.0" encoding="utf-8"?>
+<p:notes xmlns:a="http://schemas.openxmlformats.org/drawingml/2006/main" xmlns:r="http://schemas.openxmlformats.org/officeDocument/2006/relationships" xmlns:p="http://schemas.openxmlformats.org/presentationml/2006/main">
+  <p:cSld>
+    <p:spTree>
+      <p:nvGrpSpPr>
+        <p:cNvPr id="1" name=""/>
+        <p:cNvGrpSpPr/>
+        <p:nvPr/>
+      </p:nvGrpSpPr>
+      <p:grpSpPr>
+        <a:xfrm>
+          <a:off x="0" y="0"/>
+          <a:ext cx="0" cy="0"/>
+          <a:chOff x="0" y="0"/>
+          <a:chExt cx="0" cy="0"/>
+        </a:xfrm>
+      </p:grpSpPr>
+      <p:sp>
+        <p:nvSpPr>
+          <p:cNvPr id="2" name="Slide Image Placeholder 1"/>
+          <p:cNvSpPr>
+            <a:spLocks noGrp="1" noRot="1" noChangeAspect="1"/>
+          </p:cNvSpPr>
+          <p:nvPr>
+            <p:ph type="sldImg"/>
+          </p:nvPr>
+        </p:nvSpPr>
+        <p:spPr/>
+      </p:sp>
+      <p:sp>
+        <p:nvSpPr>
+          <p:cNvPr id="3" name="Notes Placeholder 2"/>
+          <p:cNvSpPr>
+            <a:spLocks noGrp="1"/>
+          </p:cNvSpPr>
+          <p:nvPr>
+            <p:ph type="body" idx="1"/>
+          </p:nvPr>
+        </p:nvSpPr>
+        <p:spPr/>
+        <p:txBody>
+          <a:bodyPr/>
+          <a:lstStyle/>
+          <a:p>
+            <a:r>
+              <a:rPr lang="en-US" dirty="0"/>
+              <a:t>Unity can be seen as  big monolithic library, wrapping many other libraries one. </a:t>
+            </a:r>
+          </a:p>
+          <a:p>
+            <a:endParaRPr lang="en-US" dirty="0"/>
+          </a:p>
+          <a:p>
+            <a:r>
+              <a:rPr lang="en-US" dirty="0"/>
+              <a:t>The big one would be the graphic </a:t>
+            </a:r>
+            <a:r>
+              <a:rPr lang="en-US" dirty="0" err="1"/>
+              <a:t>api’s</a:t>
+            </a:r>
+            <a:r>
+              <a:rPr lang="en-US" dirty="0"/>
+              <a:t> DirectX (from Microsoft), Vulkan (</a:t>
+            </a:r>
+            <a:r>
+              <a:rPr lang="en-US" dirty="0" err="1"/>
+              <a:t>crossplatform</a:t>
+            </a:r>
+            <a:r>
+              <a:rPr lang="en-US" dirty="0"/>
+              <a:t>), OpenGL (deprecated cross platform). These API’s provide access to the graphics card (or GPU), and allow us to actually draw stuff.</a:t>
+            </a:r>
+          </a:p>
+          <a:p>
+            <a:endParaRPr lang="en-US" dirty="0"/>
+          </a:p>
+          <a:p>
+            <a:r>
+              <a:rPr lang="en-US" dirty="0"/>
+              <a:t>Other libraries we can access through Unity are the OS libraries (</a:t>
+            </a:r>
+            <a:r>
+              <a:rPr lang="en-US" dirty="0" err="1"/>
+              <a:t>eg</a:t>
+            </a:r>
+            <a:r>
+              <a:rPr lang="en-US" dirty="0"/>
+              <a:t> creating files), physics and sound libraries…</a:t>
+            </a:r>
+            <a:endParaRPr lang="en-BE" dirty="0"/>
+          </a:p>
+        </p:txBody>
+      </p:sp>
+      <p:sp>
+        <p:nvSpPr>
+          <p:cNvPr id="4" name="Slide Number Placeholder 3"/>
+          <p:cNvSpPr>
+            <a:spLocks noGrp="1"/>
+          </p:cNvSpPr>
+          <p:nvPr>
+            <p:ph type="sldNum" sz="quarter" idx="5"/>
+          </p:nvPr>
+        </p:nvSpPr>
+        <p:spPr/>
+        <p:txBody>
+          <a:bodyPr/>
+          <a:lstStyle/>
+          <a:p>
+            <a:fld id="{947F9D2B-EF00-4575-9013-113DEEFD58FD}" type="slidenum">
+              <a:rPr lang="en-BE" smtClean="0"/>
+              <a:t>5</a:t>
+            </a:fld>
+            <a:endParaRPr lang="en-BE"/>
+          </a:p>
+        </p:txBody>
+      </p:sp>
+    </p:spTree>
+    <p:extLst>
+      <p:ext uri="{BB962C8B-B14F-4D97-AF65-F5344CB8AC3E}">
+        <p14:creationId xmlns:p14="http://schemas.microsoft.com/office/powerpoint/2010/main" val="1282844654"/>
+      </p:ext>
+    </p:extLst>
+  </p:cSld>
+  <p:clrMapOvr>
+    <a:masterClrMapping/>
+  </p:clrMapOvr>
+</p:notes>
+</file>
+
+<file path=ppt/notesSlides/notesSlide50.xml><?xml version="1.0" encoding="utf-8"?>
+<p:notes xmlns:a="http://schemas.openxmlformats.org/drawingml/2006/main" xmlns:r="http://schemas.openxmlformats.org/officeDocument/2006/relationships" xmlns:p="http://schemas.openxmlformats.org/presentationml/2006/main">
+  <p:cSld>
+    <p:spTree>
+      <p:nvGrpSpPr>
+        <p:cNvPr id="1" name=""/>
+        <p:cNvGrpSpPr/>
+        <p:nvPr/>
+      </p:nvGrpSpPr>
+      <p:grpSpPr>
+        <a:xfrm>
+          <a:off x="0" y="0"/>
+          <a:ext cx="0" cy="0"/>
+          <a:chOff x="0" y="0"/>
+          <a:chExt cx="0" cy="0"/>
+        </a:xfrm>
+      </p:grpSpPr>
+      <p:sp>
+        <p:nvSpPr>
+          <p:cNvPr id="2" name="Slide Image Placeholder 1"/>
+          <p:cNvSpPr>
+            <a:spLocks noGrp="1" noRot="1" noChangeAspect="1"/>
+          </p:cNvSpPr>
+          <p:nvPr>
+            <p:ph type="sldImg"/>
+          </p:nvPr>
+        </p:nvSpPr>
+        <p:spPr/>
+      </p:sp>
+      <p:sp>
+        <p:nvSpPr>
+          <p:cNvPr id="3" name="Notes Placeholder 2"/>
+          <p:cNvSpPr>
+            <a:spLocks noGrp="1"/>
+          </p:cNvSpPr>
+          <p:nvPr>
+            <p:ph type="body" idx="1"/>
+          </p:nvPr>
+        </p:nvSpPr>
+        <p:spPr/>
+        <p:txBody>
+          <a:bodyPr/>
+          <a:lstStyle/>
+          <a:p>
+            <a:endParaRPr lang="en-BE" dirty="0"/>
+          </a:p>
+        </p:txBody>
+      </p:sp>
+      <p:sp>
+        <p:nvSpPr>
+          <p:cNvPr id="4" name="Slide Number Placeholder 3"/>
+          <p:cNvSpPr>
+            <a:spLocks noGrp="1"/>
+          </p:cNvSpPr>
+          <p:nvPr>
+            <p:ph type="sldNum" sz="quarter" idx="5"/>
+          </p:nvPr>
+        </p:nvSpPr>
+        <p:spPr/>
+        <p:txBody>
+          <a:bodyPr/>
+          <a:lstStyle/>
+          <a:p>
+            <a:fld id="{947F9D2B-EF00-4575-9013-113DEEFD58FD}" type="slidenum">
+              <a:rPr lang="en-BE" smtClean="0"/>
+              <a:t>50</a:t>
+            </a:fld>
+            <a:endParaRPr lang="en-BE"/>
+          </a:p>
+        </p:txBody>
+      </p:sp>
+    </p:spTree>
+    <p:extLst>
+      <p:ext uri="{BB962C8B-B14F-4D97-AF65-F5344CB8AC3E}">
+        <p14:creationId xmlns:p14="http://schemas.microsoft.com/office/powerpoint/2010/main" val="498828357"/>
+      </p:ext>
+    </p:extLst>
+  </p:cSld>
+  <p:clrMapOvr>
+    <a:masterClrMapping/>
+  </p:clrMapOvr>
+</p:notes>
+</file>
+
+<file path=ppt/notesSlides/notesSlide51.xml><?xml version="1.0" encoding="utf-8"?>
+<p:notes xmlns:a="http://schemas.openxmlformats.org/drawingml/2006/main" xmlns:r="http://schemas.openxmlformats.org/officeDocument/2006/relationships" xmlns:p="http://schemas.openxmlformats.org/presentationml/2006/main">
+  <p:cSld>
+    <p:spTree>
+      <p:nvGrpSpPr>
+        <p:cNvPr id="1" name=""/>
+        <p:cNvGrpSpPr/>
+        <p:nvPr/>
+      </p:nvGrpSpPr>
+      <p:grpSpPr>
+        <a:xfrm>
+          <a:off x="0" y="0"/>
+          <a:ext cx="0" cy="0"/>
+          <a:chOff x="0" y="0"/>
+          <a:chExt cx="0" cy="0"/>
+        </a:xfrm>
+      </p:grpSpPr>
+      <p:sp>
+        <p:nvSpPr>
+          <p:cNvPr id="2" name="Slide Image Placeholder 1"/>
+          <p:cNvSpPr>
+            <a:spLocks noGrp="1" noRot="1" noChangeAspect="1"/>
+          </p:cNvSpPr>
+          <p:nvPr>
+            <p:ph type="sldImg"/>
+          </p:nvPr>
+        </p:nvSpPr>
+        <p:spPr/>
+      </p:sp>
+      <p:sp>
+        <p:nvSpPr>
+          <p:cNvPr id="3" name="Notes Placeholder 2"/>
+          <p:cNvSpPr>
+            <a:spLocks noGrp="1"/>
+          </p:cNvSpPr>
+          <p:nvPr>
+            <p:ph type="body" idx="1"/>
+          </p:nvPr>
+        </p:nvSpPr>
+        <p:spPr/>
+        <p:txBody>
+          <a:bodyPr/>
+          <a:lstStyle/>
+          <a:p>
+            <a:endParaRPr lang="en-BE" dirty="0"/>
+          </a:p>
+        </p:txBody>
+      </p:sp>
+      <p:sp>
+        <p:nvSpPr>
+          <p:cNvPr id="4" name="Slide Number Placeholder 3"/>
+          <p:cNvSpPr>
+            <a:spLocks noGrp="1"/>
+          </p:cNvSpPr>
+          <p:nvPr>
+            <p:ph type="sldNum" sz="quarter" idx="5"/>
+          </p:nvPr>
+        </p:nvSpPr>
+        <p:spPr/>
+        <p:txBody>
+          <a:bodyPr/>
+          <a:lstStyle/>
+          <a:p>
+            <a:fld id="{947F9D2B-EF00-4575-9013-113DEEFD58FD}" type="slidenum">
+              <a:rPr lang="en-BE" smtClean="0"/>
+              <a:t>51</a:t>
+            </a:fld>
+            <a:endParaRPr lang="en-BE"/>
+          </a:p>
+        </p:txBody>
+      </p:sp>
+    </p:spTree>
+    <p:extLst>
+      <p:ext uri="{BB962C8B-B14F-4D97-AF65-F5344CB8AC3E}">
+        <p14:creationId xmlns:p14="http://schemas.microsoft.com/office/powerpoint/2010/main" val="4034315587"/>
+      </p:ext>
+    </p:extLst>
+  </p:cSld>
+  <p:clrMapOvr>
+    <a:masterClrMapping/>
+  </p:clrMapOvr>
+</p:notes>
+</file>
+
+<file path=ppt/notesSlides/notesSlide52.xml><?xml version="1.0" encoding="utf-8"?>
+<p:notes xmlns:a="http://schemas.openxmlformats.org/drawingml/2006/main" xmlns:r="http://schemas.openxmlformats.org/officeDocument/2006/relationships" xmlns:p="http://schemas.openxmlformats.org/presentationml/2006/main">
+  <p:cSld>
+    <p:spTree>
+      <p:nvGrpSpPr>
+        <p:cNvPr id="1" name=""/>
+        <p:cNvGrpSpPr/>
+        <p:nvPr/>
+      </p:nvGrpSpPr>
+      <p:grpSpPr>
+        <a:xfrm>
+          <a:off x="0" y="0"/>
+          <a:ext cx="0" cy="0"/>
+          <a:chOff x="0" y="0"/>
+          <a:chExt cx="0" cy="0"/>
+        </a:xfrm>
+      </p:grpSpPr>
+      <p:sp>
+        <p:nvSpPr>
+          <p:cNvPr id="2" name="Slide Image Placeholder 1"/>
+          <p:cNvSpPr>
+            <a:spLocks noGrp="1" noRot="1" noChangeAspect="1"/>
+          </p:cNvSpPr>
+          <p:nvPr>
+            <p:ph type="sldImg"/>
+          </p:nvPr>
+        </p:nvSpPr>
+        <p:spPr/>
+      </p:sp>
+      <p:sp>
+        <p:nvSpPr>
+          <p:cNvPr id="3" name="Notes Placeholder 2"/>
+          <p:cNvSpPr>
+            <a:spLocks noGrp="1"/>
+          </p:cNvSpPr>
+          <p:nvPr>
+            <p:ph type="body" idx="1"/>
+          </p:nvPr>
+        </p:nvSpPr>
+        <p:spPr/>
+        <p:txBody>
+          <a:bodyPr/>
+          <a:lstStyle/>
+          <a:p>
+            <a:endParaRPr lang="en-BE"/>
+          </a:p>
+        </p:txBody>
+      </p:sp>
+      <p:sp>
+        <p:nvSpPr>
+          <p:cNvPr id="4" name="Slide Number Placeholder 3"/>
+          <p:cNvSpPr>
+            <a:spLocks noGrp="1"/>
+          </p:cNvSpPr>
+          <p:nvPr>
+            <p:ph type="sldNum" sz="quarter" idx="5"/>
+          </p:nvPr>
+        </p:nvSpPr>
+        <p:spPr/>
+        <p:txBody>
+          <a:bodyPr/>
+          <a:lstStyle/>
+          <a:p>
+            <a:fld id="{947F9D2B-EF00-4575-9013-113DEEFD58FD}" type="slidenum">
+              <a:rPr lang="en-BE" smtClean="0"/>
+              <a:t>52</a:t>
+            </a:fld>
+            <a:endParaRPr lang="en-BE"/>
+          </a:p>
+        </p:txBody>
+      </p:sp>
+    </p:spTree>
+    <p:extLst>
+      <p:ext uri="{BB962C8B-B14F-4D97-AF65-F5344CB8AC3E}">
+        <p14:creationId xmlns:p14="http://schemas.microsoft.com/office/powerpoint/2010/main" val="3134535678"/>
+      </p:ext>
+    </p:extLst>
+  </p:cSld>
+  <p:clrMapOvr>
+    <a:masterClrMapping/>
+  </p:clrMapOvr>
+</p:notes>
+</file>
+
+<file path=ppt/notesSlides/notesSlide53.xml><?xml version="1.0" encoding="utf-8"?>
+<p:notes xmlns:a="http://schemas.openxmlformats.org/drawingml/2006/main" xmlns:r="http://schemas.openxmlformats.org/officeDocument/2006/relationships" xmlns:p="http://schemas.openxmlformats.org/presentationml/2006/main">
+  <p:cSld>
+    <p:spTree>
+      <p:nvGrpSpPr>
+        <p:cNvPr id="1" name=""/>
+        <p:cNvGrpSpPr/>
+        <p:nvPr/>
+      </p:nvGrpSpPr>
+      <p:grpSpPr>
+        <a:xfrm>
+          <a:off x="0" y="0"/>
+          <a:ext cx="0" cy="0"/>
+          <a:chOff x="0" y="0"/>
+          <a:chExt cx="0" cy="0"/>
+        </a:xfrm>
+      </p:grpSpPr>
+      <p:sp>
+        <p:nvSpPr>
+          <p:cNvPr id="2" name="Slide Image Placeholder 1"/>
+          <p:cNvSpPr>
+            <a:spLocks noGrp="1" noRot="1" noChangeAspect="1"/>
+          </p:cNvSpPr>
+          <p:nvPr>
+            <p:ph type="sldImg"/>
+          </p:nvPr>
+        </p:nvSpPr>
+        <p:spPr/>
+      </p:sp>
+      <p:sp>
+        <p:nvSpPr>
+          <p:cNvPr id="3" name="Notes Placeholder 2"/>
+          <p:cNvSpPr>
+            <a:spLocks noGrp="1"/>
+          </p:cNvSpPr>
+          <p:nvPr>
+            <p:ph type="body" idx="1"/>
+          </p:nvPr>
+        </p:nvSpPr>
+        <p:spPr/>
+        <p:txBody>
+          <a:bodyPr/>
+          <a:lstStyle/>
+          <a:p>
+            <a:endParaRPr lang="en-BE"/>
+          </a:p>
+        </p:txBody>
+      </p:sp>
+      <p:sp>
+        <p:nvSpPr>
+          <p:cNvPr id="4" name="Slide Number Placeholder 3"/>
+          <p:cNvSpPr>
+            <a:spLocks noGrp="1"/>
+          </p:cNvSpPr>
+          <p:nvPr>
+            <p:ph type="sldNum" sz="quarter" idx="5"/>
+          </p:nvPr>
+        </p:nvSpPr>
+        <p:spPr/>
+        <p:txBody>
+          <a:bodyPr/>
+          <a:lstStyle/>
+          <a:p>
+            <a:fld id="{947F9D2B-EF00-4575-9013-113DEEFD58FD}" type="slidenum">
+              <a:rPr lang="en-BE" smtClean="0"/>
+              <a:t>53</a:t>
+            </a:fld>
+            <a:endParaRPr lang="en-BE"/>
+          </a:p>
+        </p:txBody>
+      </p:sp>
+    </p:spTree>
+    <p:extLst>
+      <p:ext uri="{BB962C8B-B14F-4D97-AF65-F5344CB8AC3E}">
+        <p14:creationId xmlns:p14="http://schemas.microsoft.com/office/powerpoint/2010/main" val="3465804595"/>
+      </p:ext>
+    </p:extLst>
+  </p:cSld>
+  <p:clrMapOvr>
+    <a:masterClrMapping/>
+  </p:clrMapOvr>
+</p:notes>
+</file>
+
+<file path=ppt/notesSlides/notesSlide54.xml><?xml version="1.0" encoding="utf-8"?>
+<p:notes xmlns:a="http://schemas.openxmlformats.org/drawingml/2006/main" xmlns:r="http://schemas.openxmlformats.org/officeDocument/2006/relationships" xmlns:p="http://schemas.openxmlformats.org/presentationml/2006/main">
+  <p:cSld>
+    <p:spTree>
+      <p:nvGrpSpPr>
+        <p:cNvPr id="1" name=""/>
+        <p:cNvGrpSpPr/>
+        <p:nvPr/>
+      </p:nvGrpSpPr>
+      <p:grpSpPr>
+        <a:xfrm>
+          <a:off x="0" y="0"/>
+          <a:ext cx="0" cy="0"/>
+          <a:chOff x="0" y="0"/>
+          <a:chExt cx="0" cy="0"/>
+        </a:xfrm>
+      </p:grpSpPr>
+      <p:sp>
+        <p:nvSpPr>
+          <p:cNvPr id="2" name="Slide Image Placeholder 1"/>
+          <p:cNvSpPr>
+            <a:spLocks noGrp="1" noRot="1" noChangeAspect="1"/>
+          </p:cNvSpPr>
+          <p:nvPr>
+            <p:ph type="sldImg"/>
+          </p:nvPr>
+        </p:nvSpPr>
+        <p:spPr/>
+      </p:sp>
+      <p:sp>
+        <p:nvSpPr>
+          <p:cNvPr id="3" name="Notes Placeholder 2"/>
+          <p:cNvSpPr>
+            <a:spLocks noGrp="1"/>
+          </p:cNvSpPr>
+          <p:nvPr>
+            <p:ph type="body" idx="1"/>
+          </p:nvPr>
+        </p:nvSpPr>
+        <p:spPr/>
+        <p:txBody>
+          <a:bodyPr/>
+          <a:lstStyle/>
+          <a:p>
+            <a:endParaRPr lang="en-BE"/>
+          </a:p>
+        </p:txBody>
+      </p:sp>
+      <p:sp>
+        <p:nvSpPr>
+          <p:cNvPr id="4" name="Slide Number Placeholder 3"/>
+          <p:cNvSpPr>
+            <a:spLocks noGrp="1"/>
+          </p:cNvSpPr>
+          <p:nvPr>
+            <p:ph type="sldNum" sz="quarter" idx="5"/>
+          </p:nvPr>
+        </p:nvSpPr>
+        <p:spPr/>
+        <p:txBody>
+          <a:bodyPr/>
+          <a:lstStyle/>
+          <a:p>
+            <a:fld id="{947F9D2B-EF00-4575-9013-113DEEFD58FD}" type="slidenum">
+              <a:rPr lang="en-BE" smtClean="0"/>
+              <a:t>54</a:t>
+            </a:fld>
+            <a:endParaRPr lang="en-BE"/>
+          </a:p>
+        </p:txBody>
+      </p:sp>
+    </p:spTree>
+    <p:extLst>
+      <p:ext uri="{BB962C8B-B14F-4D97-AF65-F5344CB8AC3E}">
+        <p14:creationId xmlns:p14="http://schemas.microsoft.com/office/powerpoint/2010/main" val="4120972149"/>
+      </p:ext>
+    </p:extLst>
+  </p:cSld>
+  <p:clrMapOvr>
+    <a:masterClrMapping/>
+  </p:clrMapOvr>
+</p:notes>
+</file>
+
+<file path=ppt/notesSlides/notesSlide55.xml><?xml version="1.0" encoding="utf-8"?>
+<p:notes xmlns:a="http://schemas.openxmlformats.org/drawingml/2006/main" xmlns:r="http://schemas.openxmlformats.org/officeDocument/2006/relationships" xmlns:p="http://schemas.openxmlformats.org/presentationml/2006/main">
+  <p:cSld>
+    <p:spTree>
+      <p:nvGrpSpPr>
+        <p:cNvPr id="1" name=""/>
+        <p:cNvGrpSpPr/>
+        <p:nvPr/>
+      </p:nvGrpSpPr>
+      <p:grpSpPr>
+        <a:xfrm>
+          <a:off x="0" y="0"/>
+          <a:ext cx="0" cy="0"/>
+          <a:chOff x="0" y="0"/>
+          <a:chExt cx="0" cy="0"/>
+        </a:xfrm>
+      </p:grpSpPr>
+      <p:sp>
+        <p:nvSpPr>
+          <p:cNvPr id="2" name="Slide Image Placeholder 1"/>
+          <p:cNvSpPr>
+            <a:spLocks noGrp="1" noRot="1" noChangeAspect="1"/>
+          </p:cNvSpPr>
+          <p:nvPr>
+            <p:ph type="sldImg"/>
+          </p:nvPr>
+        </p:nvSpPr>
+        <p:spPr/>
+      </p:sp>
+      <p:sp>
+        <p:nvSpPr>
+          <p:cNvPr id="3" name="Notes Placeholder 2"/>
+          <p:cNvSpPr>
+            <a:spLocks noGrp="1"/>
+          </p:cNvSpPr>
+          <p:nvPr>
+            <p:ph type="body" idx="1"/>
+          </p:nvPr>
+        </p:nvSpPr>
+        <p:spPr/>
+        <p:txBody>
+          <a:bodyPr/>
+          <a:lstStyle/>
+          <a:p>
+            <a:endParaRPr lang="en-BE"/>
+          </a:p>
+        </p:txBody>
+      </p:sp>
+      <p:sp>
+        <p:nvSpPr>
+          <p:cNvPr id="4" name="Slide Number Placeholder 3"/>
+          <p:cNvSpPr>
+            <a:spLocks noGrp="1"/>
+          </p:cNvSpPr>
+          <p:nvPr>
+            <p:ph type="sldNum" sz="quarter" idx="5"/>
+          </p:nvPr>
+        </p:nvSpPr>
+        <p:spPr/>
+        <p:txBody>
+          <a:bodyPr/>
+          <a:lstStyle/>
+          <a:p>
+            <a:fld id="{947F9D2B-EF00-4575-9013-113DEEFD58FD}" type="slidenum">
+              <a:rPr lang="en-BE" smtClean="0"/>
+              <a:t>55</a:t>
+            </a:fld>
+            <a:endParaRPr lang="en-BE"/>
+          </a:p>
+        </p:txBody>
+      </p:sp>
+    </p:spTree>
+    <p:extLst>
+      <p:ext uri="{BB962C8B-B14F-4D97-AF65-F5344CB8AC3E}">
+        <p14:creationId xmlns:p14="http://schemas.microsoft.com/office/powerpoint/2010/main" val="1422683819"/>
+      </p:ext>
+    </p:extLst>
+  </p:cSld>
+  <p:clrMapOvr>
+    <a:masterClrMapping/>
+  </p:clrMapOvr>
+</p:notes>
+</file>
+
+<file path=ppt/notesSlides/notesSlide56.xml><?xml version="1.0" encoding="utf-8"?>
+<p:notes xmlns:a="http://schemas.openxmlformats.org/drawingml/2006/main" xmlns:r="http://schemas.openxmlformats.org/officeDocument/2006/relationships" xmlns:p="http://schemas.openxmlformats.org/presentationml/2006/main">
+  <p:cSld>
+    <p:spTree>
+      <p:nvGrpSpPr>
+        <p:cNvPr id="1" name=""/>
+        <p:cNvGrpSpPr/>
+        <p:nvPr/>
+      </p:nvGrpSpPr>
+      <p:grpSpPr>
+        <a:xfrm>
+          <a:off x="0" y="0"/>
+          <a:ext cx="0" cy="0"/>
+          <a:chOff x="0" y="0"/>
+          <a:chExt cx="0" cy="0"/>
+        </a:xfrm>
+      </p:grpSpPr>
+      <p:sp>
+        <p:nvSpPr>
+          <p:cNvPr id="2" name="Slide Image Placeholder 1"/>
+          <p:cNvSpPr>
+            <a:spLocks noGrp="1" noRot="1" noChangeAspect="1"/>
+          </p:cNvSpPr>
+          <p:nvPr>
+            <p:ph type="sldImg"/>
+          </p:nvPr>
+        </p:nvSpPr>
+        <p:spPr/>
+      </p:sp>
+      <p:sp>
+        <p:nvSpPr>
+          <p:cNvPr id="3" name="Notes Placeholder 2"/>
+          <p:cNvSpPr>
+            <a:spLocks noGrp="1"/>
+          </p:cNvSpPr>
+          <p:nvPr>
+            <p:ph type="body" idx="1"/>
+          </p:nvPr>
+        </p:nvSpPr>
+        <p:spPr/>
+        <p:txBody>
+          <a:bodyPr/>
+          <a:lstStyle/>
+          <a:p>
+            <a:endParaRPr lang="en-BE"/>
+          </a:p>
+        </p:txBody>
+      </p:sp>
+      <p:sp>
+        <p:nvSpPr>
+          <p:cNvPr id="4" name="Slide Number Placeholder 3"/>
+          <p:cNvSpPr>
+            <a:spLocks noGrp="1"/>
+          </p:cNvSpPr>
+          <p:nvPr>
+            <p:ph type="sldNum" sz="quarter" idx="5"/>
+          </p:nvPr>
+        </p:nvSpPr>
+        <p:spPr/>
+        <p:txBody>
+          <a:bodyPr/>
+          <a:lstStyle/>
+          <a:p>
+            <a:fld id="{947F9D2B-EF00-4575-9013-113DEEFD58FD}" type="slidenum">
+              <a:rPr lang="en-BE" smtClean="0"/>
+              <a:t>56</a:t>
+            </a:fld>
+            <a:endParaRPr lang="en-BE"/>
+          </a:p>
+        </p:txBody>
+      </p:sp>
+    </p:spTree>
+    <p:extLst>
+      <p:ext uri="{BB962C8B-B14F-4D97-AF65-F5344CB8AC3E}">
+        <p14:creationId xmlns:p14="http://schemas.microsoft.com/office/powerpoint/2010/main" val="3978179360"/>
+      </p:ext>
+    </p:extLst>
+  </p:cSld>
+  <p:clrMapOvr>
+    <a:masterClrMapping/>
+  </p:clrMapOvr>
+</p:notes>
+</file>
+
+<file path=ppt/notesSlides/notesSlide57.xml><?xml version="1.0" encoding="utf-8"?>
+<p:notes xmlns:a="http://schemas.openxmlformats.org/drawingml/2006/main" xmlns:r="http://schemas.openxmlformats.org/officeDocument/2006/relationships" xmlns:p="http://schemas.openxmlformats.org/presentationml/2006/main">
+  <p:cSld>
+    <p:spTree>
+      <p:nvGrpSpPr>
+        <p:cNvPr id="1" name=""/>
+        <p:cNvGrpSpPr/>
+        <p:nvPr/>
+      </p:nvGrpSpPr>
+      <p:grpSpPr>
+        <a:xfrm>
+          <a:off x="0" y="0"/>
+          <a:ext cx="0" cy="0"/>
+          <a:chOff x="0" y="0"/>
+          <a:chExt cx="0" cy="0"/>
+        </a:xfrm>
+      </p:grpSpPr>
+      <p:sp>
+        <p:nvSpPr>
+          <p:cNvPr id="2" name="Slide Image Placeholder 1"/>
+          <p:cNvSpPr>
+            <a:spLocks noGrp="1" noRot="1" noChangeAspect="1"/>
+          </p:cNvSpPr>
+          <p:nvPr>
+            <p:ph type="sldImg"/>
+          </p:nvPr>
+        </p:nvSpPr>
+        <p:spPr/>
+      </p:sp>
+      <p:sp>
+        <p:nvSpPr>
+          <p:cNvPr id="3" name="Notes Placeholder 2"/>
+          <p:cNvSpPr>
+            <a:spLocks noGrp="1"/>
+          </p:cNvSpPr>
+          <p:nvPr>
+            <p:ph type="body" idx="1"/>
+          </p:nvPr>
+        </p:nvSpPr>
+        <p:spPr/>
+        <p:txBody>
+          <a:bodyPr/>
+          <a:lstStyle/>
+          <a:p>
+            <a:endParaRPr lang="en-BE"/>
+          </a:p>
+        </p:txBody>
+      </p:sp>
+      <p:sp>
+        <p:nvSpPr>
+          <p:cNvPr id="4" name="Slide Number Placeholder 3"/>
+          <p:cNvSpPr>
+            <a:spLocks noGrp="1"/>
+          </p:cNvSpPr>
+          <p:nvPr>
+            <p:ph type="sldNum" sz="quarter" idx="5"/>
+          </p:nvPr>
+        </p:nvSpPr>
+        <p:spPr/>
+        <p:txBody>
+          <a:bodyPr/>
+          <a:lstStyle/>
+          <a:p>
+            <a:fld id="{947F9D2B-EF00-4575-9013-113DEEFD58FD}" type="slidenum">
+              <a:rPr lang="en-BE" smtClean="0"/>
+              <a:t>57</a:t>
+            </a:fld>
+            <a:endParaRPr lang="en-BE"/>
+          </a:p>
+        </p:txBody>
+      </p:sp>
+    </p:spTree>
+    <p:extLst>
+      <p:ext uri="{BB962C8B-B14F-4D97-AF65-F5344CB8AC3E}">
+        <p14:creationId xmlns:p14="http://schemas.microsoft.com/office/powerpoint/2010/main" val="1880857378"/>
+      </p:ext>
+    </p:extLst>
+  </p:cSld>
+  <p:clrMapOvr>
+    <a:masterClrMapping/>
+  </p:clrMapOvr>
+</p:notes>
+</file>
+
+<file path=ppt/notesSlides/notesSlide58.xml><?xml version="1.0" encoding="utf-8"?>
+<p:notes xmlns:a="http://schemas.openxmlformats.org/drawingml/2006/main" xmlns:r="http://schemas.openxmlformats.org/officeDocument/2006/relationships" xmlns:p="http://schemas.openxmlformats.org/presentationml/2006/main">
+  <p:cSld>
+    <p:spTree>
+      <p:nvGrpSpPr>
+        <p:cNvPr id="1" name=""/>
+        <p:cNvGrpSpPr/>
+        <p:nvPr/>
+      </p:nvGrpSpPr>
+      <p:grpSpPr>
+        <a:xfrm>
+          <a:off x="0" y="0"/>
+          <a:ext cx="0" cy="0"/>
+          <a:chOff x="0" y="0"/>
+          <a:chExt cx="0" cy="0"/>
+        </a:xfrm>
+      </p:grpSpPr>
+      <p:sp>
+        <p:nvSpPr>
+          <p:cNvPr id="2" name="Slide Image Placeholder 1"/>
+          <p:cNvSpPr>
+            <a:spLocks noGrp="1" noRot="1" noChangeAspect="1"/>
+          </p:cNvSpPr>
+          <p:nvPr>
+            <p:ph type="sldImg"/>
+          </p:nvPr>
+        </p:nvSpPr>
+        <p:spPr/>
+      </p:sp>
+      <p:sp>
+        <p:nvSpPr>
+          <p:cNvPr id="3" name="Notes Placeholder 2"/>
+          <p:cNvSpPr>
+            <a:spLocks noGrp="1"/>
+          </p:cNvSpPr>
+          <p:nvPr>
+            <p:ph type="body" idx="1"/>
+          </p:nvPr>
+        </p:nvSpPr>
+        <p:spPr/>
+        <p:txBody>
+          <a:bodyPr/>
+          <a:lstStyle/>
+          <a:p>
+            <a:endParaRPr lang="en-BE"/>
+          </a:p>
+        </p:txBody>
+      </p:sp>
+      <p:sp>
+        <p:nvSpPr>
+          <p:cNvPr id="4" name="Slide Number Placeholder 3"/>
+          <p:cNvSpPr>
+            <a:spLocks noGrp="1"/>
+          </p:cNvSpPr>
+          <p:nvPr>
+            <p:ph type="sldNum" sz="quarter" idx="5"/>
+          </p:nvPr>
+        </p:nvSpPr>
+        <p:spPr/>
+        <p:txBody>
+          <a:bodyPr/>
+          <a:lstStyle/>
+          <a:p>
+            <a:fld id="{947F9D2B-EF00-4575-9013-113DEEFD58FD}" type="slidenum">
+              <a:rPr lang="en-BE" smtClean="0"/>
+              <a:t>58</a:t>
+            </a:fld>
+            <a:endParaRPr lang="en-BE"/>
+          </a:p>
+        </p:txBody>
+      </p:sp>
+    </p:spTree>
+    <p:extLst>
+      <p:ext uri="{BB962C8B-B14F-4D97-AF65-F5344CB8AC3E}">
+        <p14:creationId xmlns:p14="http://schemas.microsoft.com/office/powerpoint/2010/main" val="895838"/>
+      </p:ext>
+    </p:extLst>
+  </p:cSld>
+  <p:clrMapOvr>
+    <a:masterClrMapping/>
+  </p:clrMapOvr>
+</p:notes>
+</file>
+
+<file path=ppt/notesSlides/notesSlide59.xml><?xml version="1.0" encoding="utf-8"?>
+<p:notes xmlns:a="http://schemas.openxmlformats.org/drawingml/2006/main" xmlns:r="http://schemas.openxmlformats.org/officeDocument/2006/relationships" xmlns:p="http://schemas.openxmlformats.org/presentationml/2006/main">
+  <p:cSld>
+    <p:spTree>
+      <p:nvGrpSpPr>
+        <p:cNvPr id="1" name=""/>
+        <p:cNvGrpSpPr/>
+        <p:nvPr/>
+      </p:nvGrpSpPr>
+      <p:grpSpPr>
+        <a:xfrm>
+          <a:off x="0" y="0"/>
+          <a:ext cx="0" cy="0"/>
+          <a:chOff x="0" y="0"/>
+          <a:chExt cx="0" cy="0"/>
+        </a:xfrm>
+      </p:grpSpPr>
+      <p:sp>
+        <p:nvSpPr>
+          <p:cNvPr id="2" name="Slide Image Placeholder 1"/>
+          <p:cNvSpPr>
+            <a:spLocks noGrp="1" noRot="1" noChangeAspect="1"/>
+          </p:cNvSpPr>
+          <p:nvPr>
+            <p:ph type="sldImg"/>
+          </p:nvPr>
+        </p:nvSpPr>
+        <p:spPr/>
+      </p:sp>
+      <p:sp>
+        <p:nvSpPr>
+          <p:cNvPr id="3" name="Notes Placeholder 2"/>
+          <p:cNvSpPr>
+            <a:spLocks noGrp="1"/>
+          </p:cNvSpPr>
+          <p:nvPr>
+            <p:ph type="body" idx="1"/>
+          </p:nvPr>
+        </p:nvSpPr>
+        <p:spPr/>
+        <p:txBody>
+          <a:bodyPr/>
+          <a:lstStyle/>
+          <a:p>
+            <a:endParaRPr lang="en-BE"/>
+          </a:p>
+        </p:txBody>
+      </p:sp>
+      <p:sp>
+        <p:nvSpPr>
+          <p:cNvPr id="4" name="Slide Number Placeholder 3"/>
+          <p:cNvSpPr>
+            <a:spLocks noGrp="1"/>
+          </p:cNvSpPr>
+          <p:nvPr>
+            <p:ph type="sldNum" sz="quarter" idx="5"/>
+          </p:nvPr>
+        </p:nvSpPr>
+        <p:spPr/>
+        <p:txBody>
+          <a:bodyPr/>
+          <a:lstStyle/>
+          <a:p>
+            <a:fld id="{947F9D2B-EF00-4575-9013-113DEEFD58FD}" type="slidenum">
+              <a:rPr lang="en-BE" smtClean="0"/>
+              <a:t>59</a:t>
+            </a:fld>
+            <a:endParaRPr lang="en-BE"/>
+          </a:p>
+        </p:txBody>
+      </p:sp>
+    </p:spTree>
+    <p:extLst>
+      <p:ext uri="{BB962C8B-B14F-4D97-AF65-F5344CB8AC3E}">
+        <p14:creationId xmlns:p14="http://schemas.microsoft.com/office/powerpoint/2010/main" val="3980842067"/>
+      </p:ext>
+    </p:extLst>
+  </p:cSld>
+  <p:clrMapOvr>
+    <a:masterClrMapping/>
+  </p:clrMapOvr>
+</p:notes>
+</file>
+
+<file path=ppt/notesSlides/notesSlide6.xml><?xml version="1.0" encoding="utf-8"?>
+<p:notes xmlns:a="http://schemas.openxmlformats.org/drawingml/2006/main" xmlns:r="http://schemas.openxmlformats.org/officeDocument/2006/relationships" xmlns:p="http://schemas.openxmlformats.org/presentationml/2006/main">
+  <p:cSld>
+    <p:spTree>
+      <p:nvGrpSpPr>
+        <p:cNvPr id="1" name=""/>
+        <p:cNvGrpSpPr/>
+        <p:nvPr/>
+      </p:nvGrpSpPr>
+      <p:grpSpPr>
+        <a:xfrm>
+          <a:off x="0" y="0"/>
+          <a:ext cx="0" cy="0"/>
+          <a:chOff x="0" y="0"/>
+          <a:chExt cx="0" cy="0"/>
+        </a:xfrm>
+      </p:grpSpPr>
+      <p:sp>
+        <p:nvSpPr>
+          <p:cNvPr id="2" name="Slide Image Placeholder 1"/>
+          <p:cNvSpPr>
+            <a:spLocks noGrp="1" noRot="1" noChangeAspect="1"/>
+          </p:cNvSpPr>
+          <p:nvPr>
+            <p:ph type="sldImg"/>
+          </p:nvPr>
+        </p:nvSpPr>
+        <p:spPr/>
+      </p:sp>
+      <p:sp>
+        <p:nvSpPr>
+          <p:cNvPr id="3" name="Notes Placeholder 2"/>
+          <p:cNvSpPr>
+            <a:spLocks noGrp="1"/>
+          </p:cNvSpPr>
+          <p:nvPr>
+            <p:ph type="body" idx="1"/>
+          </p:nvPr>
+        </p:nvSpPr>
+        <p:spPr/>
+        <p:txBody>
+          <a:bodyPr/>
+          <a:lstStyle/>
+          <a:p>
+            <a:endParaRPr lang="en-BE" dirty="0"/>
+          </a:p>
+        </p:txBody>
+      </p:sp>
+      <p:sp>
+        <p:nvSpPr>
+          <p:cNvPr id="4" name="Slide Number Placeholder 3"/>
+          <p:cNvSpPr>
+            <a:spLocks noGrp="1"/>
+          </p:cNvSpPr>
+          <p:nvPr>
+            <p:ph type="sldNum" sz="quarter" idx="5"/>
+          </p:nvPr>
+        </p:nvSpPr>
+        <p:spPr/>
+        <p:txBody>
+          <a:bodyPr/>
+          <a:lstStyle/>
+          <a:p>
+            <a:fld id="{947F9D2B-EF00-4575-9013-113DEEFD58FD}" type="slidenum">
+              <a:rPr lang="en-BE" smtClean="0"/>
+              <a:t>6</a:t>
+            </a:fld>
+            <a:endParaRPr lang="en-BE"/>
+          </a:p>
+        </p:txBody>
+      </p:sp>
+    </p:spTree>
+    <p:extLst>
+      <p:ext uri="{BB962C8B-B14F-4D97-AF65-F5344CB8AC3E}">
+        <p14:creationId xmlns:p14="http://schemas.microsoft.com/office/powerpoint/2010/main" val="4164748571"/>
+      </p:ext>
+    </p:extLst>
+  </p:cSld>
+  <p:clrMapOvr>
+    <a:masterClrMapping/>
+  </p:clrMapOvr>
+</p:notes>
+</file>
+
+<file path=ppt/notesSlides/notesSlide60.xml><?xml version="1.0" encoding="utf-8"?>
+<p:notes xmlns:a="http://schemas.openxmlformats.org/drawingml/2006/main" xmlns:r="http://schemas.openxmlformats.org/officeDocument/2006/relationships" xmlns:p="http://schemas.openxmlformats.org/presentationml/2006/main">
+  <p:cSld>
+    <p:spTree>
+      <p:nvGrpSpPr>
+        <p:cNvPr id="1" name=""/>
+        <p:cNvGrpSpPr/>
+        <p:nvPr/>
+      </p:nvGrpSpPr>
+      <p:grpSpPr>
+        <a:xfrm>
+          <a:off x="0" y="0"/>
+          <a:ext cx="0" cy="0"/>
+          <a:chOff x="0" y="0"/>
+          <a:chExt cx="0" cy="0"/>
+        </a:xfrm>
+      </p:grpSpPr>
+      <p:sp>
+        <p:nvSpPr>
+          <p:cNvPr id="2" name="Slide Image Placeholder 1"/>
+          <p:cNvSpPr>
+            <a:spLocks noGrp="1" noRot="1" noChangeAspect="1"/>
+          </p:cNvSpPr>
+          <p:nvPr>
+            <p:ph type="sldImg"/>
+          </p:nvPr>
+        </p:nvSpPr>
+        <p:spPr/>
+      </p:sp>
+      <p:sp>
+        <p:nvSpPr>
+          <p:cNvPr id="3" name="Notes Placeholder 2"/>
+          <p:cNvSpPr>
+            <a:spLocks noGrp="1"/>
+          </p:cNvSpPr>
+          <p:nvPr>
+            <p:ph type="body" idx="1"/>
+          </p:nvPr>
+        </p:nvSpPr>
+        <p:spPr/>
+        <p:txBody>
+          <a:bodyPr/>
+          <a:lstStyle/>
+          <a:p>
+            <a:endParaRPr lang="en-BE"/>
+          </a:p>
+        </p:txBody>
+      </p:sp>
+      <p:sp>
+        <p:nvSpPr>
+          <p:cNvPr id="4" name="Slide Number Placeholder 3"/>
+          <p:cNvSpPr>
+            <a:spLocks noGrp="1"/>
+          </p:cNvSpPr>
+          <p:nvPr>
+            <p:ph type="sldNum" sz="quarter" idx="5"/>
+          </p:nvPr>
+        </p:nvSpPr>
+        <p:spPr/>
+        <p:txBody>
+          <a:bodyPr/>
+          <a:lstStyle/>
+          <a:p>
+            <a:fld id="{947F9D2B-EF00-4575-9013-113DEEFD58FD}" type="slidenum">
+              <a:rPr lang="en-BE" smtClean="0"/>
+              <a:t>60</a:t>
+            </a:fld>
+            <a:endParaRPr lang="en-BE"/>
+          </a:p>
+        </p:txBody>
+      </p:sp>
+    </p:spTree>
+    <p:extLst>
+      <p:ext uri="{BB962C8B-B14F-4D97-AF65-F5344CB8AC3E}">
+        <p14:creationId xmlns:p14="http://schemas.microsoft.com/office/powerpoint/2010/main" val="3442770888"/>
+      </p:ext>
+    </p:extLst>
+  </p:cSld>
+  <p:clrMapOvr>
+    <a:masterClrMapping/>
+  </p:clrMapOvr>
+</p:notes>
+</file>
+
+<file path=ppt/notesSlides/notesSlide61.xml><?xml version="1.0" encoding="utf-8"?>
+<p:notes xmlns:a="http://schemas.openxmlformats.org/drawingml/2006/main" xmlns:r="http://schemas.openxmlformats.org/officeDocument/2006/relationships" xmlns:p="http://schemas.openxmlformats.org/presentationml/2006/main">
+  <p:cSld>
+    <p:spTree>
+      <p:nvGrpSpPr>
+        <p:cNvPr id="1" name=""/>
+        <p:cNvGrpSpPr/>
+        <p:nvPr/>
+      </p:nvGrpSpPr>
+      <p:grpSpPr>
+        <a:xfrm>
+          <a:off x="0" y="0"/>
+          <a:ext cx="0" cy="0"/>
+          <a:chOff x="0" y="0"/>
+          <a:chExt cx="0" cy="0"/>
+        </a:xfrm>
+      </p:grpSpPr>
+      <p:sp>
+        <p:nvSpPr>
+          <p:cNvPr id="2" name="Slide Image Placeholder 1"/>
+          <p:cNvSpPr>
+            <a:spLocks noGrp="1" noRot="1" noChangeAspect="1"/>
+          </p:cNvSpPr>
+          <p:nvPr>
+            <p:ph type="sldImg"/>
+          </p:nvPr>
+        </p:nvSpPr>
+        <p:spPr/>
+      </p:sp>
+      <p:sp>
+        <p:nvSpPr>
+          <p:cNvPr id="3" name="Notes Placeholder 2"/>
+          <p:cNvSpPr>
+            <a:spLocks noGrp="1"/>
+          </p:cNvSpPr>
+          <p:nvPr>
+            <p:ph type="body" idx="1"/>
+          </p:nvPr>
+        </p:nvSpPr>
+        <p:spPr/>
+        <p:txBody>
+          <a:bodyPr/>
+          <a:lstStyle/>
+          <a:p>
+            <a:endParaRPr lang="en-BE"/>
+          </a:p>
+        </p:txBody>
+      </p:sp>
+      <p:sp>
+        <p:nvSpPr>
+          <p:cNvPr id="4" name="Slide Number Placeholder 3"/>
+          <p:cNvSpPr>
+            <a:spLocks noGrp="1"/>
+          </p:cNvSpPr>
+          <p:nvPr>
+            <p:ph type="sldNum" sz="quarter" idx="5"/>
+          </p:nvPr>
+        </p:nvSpPr>
+        <p:spPr/>
+        <p:txBody>
+          <a:bodyPr/>
+          <a:lstStyle/>
+          <a:p>
+            <a:fld id="{947F9D2B-EF00-4575-9013-113DEEFD58FD}" type="slidenum">
+              <a:rPr lang="en-BE" smtClean="0"/>
+              <a:t>61</a:t>
+            </a:fld>
+            <a:endParaRPr lang="en-BE"/>
+          </a:p>
+        </p:txBody>
+      </p:sp>
+    </p:spTree>
+    <p:extLst>
+      <p:ext uri="{BB962C8B-B14F-4D97-AF65-F5344CB8AC3E}">
+        <p14:creationId xmlns:p14="http://schemas.microsoft.com/office/powerpoint/2010/main" val="670739626"/>
+      </p:ext>
+    </p:extLst>
+  </p:cSld>
+  <p:clrMapOvr>
+    <a:masterClrMapping/>
+  </p:clrMapOvr>
+</p:notes>
+</file>
+
+<file path=ppt/notesSlides/notesSlide62.xml><?xml version="1.0" encoding="utf-8"?>
+<p:notes xmlns:a="http://schemas.openxmlformats.org/drawingml/2006/main" xmlns:r="http://schemas.openxmlformats.org/officeDocument/2006/relationships" xmlns:p="http://schemas.openxmlformats.org/presentationml/2006/main">
+  <p:cSld>
+    <p:spTree>
+      <p:nvGrpSpPr>
+        <p:cNvPr id="1" name=""/>
+        <p:cNvGrpSpPr/>
+        <p:nvPr/>
+      </p:nvGrpSpPr>
+      <p:grpSpPr>
+        <a:xfrm>
+          <a:off x="0" y="0"/>
+          <a:ext cx="0" cy="0"/>
+          <a:chOff x="0" y="0"/>
+          <a:chExt cx="0" cy="0"/>
+        </a:xfrm>
+      </p:grpSpPr>
+      <p:sp>
+        <p:nvSpPr>
+          <p:cNvPr id="2" name="Slide Image Placeholder 1"/>
+          <p:cNvSpPr>
+            <a:spLocks noGrp="1" noRot="1" noChangeAspect="1"/>
+          </p:cNvSpPr>
+          <p:nvPr>
+            <p:ph type="sldImg"/>
+          </p:nvPr>
+        </p:nvSpPr>
+        <p:spPr/>
+      </p:sp>
+      <p:sp>
+        <p:nvSpPr>
+          <p:cNvPr id="3" name="Notes Placeholder 2"/>
+          <p:cNvSpPr>
+            <a:spLocks noGrp="1"/>
+          </p:cNvSpPr>
+          <p:nvPr>
+            <p:ph type="body" idx="1"/>
+          </p:nvPr>
+        </p:nvSpPr>
+        <p:spPr/>
+        <p:txBody>
+          <a:bodyPr/>
+          <a:lstStyle/>
+          <a:p>
+            <a:endParaRPr lang="en-BE"/>
+          </a:p>
+        </p:txBody>
+      </p:sp>
+      <p:sp>
+        <p:nvSpPr>
+          <p:cNvPr id="4" name="Slide Number Placeholder 3"/>
+          <p:cNvSpPr>
+            <a:spLocks noGrp="1"/>
+          </p:cNvSpPr>
+          <p:nvPr>
+            <p:ph type="sldNum" sz="quarter" idx="5"/>
+          </p:nvPr>
+        </p:nvSpPr>
+        <p:spPr/>
+        <p:txBody>
+          <a:bodyPr/>
+          <a:lstStyle/>
+          <a:p>
+            <a:fld id="{947F9D2B-EF00-4575-9013-113DEEFD58FD}" type="slidenum">
+              <a:rPr lang="en-BE" smtClean="0"/>
+              <a:t>62</a:t>
+            </a:fld>
+            <a:endParaRPr lang="en-BE"/>
+          </a:p>
+        </p:txBody>
+      </p:sp>
+    </p:spTree>
+    <p:extLst>
+      <p:ext uri="{BB962C8B-B14F-4D97-AF65-F5344CB8AC3E}">
+        <p14:creationId xmlns:p14="http://schemas.microsoft.com/office/powerpoint/2010/main" val="2044179946"/>
+      </p:ext>
+    </p:extLst>
+  </p:cSld>
+  <p:clrMapOvr>
+    <a:masterClrMapping/>
+  </p:clrMapOvr>
+</p:notes>
+</file>
+
+<file path=ppt/notesSlides/notesSlide63.xml><?xml version="1.0" encoding="utf-8"?>
+<p:notes xmlns:a="http://schemas.openxmlformats.org/drawingml/2006/main" xmlns:r="http://schemas.openxmlformats.org/officeDocument/2006/relationships" xmlns:p="http://schemas.openxmlformats.org/presentationml/2006/main">
+  <p:cSld>
+    <p:spTree>
+      <p:nvGrpSpPr>
+        <p:cNvPr id="1" name=""/>
+        <p:cNvGrpSpPr/>
+        <p:nvPr/>
+      </p:nvGrpSpPr>
+      <p:grpSpPr>
+        <a:xfrm>
+          <a:off x="0" y="0"/>
+          <a:ext cx="0" cy="0"/>
+          <a:chOff x="0" y="0"/>
+          <a:chExt cx="0" cy="0"/>
+        </a:xfrm>
+      </p:grpSpPr>
+      <p:sp>
+        <p:nvSpPr>
+          <p:cNvPr id="2" name="Slide Image Placeholder 1"/>
+          <p:cNvSpPr>
+            <a:spLocks noGrp="1" noRot="1" noChangeAspect="1"/>
+          </p:cNvSpPr>
+          <p:nvPr>
+            <p:ph type="sldImg"/>
+          </p:nvPr>
+        </p:nvSpPr>
+        <p:spPr/>
+      </p:sp>
+      <p:sp>
+        <p:nvSpPr>
+          <p:cNvPr id="3" name="Notes Placeholder 2"/>
+          <p:cNvSpPr>
+            <a:spLocks noGrp="1"/>
+          </p:cNvSpPr>
+          <p:nvPr>
+            <p:ph type="body" idx="1"/>
+          </p:nvPr>
+        </p:nvSpPr>
+        <p:spPr/>
+        <p:txBody>
+          <a:bodyPr/>
+          <a:lstStyle/>
+          <a:p>
+            <a:endParaRPr lang="en-BE"/>
+          </a:p>
+        </p:txBody>
+      </p:sp>
+      <p:sp>
+        <p:nvSpPr>
+          <p:cNvPr id="4" name="Slide Number Placeholder 3"/>
+          <p:cNvSpPr>
+            <a:spLocks noGrp="1"/>
+          </p:cNvSpPr>
+          <p:nvPr>
+            <p:ph type="sldNum" sz="quarter" idx="5"/>
+          </p:nvPr>
+        </p:nvSpPr>
+        <p:spPr/>
+        <p:txBody>
+          <a:bodyPr/>
+          <a:lstStyle/>
+          <a:p>
+            <a:fld id="{947F9D2B-EF00-4575-9013-113DEEFD58FD}" type="slidenum">
+              <a:rPr lang="en-BE" smtClean="0"/>
+              <a:t>63</a:t>
+            </a:fld>
+            <a:endParaRPr lang="en-BE"/>
+          </a:p>
+        </p:txBody>
+      </p:sp>
+    </p:spTree>
+    <p:extLst>
+      <p:ext uri="{BB962C8B-B14F-4D97-AF65-F5344CB8AC3E}">
+        <p14:creationId xmlns:p14="http://schemas.microsoft.com/office/powerpoint/2010/main" val="1321647412"/>
+      </p:ext>
+    </p:extLst>
+  </p:cSld>
+  <p:clrMapOvr>
+    <a:masterClrMapping/>
+  </p:clrMapOvr>
+</p:notes>
+</file>
+
+<file path=ppt/notesSlides/notesSlide64.xml><?xml version="1.0" encoding="utf-8"?>
+<p:notes xmlns:a="http://schemas.openxmlformats.org/drawingml/2006/main" xmlns:r="http://schemas.openxmlformats.org/officeDocument/2006/relationships" xmlns:p="http://schemas.openxmlformats.org/presentationml/2006/main">
+  <p:cSld>
+    <p:spTree>
+      <p:nvGrpSpPr>
+        <p:cNvPr id="1" name=""/>
+        <p:cNvGrpSpPr/>
+        <p:nvPr/>
+      </p:nvGrpSpPr>
+      <p:grpSpPr>
+        <a:xfrm>
+          <a:off x="0" y="0"/>
+          <a:ext cx="0" cy="0"/>
+          <a:chOff x="0" y="0"/>
+          <a:chExt cx="0" cy="0"/>
+        </a:xfrm>
+      </p:grpSpPr>
+      <p:sp>
+        <p:nvSpPr>
+          <p:cNvPr id="2" name="Slide Image Placeholder 1"/>
+          <p:cNvSpPr>
+            <a:spLocks noGrp="1" noRot="1" noChangeAspect="1"/>
+          </p:cNvSpPr>
+          <p:nvPr>
+            <p:ph type="sldImg"/>
+          </p:nvPr>
+        </p:nvSpPr>
+        <p:spPr/>
+      </p:sp>
+      <p:sp>
+        <p:nvSpPr>
+          <p:cNvPr id="3" name="Notes Placeholder 2"/>
+          <p:cNvSpPr>
+            <a:spLocks noGrp="1"/>
+          </p:cNvSpPr>
+          <p:nvPr>
+            <p:ph type="body" idx="1"/>
+          </p:nvPr>
+        </p:nvSpPr>
+        <p:spPr/>
+        <p:txBody>
+          <a:bodyPr/>
+          <a:lstStyle/>
+          <a:p>
+            <a:endParaRPr lang="en-BE"/>
+          </a:p>
+        </p:txBody>
+      </p:sp>
+      <p:sp>
+        <p:nvSpPr>
+          <p:cNvPr id="4" name="Slide Number Placeholder 3"/>
+          <p:cNvSpPr>
+            <a:spLocks noGrp="1"/>
+          </p:cNvSpPr>
+          <p:nvPr>
+            <p:ph type="sldNum" sz="quarter" idx="5"/>
+          </p:nvPr>
+        </p:nvSpPr>
+        <p:spPr/>
+        <p:txBody>
+          <a:bodyPr/>
+          <a:lstStyle/>
+          <a:p>
+            <a:fld id="{947F9D2B-EF00-4575-9013-113DEEFD58FD}" type="slidenum">
+              <a:rPr lang="en-BE" smtClean="0"/>
+              <a:t>64</a:t>
+            </a:fld>
+            <a:endParaRPr lang="en-BE"/>
+          </a:p>
+        </p:txBody>
+      </p:sp>
+    </p:spTree>
+    <p:extLst>
+      <p:ext uri="{BB962C8B-B14F-4D97-AF65-F5344CB8AC3E}">
+        <p14:creationId xmlns:p14="http://schemas.microsoft.com/office/powerpoint/2010/main" val="2664911150"/>
+      </p:ext>
+    </p:extLst>
+  </p:cSld>
+  <p:clrMapOvr>
+    <a:masterClrMapping/>
+  </p:clrMapOvr>
+</p:notes>
+</file>
+
+<file path=ppt/notesSlides/notesSlide65.xml><?xml version="1.0" encoding="utf-8"?>
+<p:notes xmlns:a="http://schemas.openxmlformats.org/drawingml/2006/main" xmlns:r="http://schemas.openxmlformats.org/officeDocument/2006/relationships" xmlns:p="http://schemas.openxmlformats.org/presentationml/2006/main">
+  <p:cSld>
+    <p:spTree>
+      <p:nvGrpSpPr>
+        <p:cNvPr id="1" name=""/>
+        <p:cNvGrpSpPr/>
+        <p:nvPr/>
+      </p:nvGrpSpPr>
+      <p:grpSpPr>
+        <a:xfrm>
+          <a:off x="0" y="0"/>
+          <a:ext cx="0" cy="0"/>
+          <a:chOff x="0" y="0"/>
+          <a:chExt cx="0" cy="0"/>
+        </a:xfrm>
+      </p:grpSpPr>
+      <p:sp>
+        <p:nvSpPr>
+          <p:cNvPr id="2" name="Slide Image Placeholder 1"/>
+          <p:cNvSpPr>
+            <a:spLocks noGrp="1" noRot="1" noChangeAspect="1"/>
+          </p:cNvSpPr>
+          <p:nvPr>
+            <p:ph type="sldImg"/>
+          </p:nvPr>
+        </p:nvSpPr>
+        <p:spPr/>
+      </p:sp>
+      <p:sp>
+        <p:nvSpPr>
+          <p:cNvPr id="3" name="Notes Placeholder 2"/>
+          <p:cNvSpPr>
+            <a:spLocks noGrp="1"/>
+          </p:cNvSpPr>
+          <p:nvPr>
+            <p:ph type="body" idx="1"/>
+          </p:nvPr>
+        </p:nvSpPr>
+        <p:spPr/>
+        <p:txBody>
+          <a:bodyPr/>
+          <a:lstStyle/>
+          <a:p>
+            <a:r>
+              <a:rPr lang="en-US" dirty="0"/>
+              <a:t>Remember the first class? We can use the dot product between the normal and the direction of the light to create a very simple appearance of a lit (light falls on it) surface</a:t>
+            </a:r>
+            <a:endParaRPr lang="en-BE" dirty="0"/>
+          </a:p>
+        </p:txBody>
+      </p:sp>
+      <p:sp>
+        <p:nvSpPr>
+          <p:cNvPr id="4" name="Slide Number Placeholder 3"/>
+          <p:cNvSpPr>
+            <a:spLocks noGrp="1"/>
+          </p:cNvSpPr>
+          <p:nvPr>
+            <p:ph type="sldNum" sz="quarter" idx="5"/>
+          </p:nvPr>
+        </p:nvSpPr>
+        <p:spPr/>
+        <p:txBody>
+          <a:bodyPr/>
+          <a:lstStyle/>
+          <a:p>
+            <a:fld id="{947F9D2B-EF00-4575-9013-113DEEFD58FD}" type="slidenum">
+              <a:rPr lang="en-BE" smtClean="0"/>
+              <a:t>65</a:t>
+            </a:fld>
+            <a:endParaRPr lang="en-BE"/>
+          </a:p>
+        </p:txBody>
+      </p:sp>
+    </p:spTree>
+    <p:extLst>
+      <p:ext uri="{BB962C8B-B14F-4D97-AF65-F5344CB8AC3E}">
+        <p14:creationId xmlns:p14="http://schemas.microsoft.com/office/powerpoint/2010/main" val="3894583766"/>
+      </p:ext>
+    </p:extLst>
+  </p:cSld>
+  <p:clrMapOvr>
+    <a:masterClrMapping/>
+  </p:clrMapOvr>
+</p:notes>
+</file>
+
+<file path=ppt/notesSlides/notesSlide66.xml><?xml version="1.0" encoding="utf-8"?>
+<p:notes xmlns:a="http://schemas.openxmlformats.org/drawingml/2006/main" xmlns:r="http://schemas.openxmlformats.org/officeDocument/2006/relationships" xmlns:p="http://schemas.openxmlformats.org/presentationml/2006/main">
+  <p:cSld>
+    <p:spTree>
+      <p:nvGrpSpPr>
+        <p:cNvPr id="1" name=""/>
+        <p:cNvGrpSpPr/>
+        <p:nvPr/>
+      </p:nvGrpSpPr>
+      <p:grpSpPr>
+        <a:xfrm>
+          <a:off x="0" y="0"/>
+          <a:ext cx="0" cy="0"/>
+          <a:chOff x="0" y="0"/>
+          <a:chExt cx="0" cy="0"/>
+        </a:xfrm>
+      </p:grpSpPr>
+      <p:sp>
+        <p:nvSpPr>
+          <p:cNvPr id="2" name="Slide Image Placeholder 1"/>
+          <p:cNvSpPr>
+            <a:spLocks noGrp="1" noRot="1" noChangeAspect="1"/>
+          </p:cNvSpPr>
+          <p:nvPr>
+            <p:ph type="sldImg"/>
+          </p:nvPr>
+        </p:nvSpPr>
+        <p:spPr/>
+      </p:sp>
+      <p:sp>
+        <p:nvSpPr>
+          <p:cNvPr id="3" name="Notes Placeholder 2"/>
+          <p:cNvSpPr>
+            <a:spLocks noGrp="1"/>
+          </p:cNvSpPr>
+          <p:nvPr>
+            <p:ph type="body" idx="1"/>
+          </p:nvPr>
+        </p:nvSpPr>
+        <p:spPr/>
+        <p:txBody>
+          <a:bodyPr/>
+          <a:lstStyle/>
+          <a:p>
+            <a:r>
+              <a:rPr lang="en-US" dirty="0"/>
+              <a:t>I actually never find myself caring about the length of the </a:t>
+            </a:r>
+            <a:r>
+              <a:rPr lang="en-US" dirty="0" err="1"/>
+              <a:t>crossproduct</a:t>
+            </a:r>
+            <a:r>
+              <a:rPr lang="en-US" dirty="0"/>
+              <a:t>, so I’m in the habit of normalizing it.</a:t>
+            </a:r>
+          </a:p>
+        </p:txBody>
+      </p:sp>
+      <p:sp>
+        <p:nvSpPr>
+          <p:cNvPr id="4" name="Slide Number Placeholder 3"/>
+          <p:cNvSpPr>
+            <a:spLocks noGrp="1"/>
+          </p:cNvSpPr>
+          <p:nvPr>
+            <p:ph type="sldNum" sz="quarter" idx="5"/>
+          </p:nvPr>
+        </p:nvSpPr>
+        <p:spPr/>
+        <p:txBody>
+          <a:bodyPr/>
+          <a:lstStyle/>
+          <a:p>
+            <a:fld id="{947F9D2B-EF00-4575-9013-113DEEFD58FD}" type="slidenum">
+              <a:rPr lang="en-BE" smtClean="0"/>
+              <a:t>66</a:t>
+            </a:fld>
+            <a:endParaRPr lang="en-BE"/>
+          </a:p>
+        </p:txBody>
+      </p:sp>
+    </p:spTree>
+    <p:extLst>
+      <p:ext uri="{BB962C8B-B14F-4D97-AF65-F5344CB8AC3E}">
+        <p14:creationId xmlns:p14="http://schemas.microsoft.com/office/powerpoint/2010/main" val="3562991037"/>
+      </p:ext>
+    </p:extLst>
+  </p:cSld>
+  <p:clrMapOvr>
+    <a:masterClrMapping/>
+  </p:clrMapOvr>
+</p:notes>
+</file>
+
+<file path=ppt/notesSlides/notesSlide67.xml><?xml version="1.0" encoding="utf-8"?>
+<p:notes xmlns:a="http://schemas.openxmlformats.org/drawingml/2006/main" xmlns:r="http://schemas.openxmlformats.org/officeDocument/2006/relationships" xmlns:p="http://schemas.openxmlformats.org/presentationml/2006/main">
+  <p:cSld>
+    <p:spTree>
+      <p:nvGrpSpPr>
+        <p:cNvPr id="1" name=""/>
+        <p:cNvGrpSpPr/>
+        <p:nvPr/>
+      </p:nvGrpSpPr>
+      <p:grpSpPr>
+        <a:xfrm>
+          <a:off x="0" y="0"/>
+          <a:ext cx="0" cy="0"/>
+          <a:chOff x="0" y="0"/>
+          <a:chExt cx="0" cy="0"/>
+        </a:xfrm>
+      </p:grpSpPr>
+      <p:sp>
+        <p:nvSpPr>
+          <p:cNvPr id="2" name="Slide Image Placeholder 1"/>
+          <p:cNvSpPr>
+            <a:spLocks noGrp="1" noRot="1" noChangeAspect="1"/>
+          </p:cNvSpPr>
+          <p:nvPr>
+            <p:ph type="sldImg"/>
+          </p:nvPr>
+        </p:nvSpPr>
+        <p:spPr/>
+      </p:sp>
+      <p:sp>
+        <p:nvSpPr>
+          <p:cNvPr id="3" name="Notes Placeholder 2"/>
+          <p:cNvSpPr>
+            <a:spLocks noGrp="1"/>
+          </p:cNvSpPr>
+          <p:nvPr>
+            <p:ph type="body" idx="1"/>
+          </p:nvPr>
+        </p:nvSpPr>
+        <p:spPr/>
+        <p:txBody>
+          <a:bodyPr/>
+          <a:lstStyle/>
+          <a:p>
+            <a:r>
+              <a:rPr lang="en-US" dirty="0"/>
+              <a:t>So the idea is to construct two vectors: one vector from C to B (B-C), and one vector from C to A (A-C)</a:t>
+            </a:r>
+          </a:p>
+          <a:p>
+            <a:r>
+              <a:rPr lang="en-US" dirty="0"/>
+              <a:t>These gives you the inputs of the cross product: </a:t>
+            </a:r>
+          </a:p>
+          <a:p>
+            <a:endParaRPr lang="en-US" dirty="0"/>
+          </a:p>
+          <a:p>
+            <a:r>
+              <a:rPr lang="en-US" dirty="0"/>
+              <a:t>Especially in this </a:t>
+            </a:r>
+            <a:r>
+              <a:rPr lang="en-US" dirty="0" err="1"/>
+              <a:t>usecase</a:t>
+            </a:r>
+            <a:r>
+              <a:rPr lang="en-US" dirty="0"/>
+              <a:t> you have to normalize the result of your </a:t>
+            </a:r>
+            <a:r>
+              <a:rPr lang="en-US" dirty="0" err="1"/>
+              <a:t>crossproduct</a:t>
+            </a:r>
+            <a:r>
+              <a:rPr lang="en-US" dirty="0"/>
+              <a:t>, as normal are </a:t>
+            </a:r>
+            <a:endParaRPr lang="en-BE" dirty="0"/>
+          </a:p>
+        </p:txBody>
+      </p:sp>
+      <p:sp>
+        <p:nvSpPr>
+          <p:cNvPr id="4" name="Slide Number Placeholder 3"/>
+          <p:cNvSpPr>
+            <a:spLocks noGrp="1"/>
+          </p:cNvSpPr>
+          <p:nvPr>
+            <p:ph type="sldNum" sz="quarter" idx="5"/>
+          </p:nvPr>
+        </p:nvSpPr>
+        <p:spPr/>
+        <p:txBody>
+          <a:bodyPr/>
+          <a:lstStyle/>
+          <a:p>
+            <a:fld id="{947F9D2B-EF00-4575-9013-113DEEFD58FD}" type="slidenum">
+              <a:rPr lang="en-BE" smtClean="0"/>
+              <a:t>67</a:t>
+            </a:fld>
+            <a:endParaRPr lang="en-BE"/>
+          </a:p>
+        </p:txBody>
+      </p:sp>
+    </p:spTree>
+    <p:extLst>
+      <p:ext uri="{BB962C8B-B14F-4D97-AF65-F5344CB8AC3E}">
+        <p14:creationId xmlns:p14="http://schemas.microsoft.com/office/powerpoint/2010/main" val="2063015178"/>
+      </p:ext>
+    </p:extLst>
+  </p:cSld>
+  <p:clrMapOvr>
+    <a:masterClrMapping/>
+  </p:clrMapOvr>
+</p:notes>
+</file>
+
+<file path=ppt/notesSlides/notesSlide68.xml><?xml version="1.0" encoding="utf-8"?>
+<p:notes xmlns:a="http://schemas.openxmlformats.org/drawingml/2006/main" xmlns:r="http://schemas.openxmlformats.org/officeDocument/2006/relationships" xmlns:p="http://schemas.openxmlformats.org/presentationml/2006/main">
+  <p:cSld>
+    <p:spTree>
+      <p:nvGrpSpPr>
+        <p:cNvPr id="1" name=""/>
+        <p:cNvGrpSpPr/>
+        <p:nvPr/>
+      </p:nvGrpSpPr>
+      <p:grpSpPr>
+        <a:xfrm>
+          <a:off x="0" y="0"/>
+          <a:ext cx="0" cy="0"/>
+          <a:chOff x="0" y="0"/>
+          <a:chExt cx="0" cy="0"/>
+        </a:xfrm>
+      </p:grpSpPr>
+      <p:sp>
+        <p:nvSpPr>
+          <p:cNvPr id="2" name="Slide Image Placeholder 1"/>
+          <p:cNvSpPr>
+            <a:spLocks noGrp="1" noRot="1" noChangeAspect="1"/>
+          </p:cNvSpPr>
+          <p:nvPr>
+            <p:ph type="sldImg"/>
+          </p:nvPr>
+        </p:nvSpPr>
+        <p:spPr/>
+      </p:sp>
+      <p:sp>
+        <p:nvSpPr>
+          <p:cNvPr id="3" name="Notes Placeholder 2"/>
+          <p:cNvSpPr>
+            <a:spLocks noGrp="1"/>
+          </p:cNvSpPr>
+          <p:nvPr>
+            <p:ph type="body" idx="1"/>
+          </p:nvPr>
+        </p:nvSpPr>
+        <p:spPr/>
+        <p:txBody>
+          <a:bodyPr/>
+          <a:lstStyle/>
+          <a:p>
+            <a:endParaRPr lang="en-BE"/>
+          </a:p>
+        </p:txBody>
+      </p:sp>
+      <p:sp>
+        <p:nvSpPr>
+          <p:cNvPr id="4" name="Slide Number Placeholder 3"/>
+          <p:cNvSpPr>
+            <a:spLocks noGrp="1"/>
+          </p:cNvSpPr>
+          <p:nvPr>
+            <p:ph type="sldNum" sz="quarter" idx="5"/>
+          </p:nvPr>
+        </p:nvSpPr>
+        <p:spPr/>
+        <p:txBody>
+          <a:bodyPr/>
+          <a:lstStyle/>
+          <a:p>
+            <a:fld id="{947F9D2B-EF00-4575-9013-113DEEFD58FD}" type="slidenum">
+              <a:rPr lang="en-BE" smtClean="0"/>
+              <a:t>68</a:t>
+            </a:fld>
+            <a:endParaRPr lang="en-BE"/>
+          </a:p>
+        </p:txBody>
+      </p:sp>
+    </p:spTree>
+    <p:extLst>
+      <p:ext uri="{BB962C8B-B14F-4D97-AF65-F5344CB8AC3E}">
+        <p14:creationId xmlns:p14="http://schemas.microsoft.com/office/powerpoint/2010/main" val="2524971583"/>
+      </p:ext>
+    </p:extLst>
+  </p:cSld>
+  <p:clrMapOvr>
+    <a:masterClrMapping/>
+  </p:clrMapOvr>
+</p:notes>
+</file>
+
+<file path=ppt/notesSlides/notesSlide69.xml><?xml version="1.0" encoding="utf-8"?>
+<p:notes xmlns:a="http://schemas.openxmlformats.org/drawingml/2006/main" xmlns:r="http://schemas.openxmlformats.org/officeDocument/2006/relationships" xmlns:p="http://schemas.openxmlformats.org/presentationml/2006/main">
+  <p:cSld>
+    <p:spTree>
+      <p:nvGrpSpPr>
+        <p:cNvPr id="1" name=""/>
+        <p:cNvGrpSpPr/>
+        <p:nvPr/>
+      </p:nvGrpSpPr>
+      <p:grpSpPr>
+        <a:xfrm>
+          <a:off x="0" y="0"/>
+          <a:ext cx="0" cy="0"/>
+          <a:chOff x="0" y="0"/>
+          <a:chExt cx="0" cy="0"/>
+        </a:xfrm>
+      </p:grpSpPr>
+      <p:sp>
+        <p:nvSpPr>
+          <p:cNvPr id="2" name="Slide Image Placeholder 1"/>
+          <p:cNvSpPr>
+            <a:spLocks noGrp="1" noRot="1" noChangeAspect="1"/>
+          </p:cNvSpPr>
+          <p:nvPr>
+            <p:ph type="sldImg"/>
+          </p:nvPr>
+        </p:nvSpPr>
+        <p:spPr/>
+      </p:sp>
+      <p:sp>
+        <p:nvSpPr>
+          <p:cNvPr id="3" name="Notes Placeholder 2"/>
+          <p:cNvSpPr>
+            <a:spLocks noGrp="1"/>
+          </p:cNvSpPr>
+          <p:nvPr>
+            <p:ph type="body" idx="1"/>
+          </p:nvPr>
+        </p:nvSpPr>
+        <p:spPr/>
+        <p:txBody>
+          <a:bodyPr/>
+          <a:lstStyle/>
+          <a:p>
+            <a:endParaRPr lang="en-BE"/>
+          </a:p>
+        </p:txBody>
+      </p:sp>
+      <p:sp>
+        <p:nvSpPr>
+          <p:cNvPr id="4" name="Slide Number Placeholder 3"/>
+          <p:cNvSpPr>
+            <a:spLocks noGrp="1"/>
+          </p:cNvSpPr>
+          <p:nvPr>
+            <p:ph type="sldNum" sz="quarter" idx="5"/>
+          </p:nvPr>
+        </p:nvSpPr>
+        <p:spPr/>
+        <p:txBody>
+          <a:bodyPr/>
+          <a:lstStyle/>
+          <a:p>
+            <a:fld id="{947F9D2B-EF00-4575-9013-113DEEFD58FD}" type="slidenum">
+              <a:rPr lang="en-BE" smtClean="0"/>
+              <a:t>69</a:t>
+            </a:fld>
+            <a:endParaRPr lang="en-BE"/>
+          </a:p>
+        </p:txBody>
+      </p:sp>
+    </p:spTree>
+    <p:extLst>
+      <p:ext uri="{BB962C8B-B14F-4D97-AF65-F5344CB8AC3E}">
+        <p14:creationId xmlns:p14="http://schemas.microsoft.com/office/powerpoint/2010/main" val="2358225304"/>
+      </p:ext>
+    </p:extLst>
+  </p:cSld>
+  <p:clrMapOvr>
+    <a:masterClrMapping/>
+  </p:clrMapOvr>
+</p:notes>
+</file>
+
+<file path=ppt/notesSlides/notesSlide7.xml><?xml version="1.0" encoding="utf-8"?>
+<p:notes xmlns:a="http://schemas.openxmlformats.org/drawingml/2006/main" xmlns:r="http://schemas.openxmlformats.org/officeDocument/2006/relationships" xmlns:p="http://schemas.openxmlformats.org/presentationml/2006/main">
+  <p:cSld>
+    <p:spTree>
+      <p:nvGrpSpPr>
+        <p:cNvPr id="1" name=""/>
+        <p:cNvGrpSpPr/>
+        <p:nvPr/>
+      </p:nvGrpSpPr>
+      <p:grpSpPr>
+        <a:xfrm>
+          <a:off x="0" y="0"/>
+          <a:ext cx="0" cy="0"/>
+          <a:chOff x="0" y="0"/>
+          <a:chExt cx="0" cy="0"/>
+        </a:xfrm>
+      </p:grpSpPr>
+      <p:sp>
+        <p:nvSpPr>
+          <p:cNvPr id="2" name="Slide Image Placeholder 1"/>
+          <p:cNvSpPr>
+            <a:spLocks noGrp="1" noRot="1" noChangeAspect="1"/>
+          </p:cNvSpPr>
+          <p:nvPr>
+            <p:ph type="sldImg"/>
+          </p:nvPr>
+        </p:nvSpPr>
+        <p:spPr/>
+      </p:sp>
+      <p:sp>
+        <p:nvSpPr>
+          <p:cNvPr id="3" name="Notes Placeholder 2"/>
+          <p:cNvSpPr>
+            <a:spLocks noGrp="1"/>
+          </p:cNvSpPr>
+          <p:nvPr>
+            <p:ph type="body" idx="1"/>
+          </p:nvPr>
+        </p:nvSpPr>
+        <p:spPr/>
+        <p:txBody>
+          <a:bodyPr/>
+          <a:lstStyle/>
+          <a:p>
+            <a:endParaRPr lang="en-BE"/>
+          </a:p>
+        </p:txBody>
+      </p:sp>
+      <p:sp>
+        <p:nvSpPr>
+          <p:cNvPr id="4" name="Slide Number Placeholder 3"/>
+          <p:cNvSpPr>
+            <a:spLocks noGrp="1"/>
+          </p:cNvSpPr>
+          <p:nvPr>
+            <p:ph type="sldNum" sz="quarter" idx="5"/>
+          </p:nvPr>
+        </p:nvSpPr>
+        <p:spPr/>
+        <p:txBody>
+          <a:bodyPr/>
+          <a:lstStyle/>
+          <a:p>
+            <a:fld id="{947F9D2B-EF00-4575-9013-113DEEFD58FD}" type="slidenum">
+              <a:rPr lang="en-BE" smtClean="0"/>
+              <a:t>7</a:t>
+            </a:fld>
+            <a:endParaRPr lang="en-BE"/>
+          </a:p>
+        </p:txBody>
+      </p:sp>
+    </p:spTree>
+    <p:extLst>
+      <p:ext uri="{BB962C8B-B14F-4D97-AF65-F5344CB8AC3E}">
+        <p14:creationId xmlns:p14="http://schemas.microsoft.com/office/powerpoint/2010/main" val="472254810"/>
+      </p:ext>
+    </p:extLst>
+  </p:cSld>
+  <p:clrMapOvr>
+    <a:masterClrMapping/>
+  </p:clrMapOvr>
+</p:notes>
+</file>
+
+<file path=ppt/notesSlides/notesSlide70.xml><?xml version="1.0" encoding="utf-8"?>
+<p:notes xmlns:a="http://schemas.openxmlformats.org/drawingml/2006/main" xmlns:r="http://schemas.openxmlformats.org/officeDocument/2006/relationships" xmlns:p="http://schemas.openxmlformats.org/presentationml/2006/main">
+  <p:cSld>
+    <p:spTree>
+      <p:nvGrpSpPr>
+        <p:cNvPr id="1" name=""/>
+        <p:cNvGrpSpPr/>
+        <p:nvPr/>
+      </p:nvGrpSpPr>
+      <p:grpSpPr>
+        <a:xfrm>
+          <a:off x="0" y="0"/>
+          <a:ext cx="0" cy="0"/>
+          <a:chOff x="0" y="0"/>
+          <a:chExt cx="0" cy="0"/>
+        </a:xfrm>
+      </p:grpSpPr>
+      <p:sp>
+        <p:nvSpPr>
+          <p:cNvPr id="2" name="Slide Image Placeholder 1"/>
+          <p:cNvSpPr>
+            <a:spLocks noGrp="1" noRot="1" noChangeAspect="1"/>
+          </p:cNvSpPr>
+          <p:nvPr>
+            <p:ph type="sldImg"/>
+          </p:nvPr>
+        </p:nvSpPr>
+        <p:spPr/>
+      </p:sp>
+      <p:sp>
+        <p:nvSpPr>
+          <p:cNvPr id="3" name="Notes Placeholder 2"/>
+          <p:cNvSpPr>
+            <a:spLocks noGrp="1"/>
+          </p:cNvSpPr>
+          <p:nvPr>
+            <p:ph type="body" idx="1"/>
+          </p:nvPr>
+        </p:nvSpPr>
+        <p:spPr/>
+        <p:txBody>
+          <a:bodyPr/>
+          <a:lstStyle/>
+          <a:p>
+            <a:endParaRPr lang="en-BE"/>
+          </a:p>
+        </p:txBody>
+      </p:sp>
+      <p:sp>
+        <p:nvSpPr>
+          <p:cNvPr id="4" name="Slide Number Placeholder 3"/>
+          <p:cNvSpPr>
+            <a:spLocks noGrp="1"/>
+          </p:cNvSpPr>
+          <p:nvPr>
+            <p:ph type="sldNum" sz="quarter" idx="5"/>
+          </p:nvPr>
+        </p:nvSpPr>
+        <p:spPr/>
+        <p:txBody>
+          <a:bodyPr/>
+          <a:lstStyle/>
+          <a:p>
+            <a:fld id="{947F9D2B-EF00-4575-9013-113DEEFD58FD}" type="slidenum">
+              <a:rPr lang="en-BE" smtClean="0"/>
+              <a:t>70</a:t>
+            </a:fld>
+            <a:endParaRPr lang="en-BE"/>
+          </a:p>
+        </p:txBody>
+      </p:sp>
+    </p:spTree>
+    <p:extLst>
+      <p:ext uri="{BB962C8B-B14F-4D97-AF65-F5344CB8AC3E}">
+        <p14:creationId xmlns:p14="http://schemas.microsoft.com/office/powerpoint/2010/main" val="185121111"/>
+      </p:ext>
+    </p:extLst>
+  </p:cSld>
+  <p:clrMapOvr>
+    <a:masterClrMapping/>
+  </p:clrMapOvr>
+</p:notes>
+</file>
+
+<file path=ppt/notesSlides/notesSlide71.xml><?xml version="1.0" encoding="utf-8"?>
+<p:notes xmlns:a="http://schemas.openxmlformats.org/drawingml/2006/main" xmlns:r="http://schemas.openxmlformats.org/officeDocument/2006/relationships" xmlns:p="http://schemas.openxmlformats.org/presentationml/2006/main">
+  <p:cSld>
+    <p:spTree>
+      <p:nvGrpSpPr>
+        <p:cNvPr id="1" name=""/>
+        <p:cNvGrpSpPr/>
+        <p:nvPr/>
+      </p:nvGrpSpPr>
+      <p:grpSpPr>
+        <a:xfrm>
+          <a:off x="0" y="0"/>
+          <a:ext cx="0" cy="0"/>
+          <a:chOff x="0" y="0"/>
+          <a:chExt cx="0" cy="0"/>
+        </a:xfrm>
+      </p:grpSpPr>
+      <p:sp>
+        <p:nvSpPr>
+          <p:cNvPr id="2" name="Slide Image Placeholder 1"/>
+          <p:cNvSpPr>
+            <a:spLocks noGrp="1" noRot="1" noChangeAspect="1"/>
+          </p:cNvSpPr>
+          <p:nvPr>
+            <p:ph type="sldImg"/>
+          </p:nvPr>
+        </p:nvSpPr>
+        <p:spPr/>
+      </p:sp>
+      <p:sp>
+        <p:nvSpPr>
+          <p:cNvPr id="3" name="Notes Placeholder 2"/>
+          <p:cNvSpPr>
+            <a:spLocks noGrp="1"/>
+          </p:cNvSpPr>
+          <p:nvPr>
+            <p:ph type="body" idx="1"/>
+          </p:nvPr>
+        </p:nvSpPr>
+        <p:spPr/>
+        <p:txBody>
+          <a:bodyPr/>
+          <a:lstStyle/>
+          <a:p>
+            <a:endParaRPr lang="en-BE"/>
+          </a:p>
+        </p:txBody>
+      </p:sp>
+      <p:sp>
+        <p:nvSpPr>
+          <p:cNvPr id="4" name="Slide Number Placeholder 3"/>
+          <p:cNvSpPr>
+            <a:spLocks noGrp="1"/>
+          </p:cNvSpPr>
+          <p:nvPr>
+            <p:ph type="sldNum" sz="quarter" idx="5"/>
+          </p:nvPr>
+        </p:nvSpPr>
+        <p:spPr/>
+        <p:txBody>
+          <a:bodyPr/>
+          <a:lstStyle/>
+          <a:p>
+            <a:fld id="{947F9D2B-EF00-4575-9013-113DEEFD58FD}" type="slidenum">
+              <a:rPr lang="en-BE" smtClean="0"/>
+              <a:t>71</a:t>
+            </a:fld>
+            <a:endParaRPr lang="en-BE"/>
+          </a:p>
+        </p:txBody>
+      </p:sp>
+    </p:spTree>
+    <p:extLst>
+      <p:ext uri="{BB962C8B-B14F-4D97-AF65-F5344CB8AC3E}">
+        <p14:creationId xmlns:p14="http://schemas.microsoft.com/office/powerpoint/2010/main" val="436231325"/>
+      </p:ext>
+    </p:extLst>
+  </p:cSld>
+  <p:clrMapOvr>
+    <a:masterClrMapping/>
+  </p:clrMapOvr>
+</p:notes>
+</file>
+
+<file path=ppt/notesSlides/notesSlide72.xml><?xml version="1.0" encoding="utf-8"?>
+<p:notes xmlns:a="http://schemas.openxmlformats.org/drawingml/2006/main" xmlns:r="http://schemas.openxmlformats.org/officeDocument/2006/relationships" xmlns:p="http://schemas.openxmlformats.org/presentationml/2006/main">
+  <p:cSld>
+    <p:spTree>
+      <p:nvGrpSpPr>
+        <p:cNvPr id="1" name=""/>
+        <p:cNvGrpSpPr/>
+        <p:nvPr/>
+      </p:nvGrpSpPr>
+      <p:grpSpPr>
+        <a:xfrm>
+          <a:off x="0" y="0"/>
+          <a:ext cx="0" cy="0"/>
+          <a:chOff x="0" y="0"/>
+          <a:chExt cx="0" cy="0"/>
+        </a:xfrm>
+      </p:grpSpPr>
+      <p:sp>
+        <p:nvSpPr>
+          <p:cNvPr id="2" name="Slide Image Placeholder 1"/>
+          <p:cNvSpPr>
+            <a:spLocks noGrp="1" noRot="1" noChangeAspect="1"/>
+          </p:cNvSpPr>
+          <p:nvPr>
+            <p:ph type="sldImg"/>
+          </p:nvPr>
+        </p:nvSpPr>
+        <p:spPr/>
+      </p:sp>
+      <p:sp>
+        <p:nvSpPr>
+          <p:cNvPr id="3" name="Notes Placeholder 2"/>
+          <p:cNvSpPr>
+            <a:spLocks noGrp="1"/>
+          </p:cNvSpPr>
+          <p:nvPr>
+            <p:ph type="body" idx="1"/>
+          </p:nvPr>
+        </p:nvSpPr>
+        <p:spPr/>
+        <p:txBody>
+          <a:bodyPr/>
+          <a:lstStyle/>
+          <a:p>
+            <a:endParaRPr lang="en-BE"/>
+          </a:p>
+        </p:txBody>
+      </p:sp>
+      <p:sp>
+        <p:nvSpPr>
+          <p:cNvPr id="4" name="Slide Number Placeholder 3"/>
+          <p:cNvSpPr>
+            <a:spLocks noGrp="1"/>
+          </p:cNvSpPr>
+          <p:nvPr>
+            <p:ph type="sldNum" sz="quarter" idx="5"/>
+          </p:nvPr>
+        </p:nvSpPr>
+        <p:spPr/>
+        <p:txBody>
+          <a:bodyPr/>
+          <a:lstStyle/>
+          <a:p>
+            <a:fld id="{947F9D2B-EF00-4575-9013-113DEEFD58FD}" type="slidenum">
+              <a:rPr lang="en-BE" smtClean="0"/>
+              <a:t>72</a:t>
+            </a:fld>
+            <a:endParaRPr lang="en-BE"/>
+          </a:p>
+        </p:txBody>
+      </p:sp>
+    </p:spTree>
+    <p:extLst>
+      <p:ext uri="{BB962C8B-B14F-4D97-AF65-F5344CB8AC3E}">
+        <p14:creationId xmlns:p14="http://schemas.microsoft.com/office/powerpoint/2010/main" val="3382835260"/>
+      </p:ext>
+    </p:extLst>
+  </p:cSld>
+  <p:clrMapOvr>
+    <a:masterClrMapping/>
+  </p:clrMapOvr>
+</p:notes>
+</file>
+
+<file path=ppt/notesSlides/notesSlide73.xml><?xml version="1.0" encoding="utf-8"?>
+<p:notes xmlns:a="http://schemas.openxmlformats.org/drawingml/2006/main" xmlns:r="http://schemas.openxmlformats.org/officeDocument/2006/relationships" xmlns:p="http://schemas.openxmlformats.org/presentationml/2006/main">
+  <p:cSld>
+    <p:spTree>
+      <p:nvGrpSpPr>
+        <p:cNvPr id="1" name=""/>
+        <p:cNvGrpSpPr/>
+        <p:nvPr/>
+      </p:nvGrpSpPr>
+      <p:grpSpPr>
+        <a:xfrm>
+          <a:off x="0" y="0"/>
+          <a:ext cx="0" cy="0"/>
+          <a:chOff x="0" y="0"/>
+          <a:chExt cx="0" cy="0"/>
+        </a:xfrm>
+      </p:grpSpPr>
+      <p:sp>
+        <p:nvSpPr>
+          <p:cNvPr id="2" name="Slide Image Placeholder 1"/>
+          <p:cNvSpPr>
+            <a:spLocks noGrp="1" noRot="1" noChangeAspect="1"/>
+          </p:cNvSpPr>
+          <p:nvPr>
+            <p:ph type="sldImg"/>
+          </p:nvPr>
+        </p:nvSpPr>
+        <p:spPr/>
+      </p:sp>
+      <p:sp>
+        <p:nvSpPr>
+          <p:cNvPr id="3" name="Notes Placeholder 2"/>
+          <p:cNvSpPr>
+            <a:spLocks noGrp="1"/>
+          </p:cNvSpPr>
+          <p:nvPr>
+            <p:ph type="body" idx="1"/>
+          </p:nvPr>
+        </p:nvSpPr>
+        <p:spPr/>
+        <p:txBody>
+          <a:bodyPr/>
+          <a:lstStyle/>
+          <a:p>
+            <a:endParaRPr lang="en-BE"/>
+          </a:p>
+        </p:txBody>
+      </p:sp>
+      <p:sp>
+        <p:nvSpPr>
+          <p:cNvPr id="4" name="Slide Number Placeholder 3"/>
+          <p:cNvSpPr>
+            <a:spLocks noGrp="1"/>
+          </p:cNvSpPr>
+          <p:nvPr>
+            <p:ph type="sldNum" sz="quarter" idx="5"/>
+          </p:nvPr>
+        </p:nvSpPr>
+        <p:spPr/>
+        <p:txBody>
+          <a:bodyPr/>
+          <a:lstStyle/>
+          <a:p>
+            <a:fld id="{947F9D2B-EF00-4575-9013-113DEEFD58FD}" type="slidenum">
+              <a:rPr lang="en-BE" smtClean="0"/>
+              <a:t>73</a:t>
+            </a:fld>
+            <a:endParaRPr lang="en-BE"/>
+          </a:p>
+        </p:txBody>
+      </p:sp>
+    </p:spTree>
+    <p:extLst>
+      <p:ext uri="{BB962C8B-B14F-4D97-AF65-F5344CB8AC3E}">
+        <p14:creationId xmlns:p14="http://schemas.microsoft.com/office/powerpoint/2010/main" val="146956481"/>
+      </p:ext>
+    </p:extLst>
+  </p:cSld>
+  <p:clrMapOvr>
+    <a:masterClrMapping/>
+  </p:clrMapOvr>
+</p:notes>
+</file>
+
+<file path=ppt/notesSlides/notesSlide74.xml><?xml version="1.0" encoding="utf-8"?>
+<p:notes xmlns:a="http://schemas.openxmlformats.org/drawingml/2006/main" xmlns:r="http://schemas.openxmlformats.org/officeDocument/2006/relationships" xmlns:p="http://schemas.openxmlformats.org/presentationml/2006/main">
+  <p:cSld>
+    <p:spTree>
+      <p:nvGrpSpPr>
+        <p:cNvPr id="1" name=""/>
+        <p:cNvGrpSpPr/>
+        <p:nvPr/>
+      </p:nvGrpSpPr>
+      <p:grpSpPr>
+        <a:xfrm>
+          <a:off x="0" y="0"/>
+          <a:ext cx="0" cy="0"/>
+          <a:chOff x="0" y="0"/>
+          <a:chExt cx="0" cy="0"/>
+        </a:xfrm>
+      </p:grpSpPr>
+      <p:sp>
+        <p:nvSpPr>
+          <p:cNvPr id="2" name="Slide Image Placeholder 1"/>
+          <p:cNvSpPr>
+            <a:spLocks noGrp="1" noRot="1" noChangeAspect="1"/>
+          </p:cNvSpPr>
+          <p:nvPr>
+            <p:ph type="sldImg"/>
+          </p:nvPr>
+        </p:nvSpPr>
+        <p:spPr/>
+      </p:sp>
+      <p:sp>
+        <p:nvSpPr>
+          <p:cNvPr id="3" name="Notes Placeholder 2"/>
+          <p:cNvSpPr>
+            <a:spLocks noGrp="1"/>
+          </p:cNvSpPr>
+          <p:nvPr>
+            <p:ph type="body" idx="1"/>
+          </p:nvPr>
+        </p:nvSpPr>
+        <p:spPr/>
+        <p:txBody>
+          <a:bodyPr/>
+          <a:lstStyle/>
+          <a:p>
+            <a:endParaRPr lang="en-BE"/>
+          </a:p>
+        </p:txBody>
+      </p:sp>
+      <p:sp>
+        <p:nvSpPr>
+          <p:cNvPr id="4" name="Slide Number Placeholder 3"/>
+          <p:cNvSpPr>
+            <a:spLocks noGrp="1"/>
+          </p:cNvSpPr>
+          <p:nvPr>
+            <p:ph type="sldNum" sz="quarter" idx="5"/>
+          </p:nvPr>
+        </p:nvSpPr>
+        <p:spPr/>
+        <p:txBody>
+          <a:bodyPr/>
+          <a:lstStyle/>
+          <a:p>
+            <a:fld id="{947F9D2B-EF00-4575-9013-113DEEFD58FD}" type="slidenum">
+              <a:rPr lang="en-BE" smtClean="0"/>
+              <a:t>74</a:t>
+            </a:fld>
+            <a:endParaRPr lang="en-BE"/>
+          </a:p>
+        </p:txBody>
+      </p:sp>
+    </p:spTree>
+    <p:extLst>
+      <p:ext uri="{BB962C8B-B14F-4D97-AF65-F5344CB8AC3E}">
+        <p14:creationId xmlns:p14="http://schemas.microsoft.com/office/powerpoint/2010/main" val="561883275"/>
+      </p:ext>
+    </p:extLst>
+  </p:cSld>
+  <p:clrMapOvr>
+    <a:masterClrMapping/>
+  </p:clrMapOvr>
+</p:notes>
+</file>
+
+<file path=ppt/notesSlides/notesSlide8.xml><?xml version="1.0" encoding="utf-8"?>
+<p:notes xmlns:a="http://schemas.openxmlformats.org/drawingml/2006/main" xmlns:r="http://schemas.openxmlformats.org/officeDocument/2006/relationships" xmlns:p="http://schemas.openxmlformats.org/presentationml/2006/main">
+  <p:cSld>
+    <p:spTree>
+      <p:nvGrpSpPr>
+        <p:cNvPr id="1" name=""/>
+        <p:cNvGrpSpPr/>
+        <p:nvPr/>
+      </p:nvGrpSpPr>
+      <p:grpSpPr>
+        <a:xfrm>
+          <a:off x="0" y="0"/>
+          <a:ext cx="0" cy="0"/>
+          <a:chOff x="0" y="0"/>
+          <a:chExt cx="0" cy="0"/>
+        </a:xfrm>
+      </p:grpSpPr>
+      <p:sp>
+        <p:nvSpPr>
+          <p:cNvPr id="2" name="Slide Image Placeholder 1"/>
+          <p:cNvSpPr>
+            <a:spLocks noGrp="1" noRot="1" noChangeAspect="1"/>
+          </p:cNvSpPr>
+          <p:nvPr>
+            <p:ph type="sldImg"/>
+          </p:nvPr>
+        </p:nvSpPr>
+        <p:spPr/>
+      </p:sp>
+      <p:sp>
+        <p:nvSpPr>
+          <p:cNvPr id="3" name="Notes Placeholder 2"/>
+          <p:cNvSpPr>
+            <a:spLocks noGrp="1"/>
+          </p:cNvSpPr>
+          <p:nvPr>
+            <p:ph type="body" idx="1"/>
+          </p:nvPr>
+        </p:nvSpPr>
+        <p:spPr/>
+        <p:txBody>
+          <a:bodyPr/>
+          <a:lstStyle/>
+          <a:p>
+            <a:r>
+              <a:rPr lang="en-US" dirty="0"/>
+              <a:t>So we can ‘cobble together’ entities in your </a:t>
+            </a:r>
+            <a:r>
+              <a:rPr lang="en-US" dirty="0" err="1"/>
+              <a:t>gameworld</a:t>
+            </a:r>
+            <a:endParaRPr lang="en-US" dirty="0"/>
+          </a:p>
+          <a:p>
+            <a:endParaRPr lang="en-US" dirty="0"/>
+          </a:p>
+          <a:p>
+            <a:r>
+              <a:rPr lang="en-US" dirty="0"/>
+              <a:t>These entities often don’t fit well in strict hierarchies you would get in an inheritance pyramid. History has shows that having components is a good way to balance flexibility with reuse</a:t>
+            </a:r>
+            <a:endParaRPr lang="en-BE" dirty="0"/>
+          </a:p>
+        </p:txBody>
+      </p:sp>
+      <p:sp>
+        <p:nvSpPr>
+          <p:cNvPr id="4" name="Slide Number Placeholder 3"/>
+          <p:cNvSpPr>
+            <a:spLocks noGrp="1"/>
+          </p:cNvSpPr>
+          <p:nvPr>
+            <p:ph type="sldNum" sz="quarter" idx="5"/>
+          </p:nvPr>
+        </p:nvSpPr>
+        <p:spPr/>
+        <p:txBody>
+          <a:bodyPr/>
+          <a:lstStyle/>
+          <a:p>
+            <a:fld id="{947F9D2B-EF00-4575-9013-113DEEFD58FD}" type="slidenum">
+              <a:rPr lang="en-BE" smtClean="0"/>
+              <a:t>8</a:t>
+            </a:fld>
+            <a:endParaRPr lang="en-BE"/>
+          </a:p>
+        </p:txBody>
+      </p:sp>
+    </p:spTree>
+    <p:extLst>
+      <p:ext uri="{BB962C8B-B14F-4D97-AF65-F5344CB8AC3E}">
+        <p14:creationId xmlns:p14="http://schemas.microsoft.com/office/powerpoint/2010/main" val="3738526668"/>
+      </p:ext>
+    </p:extLst>
+  </p:cSld>
+  <p:clrMapOvr>
+    <a:masterClrMapping/>
+  </p:clrMapOvr>
+</p:notes>
+</file>
+
+<file path=ppt/notesSlides/notesSlide9.xml><?xml version="1.0" encoding="utf-8"?>
+<p:notes xmlns:a="http://schemas.openxmlformats.org/drawingml/2006/main" xmlns:r="http://schemas.openxmlformats.org/officeDocument/2006/relationships" xmlns:p="http://schemas.openxmlformats.org/presentationml/2006/main">
+  <p:cSld>
+    <p:spTree>
+      <p:nvGrpSpPr>
+        <p:cNvPr id="1" name=""/>
+        <p:cNvGrpSpPr/>
+        <p:nvPr/>
+      </p:nvGrpSpPr>
+      <p:grpSpPr>
+        <a:xfrm>
+          <a:off x="0" y="0"/>
+          <a:ext cx="0" cy="0"/>
+          <a:chOff x="0" y="0"/>
+          <a:chExt cx="0" cy="0"/>
+        </a:xfrm>
+      </p:grpSpPr>
+      <p:sp>
+        <p:nvSpPr>
+          <p:cNvPr id="2" name="Slide Image Placeholder 1"/>
+          <p:cNvSpPr>
+            <a:spLocks noGrp="1" noRot="1" noChangeAspect="1"/>
+          </p:cNvSpPr>
+          <p:nvPr>
+            <p:ph type="sldImg"/>
+          </p:nvPr>
+        </p:nvSpPr>
+        <p:spPr/>
+      </p:sp>
+      <p:sp>
+        <p:nvSpPr>
+          <p:cNvPr id="3" name="Notes Placeholder 2"/>
+          <p:cNvSpPr>
+            <a:spLocks noGrp="1"/>
+          </p:cNvSpPr>
+          <p:nvPr>
+            <p:ph type="body" idx="1"/>
+          </p:nvPr>
+        </p:nvSpPr>
+        <p:spPr/>
+        <p:txBody>
+          <a:bodyPr/>
+          <a:lstStyle/>
+          <a:p>
+            <a:r>
+              <a:rPr lang="en-US" dirty="0"/>
+              <a:t>As you saw in </a:t>
+            </a:r>
+            <a:r>
+              <a:rPr lang="en-US" dirty="0" err="1"/>
+              <a:t>pygame</a:t>
+            </a:r>
+            <a:r>
+              <a:rPr lang="en-US" dirty="0"/>
+              <a:t>, games always have the same basic execution:</a:t>
+            </a:r>
+          </a:p>
+          <a:p>
+            <a:endParaRPr lang="en-US" dirty="0"/>
+          </a:p>
+          <a:p>
+            <a:r>
+              <a:rPr lang="en-US" dirty="0"/>
+              <a:t>Initialize everything one</a:t>
+            </a:r>
+            <a:br>
+              <a:rPr lang="en-US" dirty="0"/>
+            </a:br>
+            <a:r>
+              <a:rPr lang="en-US" dirty="0"/>
+              <a:t>while forever:</a:t>
+            </a:r>
+            <a:br>
+              <a:rPr lang="en-US" dirty="0"/>
+            </a:br>
+            <a:r>
+              <a:rPr lang="en-US" dirty="0"/>
+              <a:t>	update everything (</a:t>
+            </a:r>
+            <a:r>
+              <a:rPr lang="en-US" dirty="0" err="1"/>
+              <a:t>eg</a:t>
+            </a:r>
+            <a:r>
+              <a:rPr lang="en-US" dirty="0"/>
+              <a:t> input, positions)</a:t>
+            </a:r>
+          </a:p>
+          <a:p>
+            <a:r>
+              <a:rPr lang="en-US" dirty="0"/>
+              <a:t>	render</a:t>
+            </a:r>
+            <a:endParaRPr lang="en-BE" dirty="0"/>
+          </a:p>
+        </p:txBody>
+      </p:sp>
+      <p:sp>
+        <p:nvSpPr>
+          <p:cNvPr id="4" name="Slide Number Placeholder 3"/>
+          <p:cNvSpPr>
+            <a:spLocks noGrp="1"/>
+          </p:cNvSpPr>
+          <p:nvPr>
+            <p:ph type="sldNum" sz="quarter" idx="5"/>
+          </p:nvPr>
+        </p:nvSpPr>
+        <p:spPr/>
+        <p:txBody>
+          <a:bodyPr/>
+          <a:lstStyle/>
+          <a:p>
+            <a:fld id="{947F9D2B-EF00-4575-9013-113DEEFD58FD}" type="slidenum">
+              <a:rPr lang="en-BE" smtClean="0"/>
+              <a:t>9</a:t>
+            </a:fld>
+            <a:endParaRPr lang="en-BE"/>
+          </a:p>
+        </p:txBody>
+      </p:sp>
+    </p:spTree>
+    <p:extLst>
+      <p:ext uri="{BB962C8B-B14F-4D97-AF65-F5344CB8AC3E}">
+        <p14:creationId xmlns:p14="http://schemas.microsoft.com/office/powerpoint/2010/main" val="2009299162"/>
+      </p:ext>
+    </p:extLst>
+  </p:cSld>
+  <p:clrMapOvr>
+    <a:masterClrMapping/>
+  </p:clrMapOvr>
+</p:notes>
 </file>
 
 <file path=ppt/slideLayouts/slideLayout1.xml><?xml version="1.0" encoding="utf-8"?>
@@ -2375,7 +8951,7 @@
           <a:p>
             <a:fld id="{B21044C9-3718-44C4-9063-5DAD08408240}" type="datetimeFigureOut">
               <a:rPr lang="en-BE" smtClean="0"/>
-              <a:t>19/02/2025</a:t>
+              <a:t>28/03/2025</a:t>
             </a:fld>
             <a:endParaRPr lang="en-BE"/>
           </a:p>
@@ -2575,7 +9151,7 @@
           <a:p>
             <a:fld id="{B21044C9-3718-44C4-9063-5DAD08408240}" type="datetimeFigureOut">
               <a:rPr lang="en-BE" smtClean="0"/>
-              <a:t>19/02/2025</a:t>
+              <a:t>28/03/2025</a:t>
             </a:fld>
             <a:endParaRPr lang="en-BE"/>
           </a:p>
@@ -2785,7 +9361,7 @@
           <a:p>
             <a:fld id="{B21044C9-3718-44C4-9063-5DAD08408240}" type="datetimeFigureOut">
               <a:rPr lang="en-BE" smtClean="0"/>
-              <a:t>19/02/2025</a:t>
+              <a:t>28/03/2025</a:t>
             </a:fld>
             <a:endParaRPr lang="en-BE"/>
           </a:p>
@@ -2927,7 +9503,7 @@
           <a:p>
             <a:fld id="{B21044C9-3718-44C4-9063-5DAD08408240}" type="datetimeFigureOut">
               <a:rPr lang="en-BE" smtClean="0"/>
-              <a:t>19/02/2025</a:t>
+              <a:t>28/03/2025</a:t>
             </a:fld>
             <a:endParaRPr lang="en-BE"/>
           </a:p>
@@ -3127,7 +9703,7 @@
           <a:p>
             <a:fld id="{B21044C9-3718-44C4-9063-5DAD08408240}" type="datetimeFigureOut">
               <a:rPr lang="en-BE" smtClean="0"/>
-              <a:t>19/02/2025</a:t>
+              <a:t>28/03/2025</a:t>
             </a:fld>
             <a:endParaRPr lang="en-BE"/>
           </a:p>
@@ -3403,7 +9979,7 @@
           <a:p>
             <a:fld id="{B21044C9-3718-44C4-9063-5DAD08408240}" type="datetimeFigureOut">
               <a:rPr lang="en-BE" smtClean="0"/>
-              <a:t>19/02/2025</a:t>
+              <a:t>28/03/2025</a:t>
             </a:fld>
             <a:endParaRPr lang="en-BE"/>
           </a:p>
@@ -3671,7 +10247,7 @@
           <a:p>
             <a:fld id="{B21044C9-3718-44C4-9063-5DAD08408240}" type="datetimeFigureOut">
               <a:rPr lang="en-BE" smtClean="0"/>
-              <a:t>19/02/2025</a:t>
+              <a:t>28/03/2025</a:t>
             </a:fld>
             <a:endParaRPr lang="en-BE"/>
           </a:p>
@@ -4086,7 +10662,7 @@
           <a:p>
             <a:fld id="{B21044C9-3718-44C4-9063-5DAD08408240}" type="datetimeFigureOut">
               <a:rPr lang="en-BE" smtClean="0"/>
-              <a:t>19/02/2025</a:t>
+              <a:t>28/03/2025</a:t>
             </a:fld>
             <a:endParaRPr lang="en-BE"/>
           </a:p>
@@ -4228,7 +10804,7 @@
           <a:p>
             <a:fld id="{B21044C9-3718-44C4-9063-5DAD08408240}" type="datetimeFigureOut">
               <a:rPr lang="en-BE" smtClean="0"/>
-              <a:t>19/02/2025</a:t>
+              <a:t>28/03/2025</a:t>
             </a:fld>
             <a:endParaRPr lang="en-BE"/>
           </a:p>
@@ -4341,7 +10917,7 @@
           <a:p>
             <a:fld id="{B21044C9-3718-44C4-9063-5DAD08408240}" type="datetimeFigureOut">
               <a:rPr lang="en-BE" smtClean="0"/>
-              <a:t>19/02/2025</a:t>
+              <a:t>28/03/2025</a:t>
             </a:fld>
             <a:endParaRPr lang="en-BE"/>
           </a:p>
@@ -4654,7 +11230,7 @@
           <a:p>
             <a:fld id="{B21044C9-3718-44C4-9063-5DAD08408240}" type="datetimeFigureOut">
               <a:rPr lang="en-BE" smtClean="0"/>
-              <a:t>19/02/2025</a:t>
+              <a:t>28/03/2025</a:t>
             </a:fld>
             <a:endParaRPr lang="en-BE"/>
           </a:p>
@@ -4897,7 +11473,7 @@
           <a:p>
             <a:fld id="{B21044C9-3718-44C4-9063-5DAD08408240}" type="datetimeFigureOut">
               <a:rPr lang="en-BE" smtClean="0"/>
-              <a:t>19/02/2025</a:t>
+              <a:t>28/03/2025</a:t>
             </a:fld>
             <a:endParaRPr lang="en-BE"/>
           </a:p>
@@ -7076,7 +13652,7 @@
           <p:nvPr/>
         </p:nvPicPr>
         <p:blipFill>
-          <a:blip r:embed="rId2">
+          <a:blip r:embed="rId3">
             <a:extLst>
               <a:ext uri="{28A0092B-C50C-407E-A947-70E740481C1C}">
                 <a14:useLocalDpi xmlns:a14="http://schemas.microsoft.com/office/drawing/2010/main" val="0"/>
@@ -7328,7 +13904,7 @@
           <p:nvPr/>
         </p:nvPicPr>
         <p:blipFill>
-          <a:blip r:embed="rId2">
+          <a:blip r:embed="rId3">
             <a:extLst>
               <a:ext uri="{28A0092B-C50C-407E-A947-70E740481C1C}">
                 <a14:useLocalDpi xmlns:a14="http://schemas.microsoft.com/office/drawing/2010/main" val="0"/>
@@ -8991,7 +15567,7 @@
           <p:nvPr/>
         </p:nvPicPr>
         <p:blipFill>
-          <a:blip r:embed="rId2">
+          <a:blip r:embed="rId3">
             <a:extLst>
               <a:ext uri="{28A0092B-C50C-407E-A947-70E740481C1C}">
                 <a14:useLocalDpi xmlns:a14="http://schemas.microsoft.com/office/drawing/2010/main" val="0"/>
@@ -9324,7 +15900,7 @@
           <p:nvPr/>
         </p:nvPicPr>
         <p:blipFill>
-          <a:blip r:embed="rId2">
+          <a:blip r:embed="rId3">
             <a:extLst>
               <a:ext uri="{28A0092B-C50C-407E-A947-70E740481C1C}">
                 <a14:useLocalDpi xmlns:a14="http://schemas.microsoft.com/office/drawing/2010/main" val="0"/>
@@ -9536,7 +16112,7 @@
           <p:nvPr/>
         </p:nvPicPr>
         <p:blipFill>
-          <a:blip r:embed="rId2">
+          <a:blip r:embed="rId3">
             <a:extLst>
               <a:ext uri="{28A0092B-C50C-407E-A947-70E740481C1C}">
                 <a14:useLocalDpi xmlns:a14="http://schemas.microsoft.com/office/drawing/2010/main" val="0"/>
@@ -10020,7 +16596,7 @@
           <p:nvPr/>
         </p:nvPicPr>
         <p:blipFill>
-          <a:blip r:embed="rId2">
+          <a:blip r:embed="rId3">
             <a:extLst>
               <a:ext uri="{28A0092B-C50C-407E-A947-70E740481C1C}">
                 <a14:useLocalDpi xmlns:a14="http://schemas.microsoft.com/office/drawing/2010/main" val="0"/>
@@ -10214,7 +16790,7 @@
           <p:nvPr/>
         </p:nvPicPr>
         <p:blipFill>
-          <a:blip r:embed="rId2">
+          <a:blip r:embed="rId3">
             <a:extLst>
               <a:ext uri="{28A0092B-C50C-407E-A947-70E740481C1C}">
                 <a14:useLocalDpi xmlns:a14="http://schemas.microsoft.com/office/drawing/2010/main" val="0"/>
@@ -11580,7 +18156,7 @@
           <p:nvPr/>
         </p:nvPicPr>
         <p:blipFill>
-          <a:blip r:embed="rId2"/>
+          <a:blip r:embed="rId3"/>
           <a:stretch>
             <a:fillRect/>
           </a:stretch>
@@ -12586,7 +19162,7 @@
           <p:nvPr/>
         </p:nvPicPr>
         <p:blipFill>
-          <a:blip r:embed="rId2"/>
+          <a:blip r:embed="rId3"/>
           <a:stretch>
             <a:fillRect/>
           </a:stretch>
@@ -12658,7 +19234,7 @@
           <p:nvPr/>
         </p:nvPicPr>
         <p:blipFill>
-          <a:blip r:embed="rId3"/>
+          <a:blip r:embed="rId4"/>
           <a:stretch>
             <a:fillRect/>
           </a:stretch>
@@ -12747,7 +19323,7 @@
           <p:nvPr/>
         </p:nvPicPr>
         <p:blipFill>
-          <a:blip r:embed="rId2"/>
+          <a:blip r:embed="rId3"/>
           <a:stretch>
             <a:fillRect/>
           </a:stretch>
@@ -15060,7 +21636,7 @@
           <p:nvPr/>
         </p:nvPicPr>
         <p:blipFill>
-          <a:blip r:embed="rId2"/>
+          <a:blip r:embed="rId3"/>
           <a:stretch>
             <a:fillRect/>
           </a:stretch>
@@ -15149,7 +21725,7 @@
           <p:nvPr/>
         </p:nvPicPr>
         <p:blipFill>
-          <a:blip r:embed="rId2">
+          <a:blip r:embed="rId3">
             <a:extLst>
               <a:ext uri="{28A0092B-C50C-407E-A947-70E740481C1C}">
                 <a14:useLocalDpi xmlns:a14="http://schemas.microsoft.com/office/drawing/2010/main" val="0"/>
@@ -15778,7 +22354,7 @@
           <p:nvPr/>
         </p:nvPicPr>
         <p:blipFill>
-          <a:blip r:embed="rId2">
+          <a:blip r:embed="rId3">
             <a:extLst>
               <a:ext uri="{28A0092B-C50C-407E-A947-70E740481C1C}">
                 <a14:useLocalDpi xmlns:a14="http://schemas.microsoft.com/office/drawing/2010/main" val="0"/>
@@ -15972,7 +22548,7 @@
           <p:nvPr/>
         </p:nvPicPr>
         <p:blipFill>
-          <a:blip r:embed="rId2">
+          <a:blip r:embed="rId3">
             <a:extLst>
               <a:ext uri="{28A0092B-C50C-407E-A947-70E740481C1C}">
                 <a14:useLocalDpi xmlns:a14="http://schemas.microsoft.com/office/drawing/2010/main" val="0"/>
@@ -16333,7 +22909,7 @@
           <p:nvPr/>
         </p:nvPicPr>
         <p:blipFill>
-          <a:blip r:embed="rId2">
+          <a:blip r:embed="rId3">
             <a:extLst>
               <a:ext uri="{28A0092B-C50C-407E-A947-70E740481C1C}">
                 <a14:useLocalDpi xmlns:a14="http://schemas.microsoft.com/office/drawing/2010/main" val="0"/>
@@ -16428,7 +23004,7 @@
           <p:nvPr/>
         </p:nvPicPr>
         <p:blipFill>
-          <a:blip r:embed="rId2">
+          <a:blip r:embed="rId3">
             <a:extLst>
               <a:ext uri="{28A0092B-C50C-407E-A947-70E740481C1C}">
                 <a14:useLocalDpi xmlns:a14="http://schemas.microsoft.com/office/drawing/2010/main" val="0"/>
@@ -16529,7 +23105,7 @@
           <p:nvPr/>
         </p:nvPicPr>
         <p:blipFill>
-          <a:blip r:embed="rId2"/>
+          <a:blip r:embed="rId3"/>
           <a:stretch>
             <a:fillRect/>
           </a:stretch>
@@ -16559,7 +23135,7 @@
           <p:nvPr/>
         </p:nvPicPr>
         <p:blipFill>
-          <a:blip r:embed="rId3">
+          <a:blip r:embed="rId4">
             <a:extLst>
               <a:ext uri="{28A0092B-C50C-407E-A947-70E740481C1C}">
                 <a14:useLocalDpi xmlns:a14="http://schemas.microsoft.com/office/drawing/2010/main" val="0"/>
@@ -16660,7 +23236,7 @@
           <p:nvPr/>
         </p:nvPicPr>
         <p:blipFill>
-          <a:blip r:embed="rId2">
+          <a:blip r:embed="rId3">
             <a:extLst>
               <a:ext uri="{28A0092B-C50C-407E-A947-70E740481C1C}">
                 <a14:useLocalDpi xmlns:a14="http://schemas.microsoft.com/office/drawing/2010/main" val="0"/>
@@ -16696,7 +23272,7 @@
           <p:nvPr/>
         </p:nvPicPr>
         <p:blipFill>
-          <a:blip r:embed="rId3"/>
+          <a:blip r:embed="rId4"/>
           <a:stretch>
             <a:fillRect/>
           </a:stretch>
@@ -16790,7 +23366,7 @@
           <p:nvPr/>
         </p:nvPicPr>
         <p:blipFill>
-          <a:blip r:embed="rId2"/>
+          <a:blip r:embed="rId3"/>
           <a:stretch>
             <a:fillRect/>
           </a:stretch>
@@ -16820,7 +23396,7 @@
           <p:nvPr/>
         </p:nvPicPr>
         <p:blipFill>
-          <a:blip r:embed="rId3"/>
+          <a:blip r:embed="rId4"/>
           <a:stretch>
             <a:fillRect/>
           </a:stretch>
@@ -18245,7 +24821,7 @@
           <p:nvPr/>
         </p:nvPicPr>
         <p:blipFill>
-          <a:blip r:embed="rId2"/>
+          <a:blip r:embed="rId3"/>
           <a:stretch>
             <a:fillRect/>
           </a:stretch>
@@ -18275,7 +24851,7 @@
           <p:nvPr/>
         </p:nvPicPr>
         <p:blipFill>
-          <a:blip r:embed="rId3"/>
+          <a:blip r:embed="rId4"/>
           <a:stretch>
             <a:fillRect/>
           </a:stretch>
@@ -18341,7 +24917,7 @@
           <p:nvPr/>
         </p:nvPicPr>
         <p:blipFill>
-          <a:blip r:embed="rId3"/>
+          <a:blip r:embed="rId4"/>
           <a:stretch>
             <a:fillRect/>
           </a:stretch>
@@ -18595,7 +25171,7 @@
           <p:nvPr/>
         </p:nvPicPr>
         <p:blipFill>
-          <a:blip r:embed="rId2">
+          <a:blip r:embed="rId3">
             <a:extLst>
               <a:ext uri="{28A0092B-C50C-407E-A947-70E740481C1C}">
                 <a14:useLocalDpi xmlns:a14="http://schemas.microsoft.com/office/drawing/2010/main" val="0"/>
@@ -18690,7 +25266,7 @@
           <p:nvPr/>
         </p:nvPicPr>
         <p:blipFill>
-          <a:blip r:embed="rId2">
+          <a:blip r:embed="rId3">
             <a:extLst>
               <a:ext uri="{28A0092B-C50C-407E-A947-70E740481C1C}">
                 <a14:useLocalDpi xmlns:a14="http://schemas.microsoft.com/office/drawing/2010/main" val="0"/>
@@ -18855,7 +25431,7 @@
           <p:nvPr/>
         </p:nvPicPr>
         <p:blipFill>
-          <a:blip r:embed="rId2">
+          <a:blip r:embed="rId3">
             <a:extLst>
               <a:ext uri="{28A0092B-C50C-407E-A947-70E740481C1C}">
                 <a14:useLocalDpi xmlns:a14="http://schemas.microsoft.com/office/drawing/2010/main" val="0"/>
@@ -18891,7 +25467,7 @@
           <p:nvPr/>
         </p:nvPicPr>
         <p:blipFill>
-          <a:blip r:embed="rId3">
+          <a:blip r:embed="rId4">
             <a:extLst>
               <a:ext uri="{28A0092B-C50C-407E-A947-70E740481C1C}">
                 <a14:useLocalDpi xmlns:a14="http://schemas.microsoft.com/office/drawing/2010/main" val="0"/>
@@ -18927,7 +25503,7 @@
           <p:nvPr/>
         </p:nvPicPr>
         <p:blipFill>
-          <a:blip r:embed="rId4">
+          <a:blip r:embed="rId5">
             <a:extLst>
               <a:ext uri="{28A0092B-C50C-407E-A947-70E740481C1C}">
                 <a14:useLocalDpi xmlns:a14="http://schemas.microsoft.com/office/drawing/2010/main" val="0"/>
@@ -19629,7 +26205,7 @@
           <p:nvPr/>
         </p:nvPicPr>
         <p:blipFill>
-          <a:blip r:embed="rId2">
+          <a:blip r:embed="rId3">
             <a:extLst>
               <a:ext uri="{28A0092B-C50C-407E-A947-70E740481C1C}">
                 <a14:useLocalDpi xmlns:a14="http://schemas.microsoft.com/office/drawing/2010/main" val="0"/>
@@ -19724,7 +26300,7 @@
           <p:nvPr/>
         </p:nvPicPr>
         <p:blipFill>
-          <a:blip r:embed="rId2"/>
+          <a:blip r:embed="rId3"/>
           <a:stretch>
             <a:fillRect/>
           </a:stretch>
@@ -19754,7 +26330,7 @@
           <p:nvPr/>
         </p:nvPicPr>
         <p:blipFill>
-          <a:blip r:embed="rId3"/>
+          <a:blip r:embed="rId4"/>
           <a:stretch>
             <a:fillRect/>
           </a:stretch>
@@ -20705,7 +27281,7 @@
           <p:nvPr/>
         </p:nvPicPr>
         <p:blipFill>
-          <a:blip r:embed="rId2"/>
+          <a:blip r:embed="rId3"/>
           <a:stretch>
             <a:fillRect/>
           </a:stretch>
@@ -20776,7 +27352,7 @@
           <p:nvPr/>
         </p:nvPicPr>
         <p:blipFill>
-          <a:blip r:embed="rId3"/>
+          <a:blip r:embed="rId4"/>
           <a:stretch>
             <a:fillRect/>
           </a:stretch>
@@ -20956,7 +27532,7 @@
           <p:nvPr/>
         </p:nvPicPr>
         <p:blipFill>
-          <a:blip r:embed="rId2">
+          <a:blip r:embed="rId3">
             <a:extLst>
               <a:ext uri="{28A0092B-C50C-407E-A947-70E740481C1C}">
                 <a14:useLocalDpi xmlns:a14="http://schemas.microsoft.com/office/drawing/2010/main" val="0"/>
@@ -21056,7 +27632,7 @@
           <p:nvPr/>
         </p:nvPicPr>
         <p:blipFill>
-          <a:blip r:embed="rId2">
+          <a:blip r:embed="rId3">
             <a:extLst>
               <a:ext uri="{28A0092B-C50C-407E-A947-70E740481C1C}">
                 <a14:useLocalDpi xmlns:a14="http://schemas.microsoft.com/office/drawing/2010/main" val="0"/>
@@ -22833,7 +29409,7 @@
           <p:nvPr/>
         </p:nvPicPr>
         <p:blipFill>
-          <a:blip r:embed="rId2"/>
+          <a:blip r:embed="rId3"/>
           <a:stretch>
             <a:fillRect/>
           </a:stretch>
@@ -23098,7 +29674,7 @@
           <p:nvPr/>
         </p:nvPicPr>
         <p:blipFill>
-          <a:blip r:embed="rId2">
+          <a:blip r:embed="rId3">
             <a:extLst>
               <a:ext uri="{28A0092B-C50C-407E-A947-70E740481C1C}">
                 <a14:useLocalDpi xmlns:a14="http://schemas.microsoft.com/office/drawing/2010/main" val="0"/>
@@ -23263,7 +29839,7 @@
           <p:nvPr/>
         </p:nvPicPr>
         <p:blipFill>
-          <a:blip r:embed="rId2">
+          <a:blip r:embed="rId3">
             <a:extLst>
               <a:ext uri="{28A0092B-C50C-407E-A947-70E740481C1C}">
                 <a14:useLocalDpi xmlns:a14="http://schemas.microsoft.com/office/drawing/2010/main" val="0"/>
@@ -23738,7 +30314,7 @@
           <p:nvPr/>
         </p:nvPicPr>
         <p:blipFill>
-          <a:blip r:embed="rId2"/>
+          <a:blip r:embed="rId3"/>
           <a:stretch>
             <a:fillRect/>
           </a:stretch>
@@ -23768,7 +30344,7 @@
           <p:nvPr/>
         </p:nvPicPr>
         <p:blipFill>
-          <a:blip r:embed="rId3"/>
+          <a:blip r:embed="rId4"/>
           <a:stretch>
             <a:fillRect/>
           </a:stretch>
@@ -23798,7 +30374,7 @@
           <p:nvPr/>
         </p:nvPicPr>
         <p:blipFill>
-          <a:blip r:embed="rId4"/>
+          <a:blip r:embed="rId5"/>
           <a:stretch>
             <a:fillRect/>
           </a:stretch>
@@ -23918,7 +30494,7 @@
             </a:r>
             <a:r>
               <a:rPr lang="en-US" sz="2800" dirty="0">
-                <a:hlinkClick r:id="rId2"/>
+                <a:hlinkClick r:id="rId3"/>
               </a:rPr>
               <a:t>https://www.youtube.com/watch?v=zjMuIxRvygQ</a:t>
             </a:r>
@@ -24908,7 +31484,7 @@
           <p:nvPr/>
         </p:nvPicPr>
         <p:blipFill>
-          <a:blip r:embed="rId2">
+          <a:blip r:embed="rId3">
             <a:extLst>
               <a:ext uri="{28A0092B-C50C-407E-A947-70E740481C1C}">
                 <a14:useLocalDpi xmlns:a14="http://schemas.microsoft.com/office/drawing/2010/main" val="0"/>
@@ -25027,7 +31603,7 @@
           <p:nvPr/>
         </p:nvPicPr>
         <p:blipFill>
-          <a:blip r:embed="rId3">
+          <a:blip r:embed="rId4">
             <a:extLst>
               <a:ext uri="{28A0092B-C50C-407E-A947-70E740481C1C}">
                 <a14:useLocalDpi xmlns:a14="http://schemas.microsoft.com/office/drawing/2010/main" val="0"/>
@@ -25146,7 +31722,7 @@
           <p:nvPr/>
         </p:nvPicPr>
         <p:blipFill>
-          <a:blip r:embed="rId4">
+          <a:blip r:embed="rId5">
             <a:extLst>
               <a:ext uri="{28A0092B-C50C-407E-A947-70E740481C1C}">
                 <a14:useLocalDpi xmlns:a14="http://schemas.microsoft.com/office/drawing/2010/main" val="0"/>

--- a/course/3d_slides_w2.pptx
+++ b/course/3d_slides_w2.pptx
@@ -184,6 +184,9 @@
     <p:ext uri="{EFAFB233-063F-42B5-8137-9DF3F51BA10A}">
       <p15:sldGuideLst xmlns:p15="http://schemas.microsoft.com/office/powerpoint/2012/main"/>
     </p:ext>
+    <p:ext uri="{2D200454-40CA-4A62-9FC3-DE9A4176ACB9}">
+      <p15:notesGuideLst xmlns:p15="http://schemas.microsoft.com/office/powerpoint/2012/main"/>
+    </p:ext>
   </p:extLst>
 </p:presentation>
 </file>
@@ -270,7 +273,7 @@
           <a:p>
             <a:fld id="{64F484BD-A9A3-4CBB-88D6-39267B7F5B46}" type="datetimeFigureOut">
               <a:rPr lang="en-BE" smtClean="0"/>
-              <a:t>28/03/2025</a:t>
+              <a:t>30/05/2025</a:t>
             </a:fld>
             <a:endParaRPr lang="en-BE"/>
           </a:p>
@@ -2879,7 +2882,23 @@
           <a:bodyPr/>
           <a:lstStyle/>
           <a:p>
-            <a:endParaRPr lang="en-BE"/>
+            <a:r>
+              <a:rPr lang="en-US" dirty="0"/>
+              <a:t>Pitch = imagine you head rotating op and down as if nodding “yes”. What line are you rotating around? The one between your ears, X</a:t>
+            </a:r>
+          </a:p>
+          <a:p>
+            <a:r>
+              <a:rPr lang="en-US" dirty="0"/>
+              <a:t>Yaw = imagine your head rotating side to side, as if saying “no” What line are you rotating around? The one from the top of your head to the ground between your feet, Y</a:t>
+            </a:r>
+          </a:p>
+          <a:p>
+            <a:r>
+              <a:rPr lang="en-US" dirty="0"/>
+              <a:t>Roll = turn your head around your nose, moving the horizon. What line are you rotating around? The same one as if you were pointing straight forward, Z</a:t>
+            </a:r>
+            <a:endParaRPr lang="en-BE" dirty="0"/>
           </a:p>
         </p:txBody>
       </p:sp>
@@ -5025,7 +5044,7 @@
           <a:bodyPr/>
           <a:lstStyle/>
           <a:p>
-            <a:endParaRPr lang="en-BE"/>
+            <a:endParaRPr lang="en-BE" dirty="0"/>
           </a:p>
         </p:txBody>
       </p:sp>
@@ -5781,7 +5800,11 @@
           <a:bodyPr/>
           <a:lstStyle/>
           <a:p>
-            <a:endParaRPr lang="en-BE"/>
+            <a:r>
+              <a:rPr lang="en-US" dirty="0"/>
+              <a:t>You don’t need to know the definition the definitions, only that it computes a degree of closeness.</a:t>
+            </a:r>
+            <a:endParaRPr lang="en-BE" dirty="0"/>
           </a:p>
         </p:txBody>
       </p:sp>
@@ -5865,7 +5888,16 @@
           <a:bodyPr/>
           <a:lstStyle/>
           <a:p>
-            <a:endParaRPr lang="en-BE"/>
+            <a:r>
+              <a:rPr lang="en-US" dirty="0"/>
+              <a:t>Unit vector == length one</a:t>
+            </a:r>
+          </a:p>
+          <a:p>
+            <a:r>
+              <a:rPr lang="en-US" dirty="0"/>
+              <a:t>If we have 2 unit vectors (I also call them directions), the result of the dot product will always be between -1 and 1 where 1 is that both vectors are identical.</a:t>
+            </a:r>
           </a:p>
         </p:txBody>
       </p:sp>
@@ -6047,7 +6079,7 @@
             </a:r>
             <a:r>
               <a:rPr lang="en-US" dirty="0"/>
-              <a:t>, so I’m in the habit of normalizing it.</a:t>
+              <a:t>, so I’m in the habit of normalizing it. You should too.</a:t>
             </a:r>
           </a:p>
         </p:txBody>
@@ -6165,7 +6197,7 @@
             </a:r>
             <a:r>
               <a:rPr lang="en-US" dirty="0"/>
-              <a:t>, as normal are </a:t>
+              <a:t>, as normal are always length 1</a:t>
             </a:r>
             <a:endParaRPr lang="en-BE" dirty="0"/>
           </a:p>
@@ -8951,7 +8983,7 @@
           <a:p>
             <a:fld id="{B21044C9-3718-44C4-9063-5DAD08408240}" type="datetimeFigureOut">
               <a:rPr lang="en-BE" smtClean="0"/>
-              <a:t>28/03/2025</a:t>
+              <a:t>30/05/2025</a:t>
             </a:fld>
             <a:endParaRPr lang="en-BE"/>
           </a:p>
@@ -9151,7 +9183,7 @@
           <a:p>
             <a:fld id="{B21044C9-3718-44C4-9063-5DAD08408240}" type="datetimeFigureOut">
               <a:rPr lang="en-BE" smtClean="0"/>
-              <a:t>28/03/2025</a:t>
+              <a:t>30/05/2025</a:t>
             </a:fld>
             <a:endParaRPr lang="en-BE"/>
           </a:p>
@@ -9361,7 +9393,7 @@
           <a:p>
             <a:fld id="{B21044C9-3718-44C4-9063-5DAD08408240}" type="datetimeFigureOut">
               <a:rPr lang="en-BE" smtClean="0"/>
-              <a:t>28/03/2025</a:t>
+              <a:t>30/05/2025</a:t>
             </a:fld>
             <a:endParaRPr lang="en-BE"/>
           </a:p>
@@ -9503,7 +9535,7 @@
           <a:p>
             <a:fld id="{B21044C9-3718-44C4-9063-5DAD08408240}" type="datetimeFigureOut">
               <a:rPr lang="en-BE" smtClean="0"/>
-              <a:t>28/03/2025</a:t>
+              <a:t>30/05/2025</a:t>
             </a:fld>
             <a:endParaRPr lang="en-BE"/>
           </a:p>
@@ -9703,7 +9735,7 @@
           <a:p>
             <a:fld id="{B21044C9-3718-44C4-9063-5DAD08408240}" type="datetimeFigureOut">
               <a:rPr lang="en-BE" smtClean="0"/>
-              <a:t>28/03/2025</a:t>
+              <a:t>30/05/2025</a:t>
             </a:fld>
             <a:endParaRPr lang="en-BE"/>
           </a:p>
@@ -9979,7 +10011,7 @@
           <a:p>
             <a:fld id="{B21044C9-3718-44C4-9063-5DAD08408240}" type="datetimeFigureOut">
               <a:rPr lang="en-BE" smtClean="0"/>
-              <a:t>28/03/2025</a:t>
+              <a:t>30/05/2025</a:t>
             </a:fld>
             <a:endParaRPr lang="en-BE"/>
           </a:p>
@@ -10247,7 +10279,7 @@
           <a:p>
             <a:fld id="{B21044C9-3718-44C4-9063-5DAD08408240}" type="datetimeFigureOut">
               <a:rPr lang="en-BE" smtClean="0"/>
-              <a:t>28/03/2025</a:t>
+              <a:t>30/05/2025</a:t>
             </a:fld>
             <a:endParaRPr lang="en-BE"/>
           </a:p>
@@ -10662,7 +10694,7 @@
           <a:p>
             <a:fld id="{B21044C9-3718-44C4-9063-5DAD08408240}" type="datetimeFigureOut">
               <a:rPr lang="en-BE" smtClean="0"/>
-              <a:t>28/03/2025</a:t>
+              <a:t>30/05/2025</a:t>
             </a:fld>
             <a:endParaRPr lang="en-BE"/>
           </a:p>
@@ -10804,7 +10836,7 @@
           <a:p>
             <a:fld id="{B21044C9-3718-44C4-9063-5DAD08408240}" type="datetimeFigureOut">
               <a:rPr lang="en-BE" smtClean="0"/>
-              <a:t>28/03/2025</a:t>
+              <a:t>30/05/2025</a:t>
             </a:fld>
             <a:endParaRPr lang="en-BE"/>
           </a:p>
@@ -10917,7 +10949,7 @@
           <a:p>
             <a:fld id="{B21044C9-3718-44C4-9063-5DAD08408240}" type="datetimeFigureOut">
               <a:rPr lang="en-BE" smtClean="0"/>
-              <a:t>28/03/2025</a:t>
+              <a:t>30/05/2025</a:t>
             </a:fld>
             <a:endParaRPr lang="en-BE"/>
           </a:p>
@@ -11230,7 +11262,7 @@
           <a:p>
             <a:fld id="{B21044C9-3718-44C4-9063-5DAD08408240}" type="datetimeFigureOut">
               <a:rPr lang="en-BE" smtClean="0"/>
-              <a:t>28/03/2025</a:t>
+              <a:t>30/05/2025</a:t>
             </a:fld>
             <a:endParaRPr lang="en-BE"/>
           </a:p>
@@ -11473,7 +11505,7 @@
           <a:p>
             <a:fld id="{B21044C9-3718-44C4-9063-5DAD08408240}" type="datetimeFigureOut">
               <a:rPr lang="en-BE" smtClean="0"/>
-              <a:t>28/03/2025</a:t>
+              <a:t>30/05/2025</a:t>
             </a:fld>
             <a:endParaRPr lang="en-BE"/>
           </a:p>
